--- a/figures/Fig2_dating_correction_v2.pptx
+++ b/figures/Fig2_dating_correction_v2.pptx
@@ -2223,9 +2223,9 @@
         <p:grpSpPr>
           <a:xfrm>
             <a:off x="182880" y="182880"/>
-            <a:ext cx="10241280" cy="6766560"/>
+            <a:ext cx="8229600" cy="5852160"/>
             <a:chOff x="182880" y="182880"/>
-            <a:chExt cx="10241280" cy="6766560"/>
+            <a:chExt cx="8229600" cy="5852160"/>
           </a:xfrm>
         </p:grpSpPr>
         <p:sp>
@@ -2237,7 +2237,7 @@
           <p:spPr>
             <a:xfrm>
               <a:off x="182880" y="182880"/>
-              <a:ext cx="10241280" cy="6766560"/>
+              <a:ext cx="8229600" cy="5852160"/>
             </a:xfrm>
             <a:prstGeom prst="rect">
               <a:avLst/>
@@ -2272,7 +2272,7 @@
           <p:spPr>
             <a:xfrm>
               <a:off x="182880" y="182880"/>
-              <a:ext cx="10241280" cy="6766560"/>
+              <a:ext cx="8229600" cy="5852160"/>
             </a:xfrm>
             <a:prstGeom prst="rect">
               <a:avLst/>
@@ -2306,8 +2306,8 @@
           </p:nvSpPr>
           <p:spPr>
             <a:xfrm>
-              <a:off x="252469" y="3700757"/>
-              <a:ext cx="10102101" cy="3179093"/>
+              <a:off x="252469" y="3299618"/>
+              <a:ext cx="8090421" cy="2665832"/>
             </a:xfrm>
             <a:prstGeom prst="rect">
               <a:avLst/>
@@ -2317,7 +2317,7 @@
                 <a:alpha val="100000"/>
               </a:srgbClr>
             </a:solidFill>
-            <a:ln w="11086" cap="rnd">
+            <a:ln w="12318" cap="rnd">
               <a:solidFill>
                 <a:srgbClr val="FFFFFF">
                   <a:alpha val="100000"/>
@@ -2342,7 +2342,7 @@
           <p:spPr>
             <a:xfrm>
               <a:off x="252469" y="252469"/>
-              <a:ext cx="4377382" cy="3448288"/>
+              <a:ext cx="3296245" cy="3047149"/>
             </a:xfrm>
             <a:prstGeom prst="rect">
               <a:avLst/>
@@ -2352,7 +2352,7 @@
                 <a:alpha val="100000"/>
               </a:srgbClr>
             </a:solidFill>
-            <a:ln w="11086" cap="rnd">
+            <a:ln w="12318" cap="rnd">
               <a:solidFill>
                 <a:srgbClr val="FFFFFF">
                   <a:alpha val="100000"/>
@@ -2376,8 +2376,8 @@
           </p:nvSpPr>
           <p:spPr>
             <a:xfrm>
-              <a:off x="4629851" y="252469"/>
-              <a:ext cx="5724719" cy="3448288"/>
+              <a:off x="3548714" y="252469"/>
+              <a:ext cx="4794176" cy="3047149"/>
             </a:xfrm>
             <a:prstGeom prst="rect">
               <a:avLst/>
@@ -2387,7 +2387,7 @@
                 <a:alpha val="100000"/>
               </a:srgbClr>
             </a:solidFill>
-            <a:ln w="11086" cap="rnd">
+            <a:ln w="12318" cap="rnd">
               <a:solidFill>
                 <a:srgbClr val="FFFFFF">
                   <a:alpha val="100000"/>
@@ -2411,8 +2411,8 @@
           </p:nvSpPr>
           <p:spPr>
             <a:xfrm>
-              <a:off x="691444" y="656226"/>
-              <a:ext cx="3837186" cy="2698617"/>
+              <a:off x="729470" y="806953"/>
+              <a:ext cx="2718023" cy="2116315"/>
             </a:xfrm>
             <a:prstGeom prst="rect">
               <a:avLst/>
@@ -2437,21 +2437,21 @@
           </p:nvSpPr>
           <p:spPr>
             <a:xfrm>
-              <a:off x="691444" y="3232180"/>
-              <a:ext cx="3837186" cy="0"/>
+              <a:off x="729470" y="2827072"/>
+              <a:ext cx="2718023" cy="0"/>
             </a:xfrm>
             <a:custGeom>
               <a:avLst/>
               <a:pathLst>
-                <a:path w="3837186" h="0">
+                <a:path w="2718023" h="0">
                   <a:moveTo>
                     <a:pt x="0" y="0"/>
                   </a:moveTo>
                   <a:lnTo>
-                    <a:pt x="3837186" y="0"/>
-                  </a:lnTo>
-                  <a:lnTo>
-                    <a:pt x="3837186" y="0"/>
+                    <a:pt x="2718023" y="0"/>
+                  </a:lnTo>
+                  <a:lnTo>
+                    <a:pt x="2718023" y="0"/>
                   </a:lnTo>
                 </a:path>
               </a:pathLst>
@@ -2480,21 +2480,21 @@
           </p:nvSpPr>
           <p:spPr>
             <a:xfrm>
-              <a:off x="691444" y="2617074"/>
-              <a:ext cx="3837186" cy="0"/>
+              <a:off x="729470" y="2344693"/>
+              <a:ext cx="2718023" cy="0"/>
             </a:xfrm>
             <a:custGeom>
               <a:avLst/>
               <a:pathLst>
-                <a:path w="3837186" h="0">
+                <a:path w="2718023" h="0">
                   <a:moveTo>
                     <a:pt x="0" y="0"/>
                   </a:moveTo>
                   <a:lnTo>
-                    <a:pt x="3837186" y="0"/>
-                  </a:lnTo>
-                  <a:lnTo>
-                    <a:pt x="3837186" y="0"/>
+                    <a:pt x="2718023" y="0"/>
+                  </a:lnTo>
+                  <a:lnTo>
+                    <a:pt x="2718023" y="0"/>
                   </a:lnTo>
                 </a:path>
               </a:pathLst>
@@ -2523,21 +2523,21 @@
           </p:nvSpPr>
           <p:spPr>
             <a:xfrm>
-              <a:off x="691444" y="2001968"/>
-              <a:ext cx="3837186" cy="0"/>
+              <a:off x="729470" y="1862313"/>
+              <a:ext cx="2718023" cy="0"/>
             </a:xfrm>
             <a:custGeom>
               <a:avLst/>
               <a:pathLst>
-                <a:path w="3837186" h="0">
+                <a:path w="2718023" h="0">
                   <a:moveTo>
                     <a:pt x="0" y="0"/>
                   </a:moveTo>
                   <a:lnTo>
-                    <a:pt x="3837186" y="0"/>
-                  </a:lnTo>
-                  <a:lnTo>
-                    <a:pt x="3837186" y="0"/>
+                    <a:pt x="2718023" y="0"/>
+                  </a:lnTo>
+                  <a:lnTo>
+                    <a:pt x="2718023" y="0"/>
                   </a:lnTo>
                 </a:path>
               </a:pathLst>
@@ -2566,21 +2566,21 @@
           </p:nvSpPr>
           <p:spPr>
             <a:xfrm>
-              <a:off x="691444" y="1386862"/>
-              <a:ext cx="3837186" cy="0"/>
+              <a:off x="729470" y="1379934"/>
+              <a:ext cx="2718023" cy="0"/>
             </a:xfrm>
             <a:custGeom>
               <a:avLst/>
               <a:pathLst>
-                <a:path w="3837186" h="0">
+                <a:path w="2718023" h="0">
                   <a:moveTo>
                     <a:pt x="0" y="0"/>
                   </a:moveTo>
                   <a:lnTo>
-                    <a:pt x="3837186" y="0"/>
-                  </a:lnTo>
-                  <a:lnTo>
-                    <a:pt x="3837186" y="0"/>
+                    <a:pt x="2718023" y="0"/>
+                  </a:lnTo>
+                  <a:lnTo>
+                    <a:pt x="2718023" y="0"/>
                   </a:lnTo>
                 </a:path>
               </a:pathLst>
@@ -2609,21 +2609,21 @@
           </p:nvSpPr>
           <p:spPr>
             <a:xfrm>
-              <a:off x="691444" y="771756"/>
-              <a:ext cx="3837186" cy="0"/>
+              <a:off x="729470" y="897554"/>
+              <a:ext cx="2718023" cy="0"/>
             </a:xfrm>
             <a:custGeom>
               <a:avLst/>
               <a:pathLst>
-                <a:path w="3837186" h="0">
+                <a:path w="2718023" h="0">
                   <a:moveTo>
                     <a:pt x="0" y="0"/>
                   </a:moveTo>
                   <a:lnTo>
-                    <a:pt x="3837186" y="0"/>
-                  </a:lnTo>
-                  <a:lnTo>
-                    <a:pt x="3837186" y="0"/>
+                    <a:pt x="2718023" y="0"/>
+                  </a:lnTo>
+                  <a:lnTo>
+                    <a:pt x="2718023" y="0"/>
                   </a:lnTo>
                 </a:path>
               </a:pathLst>
@@ -2652,8 +2652,8 @@
           </p:nvSpPr>
           <p:spPr>
             <a:xfrm>
-              <a:off x="865861" y="2803820"/>
-              <a:ext cx="111925" cy="428359"/>
+              <a:off x="853016" y="2491143"/>
+              <a:ext cx="79281" cy="335929"/>
             </a:xfrm>
             <a:prstGeom prst="rect">
               <a:avLst/>
@@ -2678,8 +2678,8 @@
           </p:nvSpPr>
           <p:spPr>
             <a:xfrm>
-              <a:off x="1015096" y="2277289"/>
-              <a:ext cx="111925" cy="954890"/>
+              <a:off x="958725" y="2078226"/>
+              <a:ext cx="79281" cy="748846"/>
             </a:xfrm>
             <a:prstGeom prst="rect">
               <a:avLst/>
@@ -2704,8 +2704,8 @@
           </p:nvSpPr>
           <p:spPr>
             <a:xfrm>
-              <a:off x="1164330" y="2830146"/>
-              <a:ext cx="111925" cy="402033"/>
+              <a:off x="1064433" y="2511789"/>
+              <a:ext cx="79281" cy="315283"/>
             </a:xfrm>
             <a:prstGeom prst="rect">
               <a:avLst/>
@@ -2730,8 +2730,8 @@
           </p:nvSpPr>
           <p:spPr>
             <a:xfrm>
-              <a:off x="1313564" y="2983185"/>
-              <a:ext cx="111925" cy="248994"/>
+              <a:off x="1170141" y="2631805"/>
+              <a:ext cx="79281" cy="195267"/>
             </a:xfrm>
             <a:prstGeom prst="rect">
               <a:avLst/>
@@ -2756,8 +2756,8 @@
           </p:nvSpPr>
           <p:spPr>
             <a:xfrm>
-              <a:off x="1462799" y="3083816"/>
-              <a:ext cx="111925" cy="148363"/>
+              <a:off x="1275849" y="2710723"/>
+              <a:ext cx="79281" cy="116349"/>
             </a:xfrm>
             <a:prstGeom prst="rect">
               <a:avLst/>
@@ -2782,8 +2782,8 @@
           </p:nvSpPr>
           <p:spPr>
             <a:xfrm>
-              <a:off x="1612033" y="3162796"/>
-              <a:ext cx="111925" cy="69383"/>
+              <a:off x="1381558" y="2772660"/>
+              <a:ext cx="79281" cy="54412"/>
             </a:xfrm>
             <a:prstGeom prst="rect">
               <a:avLst/>
@@ -2808,8 +2808,8 @@
           </p:nvSpPr>
           <p:spPr>
             <a:xfrm>
-              <a:off x="1761267" y="3191583"/>
-              <a:ext cx="111925" cy="40596"/>
+              <a:off x="1487266" y="2795235"/>
+              <a:ext cx="79281" cy="31837"/>
             </a:xfrm>
             <a:prstGeom prst="rect">
               <a:avLst/>
@@ -2834,8 +2834,8 @@
           </p:nvSpPr>
           <p:spPr>
             <a:xfrm>
-              <a:off x="1910501" y="3198718"/>
-              <a:ext cx="111925" cy="33461"/>
+              <a:off x="1592974" y="2800831"/>
+              <a:ext cx="79281" cy="26241"/>
             </a:xfrm>
             <a:prstGeom prst="rect">
               <a:avLst/>
@@ -2860,8 +2860,8 @@
           </p:nvSpPr>
           <p:spPr>
             <a:xfrm>
-              <a:off x="2059736" y="3203393"/>
-              <a:ext cx="111925" cy="28786"/>
+              <a:off x="1698682" y="2804497"/>
+              <a:ext cx="79281" cy="22575"/>
             </a:xfrm>
             <a:prstGeom prst="rect">
               <a:avLst/>
@@ -2886,8 +2886,8 @@
           </p:nvSpPr>
           <p:spPr>
             <a:xfrm>
-              <a:off x="2208970" y="3217909"/>
-              <a:ext cx="111925" cy="14270"/>
+              <a:off x="1804391" y="2815881"/>
+              <a:ext cx="79281" cy="11191"/>
             </a:xfrm>
             <a:prstGeom prst="rect">
               <a:avLst/>
@@ -2912,8 +2912,8 @@
           </p:nvSpPr>
           <p:spPr>
             <a:xfrm>
-              <a:off x="2358204" y="3208314"/>
-              <a:ext cx="111925" cy="23866"/>
+              <a:off x="1910099" y="2808356"/>
+              <a:ext cx="79281" cy="18716"/>
             </a:xfrm>
             <a:prstGeom prst="rect">
               <a:avLst/>
@@ -2938,8 +2938,8 @@
           </p:nvSpPr>
           <p:spPr>
             <a:xfrm>
-              <a:off x="2507439" y="3215449"/>
-              <a:ext cx="111925" cy="16730"/>
+              <a:off x="2015807" y="2813952"/>
+              <a:ext cx="79281" cy="13120"/>
             </a:xfrm>
             <a:prstGeom prst="rect">
               <a:avLst/>
@@ -2964,8 +2964,8 @@
           </p:nvSpPr>
           <p:spPr>
             <a:xfrm>
-              <a:off x="2656673" y="3229719"/>
-              <a:ext cx="111925" cy="2460"/>
+              <a:off x="2121515" y="2825143"/>
+              <a:ext cx="79281" cy="1929"/>
             </a:xfrm>
             <a:prstGeom prst="rect">
               <a:avLst/>
@@ -2990,81 +2990,81 @@
           </p:nvSpPr>
           <p:spPr>
             <a:xfrm>
-              <a:off x="1071058" y="778891"/>
-              <a:ext cx="3283154" cy="1057736"/>
+              <a:off x="998365" y="903150"/>
+              <a:ext cx="2325581" cy="829500"/>
             </a:xfrm>
             <a:custGeom>
               <a:avLst/>
               <a:pathLst>
-                <a:path w="3283154" h="1057736">
+                <a:path w="2325581" h="829500">
                   <a:moveTo>
-                    <a:pt x="0" y="1057736"/>
+                    <a:pt x="0" y="829500"/>
                   </a:moveTo>
                   <a:lnTo>
-                    <a:pt x="149234" y="652012"/>
-                  </a:lnTo>
-                  <a:lnTo>
-                    <a:pt x="298468" y="400803"/>
-                  </a:lnTo>
-                  <a:lnTo>
-                    <a:pt x="447702" y="251209"/>
-                  </a:lnTo>
-                  <a:lnTo>
-                    <a:pt x="596937" y="181087"/>
-                  </a:lnTo>
-                  <a:lnTo>
-                    <a:pt x="746171" y="140244"/>
-                  </a:lnTo>
-                  <a:lnTo>
-                    <a:pt x="895405" y="106290"/>
-                  </a:lnTo>
-                  <a:lnTo>
-                    <a:pt x="1044640" y="77257"/>
-                  </a:lnTo>
-                  <a:lnTo>
-                    <a:pt x="1193874" y="62986"/>
-                  </a:lnTo>
-                  <a:lnTo>
-                    <a:pt x="1343108" y="38628"/>
-                  </a:lnTo>
-                  <a:lnTo>
-                    <a:pt x="1492342" y="21897"/>
-                  </a:lnTo>
-                  <a:lnTo>
-                    <a:pt x="1641577" y="19437"/>
-                  </a:lnTo>
-                  <a:lnTo>
-                    <a:pt x="1790811" y="12302"/>
-                  </a:lnTo>
-                  <a:lnTo>
-                    <a:pt x="1940045" y="2460"/>
-                  </a:lnTo>
-                  <a:lnTo>
-                    <a:pt x="2089280" y="2460"/>
-                  </a:lnTo>
-                  <a:lnTo>
-                    <a:pt x="2238514" y="2460"/>
-                  </a:lnTo>
-                  <a:lnTo>
-                    <a:pt x="2387748" y="2460"/>
-                  </a:lnTo>
-                  <a:lnTo>
-                    <a:pt x="2536983" y="2460"/>
-                  </a:lnTo>
-                  <a:lnTo>
-                    <a:pt x="2686217" y="2460"/>
-                  </a:lnTo>
-                  <a:lnTo>
-                    <a:pt x="2835451" y="2460"/>
-                  </a:lnTo>
-                  <a:lnTo>
-                    <a:pt x="2984685" y="2460"/>
-                  </a:lnTo>
-                  <a:lnTo>
-                    <a:pt x="3133920" y="0"/>
-                  </a:lnTo>
-                  <a:lnTo>
-                    <a:pt x="3283154" y="0"/>
+                    <a:pt x="105708" y="511322"/>
+                  </a:lnTo>
+                  <a:lnTo>
+                    <a:pt x="211416" y="314318"/>
+                  </a:lnTo>
+                  <a:lnTo>
+                    <a:pt x="317124" y="197003"/>
+                  </a:lnTo>
+                  <a:lnTo>
+                    <a:pt x="422832" y="142012"/>
+                  </a:lnTo>
+                  <a:lnTo>
+                    <a:pt x="528541" y="109982"/>
+                  </a:lnTo>
+                  <a:lnTo>
+                    <a:pt x="634249" y="83355"/>
+                  </a:lnTo>
+                  <a:lnTo>
+                    <a:pt x="739957" y="60586"/>
+                  </a:lnTo>
+                  <a:lnTo>
+                    <a:pt x="845665" y="49395"/>
+                  </a:lnTo>
+                  <a:lnTo>
+                    <a:pt x="951374" y="30293"/>
+                  </a:lnTo>
+                  <a:lnTo>
+                    <a:pt x="1057082" y="17172"/>
+                  </a:lnTo>
+                  <a:lnTo>
+                    <a:pt x="1162790" y="15243"/>
+                  </a:lnTo>
+                  <a:lnTo>
+                    <a:pt x="1268498" y="9647"/>
+                  </a:lnTo>
+                  <a:lnTo>
+                    <a:pt x="1374207" y="1929"/>
+                  </a:lnTo>
+                  <a:lnTo>
+                    <a:pt x="1479915" y="1929"/>
+                  </a:lnTo>
+                  <a:lnTo>
+                    <a:pt x="1585623" y="1929"/>
+                  </a:lnTo>
+                  <a:lnTo>
+                    <a:pt x="1691331" y="1929"/>
+                  </a:lnTo>
+                  <a:lnTo>
+                    <a:pt x="1797040" y="1929"/>
+                  </a:lnTo>
+                  <a:lnTo>
+                    <a:pt x="1902748" y="1929"/>
+                  </a:lnTo>
+                  <a:lnTo>
+                    <a:pt x="2008456" y="1929"/>
+                  </a:lnTo>
+                  <a:lnTo>
+                    <a:pt x="2114164" y="1929"/>
+                  </a:lnTo>
+                  <a:lnTo>
+                    <a:pt x="2219873" y="0"/>
+                  </a:lnTo>
+                  <a:lnTo>
+                    <a:pt x="2325581" y="0"/>
                   </a:lnTo>
                 </a:path>
               </a:pathLst>
@@ -3093,8 +3093,8 @@
           </p:nvSpPr>
           <p:spPr>
             <a:xfrm>
-              <a:off x="4335626" y="760303"/>
-              <a:ext cx="37175" cy="37175"/>
+              <a:off x="3304950" y="884153"/>
+              <a:ext cx="37993" cy="37993"/>
             </a:xfrm>
             <a:prstGeom prst="ellipse">
               <a:avLst/>
@@ -3104,7 +3104,7 @@
                 <a:alpha val="100000"/>
               </a:srgbClr>
             </a:solidFill>
-            <a:ln w="7363" cap="rnd">
+            <a:ln w="8181" cap="rnd">
               <a:solidFill>
                 <a:srgbClr val="D55E00">
                   <a:alpha val="100000"/>
@@ -3128,8 +3128,8 @@
           </p:nvSpPr>
           <p:spPr>
             <a:xfrm>
-              <a:off x="4186391" y="760303"/>
-              <a:ext cx="37175" cy="37175"/>
+              <a:off x="3199242" y="884153"/>
+              <a:ext cx="37993" cy="37993"/>
             </a:xfrm>
             <a:prstGeom prst="ellipse">
               <a:avLst/>
@@ -3139,7 +3139,7 @@
                 <a:alpha val="100000"/>
               </a:srgbClr>
             </a:solidFill>
-            <a:ln w="7363" cap="rnd">
+            <a:ln w="8181" cap="rnd">
               <a:solidFill>
                 <a:srgbClr val="D55E00">
                   <a:alpha val="100000"/>
@@ -3163,8 +3163,8 @@
           </p:nvSpPr>
           <p:spPr>
             <a:xfrm>
-              <a:off x="4037157" y="762764"/>
-              <a:ext cx="37175" cy="37175"/>
+              <a:off x="3093534" y="886082"/>
+              <a:ext cx="37993" cy="37993"/>
             </a:xfrm>
             <a:prstGeom prst="ellipse">
               <a:avLst/>
@@ -3174,7 +3174,7 @@
                 <a:alpha val="100000"/>
               </a:srgbClr>
             </a:solidFill>
-            <a:ln w="7363" cap="rnd">
+            <a:ln w="8181" cap="rnd">
               <a:solidFill>
                 <a:srgbClr val="D55E00">
                   <a:alpha val="100000"/>
@@ -3198,8 +3198,8 @@
           </p:nvSpPr>
           <p:spPr>
             <a:xfrm>
-              <a:off x="3887923" y="762764"/>
-              <a:ext cx="37175" cy="37175"/>
+              <a:off x="2987825" y="886082"/>
+              <a:ext cx="37993" cy="37993"/>
             </a:xfrm>
             <a:prstGeom prst="ellipse">
               <a:avLst/>
@@ -3209,7 +3209,7 @@
                 <a:alpha val="100000"/>
               </a:srgbClr>
             </a:solidFill>
-            <a:ln w="7363" cap="rnd">
+            <a:ln w="8181" cap="rnd">
               <a:solidFill>
                 <a:srgbClr val="D55E00">
                   <a:alpha val="100000"/>
@@ -3233,8 +3233,8 @@
           </p:nvSpPr>
           <p:spPr>
             <a:xfrm>
-              <a:off x="3738688" y="762764"/>
-              <a:ext cx="37175" cy="37175"/>
+              <a:off x="2882117" y="886082"/>
+              <a:ext cx="37993" cy="37993"/>
             </a:xfrm>
             <a:prstGeom prst="ellipse">
               <a:avLst/>
@@ -3244,7 +3244,7 @@
                 <a:alpha val="100000"/>
               </a:srgbClr>
             </a:solidFill>
-            <a:ln w="7363" cap="rnd">
+            <a:ln w="8181" cap="rnd">
               <a:solidFill>
                 <a:srgbClr val="D55E00">
                   <a:alpha val="100000"/>
@@ -3268,8 +3268,8 @@
           </p:nvSpPr>
           <p:spPr>
             <a:xfrm>
-              <a:off x="3589454" y="762764"/>
-              <a:ext cx="37175" cy="37175"/>
+              <a:off x="2776409" y="886082"/>
+              <a:ext cx="37993" cy="37993"/>
             </a:xfrm>
             <a:prstGeom prst="ellipse">
               <a:avLst/>
@@ -3279,7 +3279,7 @@
                 <a:alpha val="100000"/>
               </a:srgbClr>
             </a:solidFill>
-            <a:ln w="7363" cap="rnd">
+            <a:ln w="8181" cap="rnd">
               <a:solidFill>
                 <a:srgbClr val="D55E00">
                   <a:alpha val="100000"/>
@@ -3303,8 +3303,8 @@
           </p:nvSpPr>
           <p:spPr>
             <a:xfrm>
-              <a:off x="3440220" y="762764"/>
-              <a:ext cx="37175" cy="37175"/>
+              <a:off x="2670701" y="886082"/>
+              <a:ext cx="37993" cy="37993"/>
             </a:xfrm>
             <a:prstGeom prst="ellipse">
               <a:avLst/>
@@ -3314,7 +3314,7 @@
                 <a:alpha val="100000"/>
               </a:srgbClr>
             </a:solidFill>
-            <a:ln w="7363" cap="rnd">
+            <a:ln w="8181" cap="rnd">
               <a:solidFill>
                 <a:srgbClr val="D55E00">
                   <a:alpha val="100000"/>
@@ -3338,8 +3338,8 @@
           </p:nvSpPr>
           <p:spPr>
             <a:xfrm>
-              <a:off x="3290985" y="762764"/>
-              <a:ext cx="37175" cy="37175"/>
+              <a:off x="2564992" y="886082"/>
+              <a:ext cx="37993" cy="37993"/>
             </a:xfrm>
             <a:prstGeom prst="ellipse">
               <a:avLst/>
@@ -3349,7 +3349,7 @@
                 <a:alpha val="100000"/>
               </a:srgbClr>
             </a:solidFill>
-            <a:ln w="7363" cap="rnd">
+            <a:ln w="8181" cap="rnd">
               <a:solidFill>
                 <a:srgbClr val="D55E00">
                   <a:alpha val="100000"/>
@@ -3373,8 +3373,8 @@
           </p:nvSpPr>
           <p:spPr>
             <a:xfrm>
-              <a:off x="3141751" y="762764"/>
-              <a:ext cx="37175" cy="37175"/>
+              <a:off x="2459284" y="886082"/>
+              <a:ext cx="37993" cy="37993"/>
             </a:xfrm>
             <a:prstGeom prst="ellipse">
               <a:avLst/>
@@ -3384,7 +3384,7 @@
                 <a:alpha val="100000"/>
               </a:srgbClr>
             </a:solidFill>
-            <a:ln w="7363" cap="rnd">
+            <a:ln w="8181" cap="rnd">
               <a:solidFill>
                 <a:srgbClr val="D55E00">
                   <a:alpha val="100000"/>
@@ -3408,8 +3408,8 @@
           </p:nvSpPr>
           <p:spPr>
             <a:xfrm>
-              <a:off x="2992517" y="762764"/>
-              <a:ext cx="37175" cy="37175"/>
+              <a:off x="2353576" y="886082"/>
+              <a:ext cx="37993" cy="37993"/>
             </a:xfrm>
             <a:prstGeom prst="ellipse">
               <a:avLst/>
@@ -3419,7 +3419,7 @@
                 <a:alpha val="100000"/>
               </a:srgbClr>
             </a:solidFill>
-            <a:ln w="7363" cap="rnd">
+            <a:ln w="8181" cap="rnd">
               <a:solidFill>
                 <a:srgbClr val="D55E00">
                   <a:alpha val="100000"/>
@@ -3443,8 +3443,8 @@
           </p:nvSpPr>
           <p:spPr>
             <a:xfrm>
-              <a:off x="2843283" y="772605"/>
-              <a:ext cx="37175" cy="37175"/>
+              <a:off x="2247868" y="893801"/>
+              <a:ext cx="37993" cy="37993"/>
             </a:xfrm>
             <a:prstGeom prst="ellipse">
               <a:avLst/>
@@ -3454,7 +3454,7 @@
                 <a:alpha val="100000"/>
               </a:srgbClr>
             </a:solidFill>
-            <a:ln w="7363" cap="rnd">
+            <a:ln w="8181" cap="rnd">
               <a:solidFill>
                 <a:srgbClr val="D55E00">
                   <a:alpha val="100000"/>
@@ -3478,8 +3478,8 @@
           </p:nvSpPr>
           <p:spPr>
             <a:xfrm>
-              <a:off x="2694048" y="779741"/>
-              <a:ext cx="37175" cy="37175"/>
+              <a:off x="2142159" y="899396"/>
+              <a:ext cx="37993" cy="37993"/>
             </a:xfrm>
             <a:prstGeom prst="ellipse">
               <a:avLst/>
@@ -3489,7 +3489,7 @@
                 <a:alpha val="100000"/>
               </a:srgbClr>
             </a:solidFill>
-            <a:ln w="7363" cap="rnd">
+            <a:ln w="8181" cap="rnd">
               <a:solidFill>
                 <a:srgbClr val="D55E00">
                   <a:alpha val="100000"/>
@@ -3513,8 +3513,8 @@
           </p:nvSpPr>
           <p:spPr>
             <a:xfrm>
-              <a:off x="2544814" y="782201"/>
-              <a:ext cx="37175" cy="37175"/>
+              <a:off x="2036451" y="901326"/>
+              <a:ext cx="37993" cy="37993"/>
             </a:xfrm>
             <a:prstGeom prst="ellipse">
               <a:avLst/>
@@ -3524,7 +3524,7 @@
                 <a:alpha val="100000"/>
               </a:srgbClr>
             </a:solidFill>
-            <a:ln w="7363" cap="rnd">
+            <a:ln w="8181" cap="rnd">
               <a:solidFill>
                 <a:srgbClr val="D55E00">
                   <a:alpha val="100000"/>
@@ -3548,8 +3548,8 @@
           </p:nvSpPr>
           <p:spPr>
             <a:xfrm>
-              <a:off x="2395580" y="798932"/>
-              <a:ext cx="37175" cy="37175"/>
+              <a:off x="1930743" y="914446"/>
+              <a:ext cx="37993" cy="37993"/>
             </a:xfrm>
             <a:prstGeom prst="ellipse">
               <a:avLst/>
@@ -3559,7 +3559,7 @@
                 <a:alpha val="100000"/>
               </a:srgbClr>
             </a:solidFill>
-            <a:ln w="7363" cap="rnd">
+            <a:ln w="8181" cap="rnd">
               <a:solidFill>
                 <a:srgbClr val="D55E00">
                   <a:alpha val="100000"/>
@@ -3583,8 +3583,8 @@
           </p:nvSpPr>
           <p:spPr>
             <a:xfrm>
-              <a:off x="2246345" y="823290"/>
-              <a:ext cx="37175" cy="37175"/>
+              <a:off x="1825035" y="933549"/>
+              <a:ext cx="37993" cy="37993"/>
             </a:xfrm>
             <a:prstGeom prst="ellipse">
               <a:avLst/>
@@ -3594,7 +3594,7 @@
                 <a:alpha val="100000"/>
               </a:srgbClr>
             </a:solidFill>
-            <a:ln w="7363" cap="rnd">
+            <a:ln w="8181" cap="rnd">
               <a:solidFill>
                 <a:srgbClr val="D55E00">
                   <a:alpha val="100000"/>
@@ -3618,8 +3618,8 @@
           </p:nvSpPr>
           <p:spPr>
             <a:xfrm>
-              <a:off x="2097111" y="837561"/>
-              <a:ext cx="37175" cy="37175"/>
+              <a:off x="1719326" y="944740"/>
+              <a:ext cx="37993" cy="37993"/>
             </a:xfrm>
             <a:prstGeom prst="ellipse">
               <a:avLst/>
@@ -3629,7 +3629,7 @@
                 <a:alpha val="100000"/>
               </a:srgbClr>
             </a:solidFill>
-            <a:ln w="7363" cap="rnd">
+            <a:ln w="8181" cap="rnd">
               <a:solidFill>
                 <a:srgbClr val="D55E00">
                   <a:alpha val="100000"/>
@@ -3653,8 +3653,8 @@
           </p:nvSpPr>
           <p:spPr>
             <a:xfrm>
-              <a:off x="1947877" y="866594"/>
-              <a:ext cx="37175" cy="37175"/>
+              <a:off x="1613618" y="967508"/>
+              <a:ext cx="37993" cy="37993"/>
             </a:xfrm>
             <a:prstGeom prst="ellipse">
               <a:avLst/>
@@ -3664,7 +3664,7 @@
                 <a:alpha val="100000"/>
               </a:srgbClr>
             </a:solidFill>
-            <a:ln w="7363" cap="rnd">
+            <a:ln w="8181" cap="rnd">
               <a:solidFill>
                 <a:srgbClr val="D55E00">
                   <a:alpha val="100000"/>
@@ -3688,8 +3688,8 @@
           </p:nvSpPr>
           <p:spPr>
             <a:xfrm>
-              <a:off x="1798642" y="900548"/>
-              <a:ext cx="37175" cy="37175"/>
+              <a:off x="1507910" y="994135"/>
+              <a:ext cx="37993" cy="37993"/>
             </a:xfrm>
             <a:prstGeom prst="ellipse">
               <a:avLst/>
@@ -3699,7 +3699,7 @@
                 <a:alpha val="100000"/>
               </a:srgbClr>
             </a:solidFill>
-            <a:ln w="7363" cap="rnd">
+            <a:ln w="8181" cap="rnd">
               <a:solidFill>
                 <a:srgbClr val="D55E00">
                   <a:alpha val="100000"/>
@@ -3723,8 +3723,8 @@
           </p:nvSpPr>
           <p:spPr>
             <a:xfrm>
-              <a:off x="1649408" y="941391"/>
-              <a:ext cx="37175" cy="37175"/>
+              <a:off x="1402202" y="1026166"/>
+              <a:ext cx="37993" cy="37993"/>
             </a:xfrm>
             <a:prstGeom prst="ellipse">
               <a:avLst/>
@@ -3734,7 +3734,7 @@
                 <a:alpha val="100000"/>
               </a:srgbClr>
             </a:solidFill>
-            <a:ln w="7363" cap="rnd">
+            <a:ln w="8181" cap="rnd">
               <a:solidFill>
                 <a:srgbClr val="D55E00">
                   <a:alpha val="100000"/>
@@ -3758,8 +3758,8 @@
           </p:nvSpPr>
           <p:spPr>
             <a:xfrm>
-              <a:off x="1500174" y="1011513"/>
-              <a:ext cx="37175" cy="37175"/>
+              <a:off x="1296493" y="1081157"/>
+              <a:ext cx="37993" cy="37993"/>
             </a:xfrm>
             <a:prstGeom prst="ellipse">
               <a:avLst/>
@@ -3769,7 +3769,7 @@
                 <a:alpha val="100000"/>
               </a:srgbClr>
             </a:solidFill>
-            <a:ln w="7363" cap="rnd">
+            <a:ln w="8181" cap="rnd">
               <a:solidFill>
                 <a:srgbClr val="D55E00">
                   <a:alpha val="100000"/>
@@ -3793,8 +3793,8 @@
           </p:nvSpPr>
           <p:spPr>
             <a:xfrm>
-              <a:off x="1350940" y="1161106"/>
-              <a:ext cx="37175" cy="37175"/>
+              <a:off x="1190785" y="1198472"/>
+              <a:ext cx="37993" cy="37993"/>
             </a:xfrm>
             <a:prstGeom prst="ellipse">
               <a:avLst/>
@@ -3804,7 +3804,7 @@
                 <a:alpha val="100000"/>
               </a:srgbClr>
             </a:solidFill>
-            <a:ln w="7363" cap="rnd">
+            <a:ln w="8181" cap="rnd">
               <a:solidFill>
                 <a:srgbClr val="D55E00">
                   <a:alpha val="100000"/>
@@ -3828,8 +3828,8 @@
           </p:nvSpPr>
           <p:spPr>
             <a:xfrm>
-              <a:off x="1201705" y="1412316"/>
-              <a:ext cx="37175" cy="37175"/>
+              <a:off x="1085077" y="1395475"/>
+              <a:ext cx="37993" cy="37993"/>
             </a:xfrm>
             <a:prstGeom prst="ellipse">
               <a:avLst/>
@@ -3839,7 +3839,7 @@
                 <a:alpha val="100000"/>
               </a:srgbClr>
             </a:solidFill>
-            <a:ln w="7363" cap="rnd">
+            <a:ln w="8181" cap="rnd">
               <a:solidFill>
                 <a:srgbClr val="D55E00">
                   <a:alpha val="100000"/>
@@ -3863,8 +3863,8 @@
           </p:nvSpPr>
           <p:spPr>
             <a:xfrm>
-              <a:off x="1052471" y="1818040"/>
-              <a:ext cx="37175" cy="37175"/>
+              <a:off x="979369" y="1713653"/>
+              <a:ext cx="37993" cy="37993"/>
             </a:xfrm>
             <a:prstGeom prst="ellipse">
               <a:avLst/>
@@ -3874,7 +3874,7 @@
                 <a:alpha val="100000"/>
               </a:srgbClr>
             </a:solidFill>
-            <a:ln w="7363" cap="rnd">
+            <a:ln w="8181" cap="rnd">
               <a:solidFill>
                 <a:srgbClr val="D55E00">
                   <a:alpha val="100000"/>
@@ -3898,8 +3898,8 @@
           </p:nvSpPr>
           <p:spPr>
             <a:xfrm>
-              <a:off x="2041081" y="933705"/>
-              <a:ext cx="1219078" cy="69768"/>
+              <a:off x="1685469" y="1015111"/>
+              <a:ext cx="1285006" cy="73609"/>
             </a:xfrm>
             <a:prstGeom prst="rect">
               <a:avLst/>
@@ -3919,7 +3919,7 @@
                 </a:spcAft>
               </a:pPr>
               <a:r>
-                <a:rPr sz="768" i="0" b="0">
+                <a:rPr sz="810" i="0" b="0">
                   <a:solidFill>
                     <a:srgbClr val="D55E00">
                       <a:alpha val="100000"/>
@@ -3941,8 +3941,8 @@
           </p:nvSpPr>
           <p:spPr>
             <a:xfrm>
-              <a:off x="1548608" y="2315109"/>
-              <a:ext cx="634136" cy="69768"/>
+              <a:off x="1336632" y="2079378"/>
+              <a:ext cx="668517" cy="73609"/>
             </a:xfrm>
             <a:prstGeom prst="rect">
               <a:avLst/>
@@ -3962,7 +3962,7 @@
                 </a:spcAft>
               </a:pPr>
               <a:r>
-                <a:rPr sz="768" i="0" b="0">
+                <a:rPr sz="810" i="0" b="0">
                   <a:solidFill>
                     <a:srgbClr val="0072B2">
                       <a:alpha val="100000"/>
@@ -3984,8 +3984,8 @@
           </p:nvSpPr>
           <p:spPr>
             <a:xfrm>
-              <a:off x="1548608" y="2455602"/>
-              <a:ext cx="612099" cy="69768"/>
+              <a:off x="1336632" y="2227676"/>
+              <a:ext cx="645109" cy="73609"/>
             </a:xfrm>
             <a:prstGeom prst="rect">
               <a:avLst/>
@@ -4005,7 +4005,7 @@
                 </a:spcAft>
               </a:pPr>
               <a:r>
-                <a:rPr sz="768" i="0" b="0">
+                <a:rPr sz="810" i="0" b="0">
                   <a:solidFill>
                     <a:srgbClr val="0072B2">
                       <a:alpha val="100000"/>
@@ -4027,15 +4027,15 @@
           </p:nvSpPr>
           <p:spPr>
             <a:xfrm>
-              <a:off x="691444" y="656226"/>
-              <a:ext cx="0" cy="2698617"/>
+              <a:off x="729470" y="806953"/>
+              <a:ext cx="0" cy="2116315"/>
             </a:xfrm>
             <a:custGeom>
               <a:avLst/>
               <a:pathLst>
-                <a:path w="0" h="2698617">
+                <a:path w="0" h="2116315">
                   <a:moveTo>
-                    <a:pt x="0" y="2698617"/>
+                    <a:pt x="0" y="2116315"/>
                   </a:moveTo>
                   <a:lnTo>
                     <a:pt x="0" y="0"/>
@@ -4067,8 +4067,8 @@
           </p:nvSpPr>
           <p:spPr>
             <a:xfrm>
-              <a:off x="589452" y="3199490"/>
-              <a:ext cx="50749" cy="65379"/>
+              <a:off x="616023" y="2790679"/>
+              <a:ext cx="56509" cy="72786"/>
             </a:xfrm>
             <a:prstGeom prst="rect">
               <a:avLst/>
@@ -4088,7 +4088,7 @@
                 </a:spcAft>
               </a:pPr>
               <a:r>
-                <a:rPr sz="720" i="0" b="0">
+                <a:rPr sz="800" i="0" b="0">
                   <a:solidFill>
                     <a:srgbClr val="262626">
                       <a:alpha val="100000"/>
@@ -4110,8 +4110,8 @@
           </p:nvSpPr>
           <p:spPr>
             <a:xfrm>
-              <a:off x="538702" y="2584384"/>
-              <a:ext cx="101498" cy="65379"/>
+              <a:off x="559514" y="2308300"/>
+              <a:ext cx="113019" cy="72786"/>
             </a:xfrm>
             <a:prstGeom prst="rect">
               <a:avLst/>
@@ -4131,7 +4131,7 @@
                 </a:spcAft>
               </a:pPr>
               <a:r>
-                <a:rPr sz="720" i="0" b="0">
+                <a:rPr sz="800" i="0" b="0">
                   <a:solidFill>
                     <a:srgbClr val="262626">
                       <a:alpha val="100000"/>
@@ -4153,8 +4153,8 @@
           </p:nvSpPr>
           <p:spPr>
             <a:xfrm>
-              <a:off x="538702" y="1969278"/>
-              <a:ext cx="101498" cy="65379"/>
+              <a:off x="559514" y="1825920"/>
+              <a:ext cx="113019" cy="72786"/>
             </a:xfrm>
             <a:prstGeom prst="rect">
               <a:avLst/>
@@ -4174,7 +4174,7 @@
                 </a:spcAft>
               </a:pPr>
               <a:r>
-                <a:rPr sz="720" i="0" b="0">
+                <a:rPr sz="800" i="0" b="0">
                   <a:solidFill>
                     <a:srgbClr val="262626">
                       <a:alpha val="100000"/>
@@ -4196,8 +4196,8 @@
           </p:nvSpPr>
           <p:spPr>
             <a:xfrm>
-              <a:off x="538702" y="1354172"/>
-              <a:ext cx="101498" cy="65379"/>
+              <a:off x="559514" y="1343540"/>
+              <a:ext cx="113019" cy="72786"/>
             </a:xfrm>
             <a:prstGeom prst="rect">
               <a:avLst/>
@@ -4217,7 +4217,7 @@
                 </a:spcAft>
               </a:pPr>
               <a:r>
-                <a:rPr sz="720" i="0" b="0">
+                <a:rPr sz="800" i="0" b="0">
                   <a:solidFill>
                     <a:srgbClr val="262626">
                       <a:alpha val="100000"/>
@@ -4239,8 +4239,8 @@
           </p:nvSpPr>
           <p:spPr>
             <a:xfrm>
-              <a:off x="487953" y="739066"/>
-              <a:ext cx="152247" cy="65379"/>
+              <a:off x="503004" y="861161"/>
+              <a:ext cx="169529" cy="72786"/>
             </a:xfrm>
             <a:prstGeom prst="rect">
               <a:avLst/>
@@ -4260,7 +4260,7 @@
                 </a:spcAft>
               </a:pPr>
               <a:r>
-                <a:rPr sz="720" i="0" b="0">
+                <a:rPr sz="800" i="0" b="0">
                   <a:solidFill>
                     <a:srgbClr val="262626">
                       <a:alpha val="100000"/>
@@ -4282,18 +4282,18 @@
           </p:nvSpPr>
           <p:spPr>
             <a:xfrm>
-              <a:off x="662975" y="3232180"/>
-              <a:ext cx="28468" cy="0"/>
+              <a:off x="697838" y="2827072"/>
+              <a:ext cx="31631" cy="0"/>
             </a:xfrm>
             <a:custGeom>
               <a:avLst/>
               <a:pathLst>
-                <a:path w="28468" h="0">
+                <a:path w="31631" h="0">
                   <a:moveTo>
                     <a:pt x="0" y="0"/>
                   </a:moveTo>
                   <a:lnTo>
-                    <a:pt x="28468" y="0"/>
+                    <a:pt x="31631" y="0"/>
                   </a:lnTo>
                 </a:path>
               </a:pathLst>
@@ -4322,18 +4322,18 @@
           </p:nvSpPr>
           <p:spPr>
             <a:xfrm>
-              <a:off x="662975" y="2617074"/>
-              <a:ext cx="28468" cy="0"/>
+              <a:off x="697838" y="2344693"/>
+              <a:ext cx="31631" cy="0"/>
             </a:xfrm>
             <a:custGeom>
               <a:avLst/>
               <a:pathLst>
-                <a:path w="28468" h="0">
+                <a:path w="31631" h="0">
                   <a:moveTo>
                     <a:pt x="0" y="0"/>
                   </a:moveTo>
                   <a:lnTo>
-                    <a:pt x="28468" y="0"/>
+                    <a:pt x="31631" y="0"/>
                   </a:lnTo>
                 </a:path>
               </a:pathLst>
@@ -4362,18 +4362,18 @@
           </p:nvSpPr>
           <p:spPr>
             <a:xfrm>
-              <a:off x="662975" y="2001968"/>
-              <a:ext cx="28468" cy="0"/>
+              <a:off x="697838" y="1862313"/>
+              <a:ext cx="31631" cy="0"/>
             </a:xfrm>
             <a:custGeom>
               <a:avLst/>
               <a:pathLst>
-                <a:path w="28468" h="0">
+                <a:path w="31631" h="0">
                   <a:moveTo>
                     <a:pt x="0" y="0"/>
                   </a:moveTo>
                   <a:lnTo>
-                    <a:pt x="28468" y="0"/>
+                    <a:pt x="31631" y="0"/>
                   </a:lnTo>
                 </a:path>
               </a:pathLst>
@@ -4402,18 +4402,18 @@
           </p:nvSpPr>
           <p:spPr>
             <a:xfrm>
-              <a:off x="662975" y="1386862"/>
-              <a:ext cx="28468" cy="0"/>
+              <a:off x="697838" y="1379934"/>
+              <a:ext cx="31631" cy="0"/>
             </a:xfrm>
             <a:custGeom>
               <a:avLst/>
               <a:pathLst>
-                <a:path w="28468" h="0">
+                <a:path w="31631" h="0">
                   <a:moveTo>
                     <a:pt x="0" y="0"/>
                   </a:moveTo>
                   <a:lnTo>
-                    <a:pt x="28468" y="0"/>
+                    <a:pt x="31631" y="0"/>
                   </a:lnTo>
                 </a:path>
               </a:pathLst>
@@ -4442,18 +4442,18 @@
           </p:nvSpPr>
           <p:spPr>
             <a:xfrm>
-              <a:off x="662975" y="771756"/>
-              <a:ext cx="28468" cy="0"/>
+              <a:off x="697838" y="897554"/>
+              <a:ext cx="31631" cy="0"/>
             </a:xfrm>
             <a:custGeom>
               <a:avLst/>
               <a:pathLst>
-                <a:path w="28468" h="0">
+                <a:path w="31631" h="0">
                   <a:moveTo>
                     <a:pt x="0" y="0"/>
                   </a:moveTo>
                   <a:lnTo>
-                    <a:pt x="28468" y="0"/>
+                    <a:pt x="31631" y="0"/>
                   </a:lnTo>
                 </a:path>
               </a:pathLst>
@@ -4482,18 +4482,18 @@
           </p:nvSpPr>
           <p:spPr>
             <a:xfrm>
-              <a:off x="691444" y="3354844"/>
-              <a:ext cx="3837186" cy="0"/>
+              <a:off x="729470" y="2923269"/>
+              <a:ext cx="2718023" cy="0"/>
             </a:xfrm>
             <a:custGeom>
               <a:avLst/>
               <a:pathLst>
-                <a:path w="3837186" h="0">
+                <a:path w="2718023" h="0">
                   <a:moveTo>
                     <a:pt x="0" y="0"/>
                   </a:moveTo>
                   <a:lnTo>
-                    <a:pt x="3837186" y="0"/>
+                    <a:pt x="2718023" y="0"/>
                   </a:lnTo>
                 </a:path>
               </a:pathLst>
@@ -4522,15 +4522,15 @@
           </p:nvSpPr>
           <p:spPr>
             <a:xfrm>
-              <a:off x="921824" y="3354844"/>
-              <a:ext cx="0" cy="28468"/>
+              <a:off x="892657" y="2923269"/>
+              <a:ext cx="0" cy="31631"/>
             </a:xfrm>
             <a:custGeom>
               <a:avLst/>
               <a:pathLst>
-                <a:path w="0" h="28468">
+                <a:path w="0" h="31631">
                   <a:moveTo>
-                    <a:pt x="0" y="28468"/>
+                    <a:pt x="0" y="31631"/>
                   </a:moveTo>
                   <a:lnTo>
                     <a:pt x="0" y="0"/>
@@ -4562,15 +4562,15 @@
           </p:nvSpPr>
           <p:spPr>
             <a:xfrm>
-              <a:off x="1667996" y="3354844"/>
-              <a:ext cx="0" cy="28468"/>
+              <a:off x="1421198" y="2923269"/>
+              <a:ext cx="0" cy="31631"/>
             </a:xfrm>
             <a:custGeom>
               <a:avLst/>
               <a:pathLst>
-                <a:path w="0" h="28468">
+                <a:path w="0" h="31631">
                   <a:moveTo>
-                    <a:pt x="0" y="28468"/>
+                    <a:pt x="0" y="31631"/>
                   </a:moveTo>
                   <a:lnTo>
                     <a:pt x="0" y="0"/>
@@ -4602,15 +4602,15 @@
           </p:nvSpPr>
           <p:spPr>
             <a:xfrm>
-              <a:off x="2414167" y="3354844"/>
-              <a:ext cx="0" cy="28468"/>
+              <a:off x="1949739" y="2923269"/>
+              <a:ext cx="0" cy="31631"/>
             </a:xfrm>
             <a:custGeom>
               <a:avLst/>
               <a:pathLst>
-                <a:path w="0" h="28468">
+                <a:path w="0" h="31631">
                   <a:moveTo>
-                    <a:pt x="0" y="28468"/>
+                    <a:pt x="0" y="31631"/>
                   </a:moveTo>
                   <a:lnTo>
                     <a:pt x="0" y="0"/>
@@ -4642,15 +4642,15 @@
           </p:nvSpPr>
           <p:spPr>
             <a:xfrm>
-              <a:off x="3160339" y="3354844"/>
-              <a:ext cx="0" cy="28468"/>
+              <a:off x="2478281" y="2923269"/>
+              <a:ext cx="0" cy="31631"/>
             </a:xfrm>
             <a:custGeom>
               <a:avLst/>
               <a:pathLst>
-                <a:path w="0" h="28468">
+                <a:path w="0" h="31631">
                   <a:moveTo>
-                    <a:pt x="0" y="28468"/>
+                    <a:pt x="0" y="31631"/>
                   </a:moveTo>
                   <a:lnTo>
                     <a:pt x="0" y="0"/>
@@ -4682,15 +4682,15 @@
           </p:nvSpPr>
           <p:spPr>
             <a:xfrm>
-              <a:off x="3906510" y="3354844"/>
-              <a:ext cx="0" cy="28468"/>
+              <a:off x="3006822" y="2923269"/>
+              <a:ext cx="0" cy="31631"/>
             </a:xfrm>
             <a:custGeom>
               <a:avLst/>
               <a:pathLst>
-                <a:path w="0" h="28468">
+                <a:path w="0" h="31631">
                   <a:moveTo>
-                    <a:pt x="0" y="28468"/>
+                    <a:pt x="0" y="31631"/>
                   </a:moveTo>
                   <a:lnTo>
                     <a:pt x="0" y="0"/>
@@ -4722,8 +4722,8 @@
           </p:nvSpPr>
           <p:spPr>
             <a:xfrm>
-              <a:off x="896450" y="3406087"/>
-              <a:ext cx="50749" cy="65379"/>
+              <a:off x="864402" y="2980205"/>
+              <a:ext cx="56509" cy="72786"/>
             </a:xfrm>
             <a:prstGeom prst="rect">
               <a:avLst/>
@@ -4743,7 +4743,7 @@
                 </a:spcAft>
               </a:pPr>
               <a:r>
-                <a:rPr sz="720" i="0" b="0">
+                <a:rPr sz="800" i="0" b="0">
                   <a:solidFill>
                     <a:srgbClr val="262626">
                       <a:alpha val="100000"/>
@@ -4765,8 +4765,8 @@
           </p:nvSpPr>
           <p:spPr>
             <a:xfrm>
-              <a:off x="1642621" y="3406087"/>
-              <a:ext cx="50749" cy="65379"/>
+              <a:off x="1392943" y="2980205"/>
+              <a:ext cx="56509" cy="72786"/>
             </a:xfrm>
             <a:prstGeom prst="rect">
               <a:avLst/>
@@ -4786,7 +4786,7 @@
                 </a:spcAft>
               </a:pPr>
               <a:r>
-                <a:rPr sz="720" i="0" b="0">
+                <a:rPr sz="800" i="0" b="0">
                   <a:solidFill>
                     <a:srgbClr val="262626">
                       <a:alpha val="100000"/>
@@ -4808,8 +4808,8 @@
           </p:nvSpPr>
           <p:spPr>
             <a:xfrm>
-              <a:off x="2363418" y="3406087"/>
-              <a:ext cx="101498" cy="65379"/>
+              <a:off x="1893230" y="2980205"/>
+              <a:ext cx="113019" cy="72786"/>
             </a:xfrm>
             <a:prstGeom prst="rect">
               <a:avLst/>
@@ -4829,7 +4829,7 @@
                 </a:spcAft>
               </a:pPr>
               <a:r>
-                <a:rPr sz="720" i="0" b="0">
+                <a:rPr sz="800" i="0" b="0">
                   <a:solidFill>
                     <a:srgbClr val="262626">
                       <a:alpha val="100000"/>
@@ -4851,8 +4851,8 @@
           </p:nvSpPr>
           <p:spPr>
             <a:xfrm>
-              <a:off x="3109589" y="3406087"/>
-              <a:ext cx="101498" cy="65379"/>
+              <a:off x="2421771" y="2980205"/>
+              <a:ext cx="113019" cy="72786"/>
             </a:xfrm>
             <a:prstGeom prst="rect">
               <a:avLst/>
@@ -4872,7 +4872,7 @@
                 </a:spcAft>
               </a:pPr>
               <a:r>
-                <a:rPr sz="720" i="0" b="0">
+                <a:rPr sz="800" i="0" b="0">
                   <a:solidFill>
                     <a:srgbClr val="262626">
                       <a:alpha val="100000"/>
@@ -4894,8 +4894,8 @@
           </p:nvSpPr>
           <p:spPr>
             <a:xfrm>
-              <a:off x="3855761" y="3406087"/>
-              <a:ext cx="101498" cy="65379"/>
+              <a:off x="2950312" y="2980205"/>
+              <a:ext cx="113019" cy="72786"/>
             </a:xfrm>
             <a:prstGeom prst="rect">
               <a:avLst/>
@@ -4915,7 +4915,7 @@
                 </a:spcAft>
               </a:pPr>
               <a:r>
-                <a:rPr sz="720" i="0" b="0">
+                <a:rPr sz="800" i="0" b="0">
                   <a:solidFill>
                     <a:srgbClr val="262626">
                       <a:alpha val="100000"/>
@@ -4937,8 +4937,8 @@
           </p:nvSpPr>
           <p:spPr>
             <a:xfrm>
-              <a:off x="1576628" y="3519046"/>
-              <a:ext cx="2066818" cy="81838"/>
+              <a:off x="939218" y="3106020"/>
+              <a:ext cx="2298527" cy="90982"/>
             </a:xfrm>
             <a:prstGeom prst="rect">
               <a:avLst/>
@@ -4958,7 +4958,7 @@
                 </a:spcAft>
               </a:pPr>
               <a:r>
-                <a:rPr sz="900" i="0" b="0">
+                <a:rPr sz="1000" i="0" b="0">
                   <a:solidFill>
                     <a:srgbClr val="0D0D0D">
                       <a:alpha val="100000"/>
@@ -4980,8 +4980,8 @@
           </p:nvSpPr>
           <p:spPr>
             <a:xfrm rot="-5400000">
-              <a:off x="181827" y="1964616"/>
-              <a:ext cx="425561" cy="81838"/>
+              <a:off x="162579" y="1819620"/>
+              <a:ext cx="473202" cy="90982"/>
             </a:xfrm>
             <a:prstGeom prst="rect">
               <a:avLst/>
@@ -5001,7 +5001,7 @@
                 </a:spcAft>
               </a:pPr>
               <a:r>
-                <a:rPr sz="900" i="0" b="0">
+                <a:rPr sz="1000" i="0" b="0">
                   <a:solidFill>
                     <a:srgbClr val="0D0D0D">
                       <a:alpha val="100000"/>
@@ -5023,8 +5023,8 @@
           </p:nvSpPr>
           <p:spPr>
             <a:xfrm>
-              <a:off x="691444" y="503004"/>
-              <a:ext cx="3317077" cy="74432"/>
+              <a:off x="729470" y="509330"/>
+              <a:ext cx="1570299" cy="83576"/>
             </a:xfrm>
             <a:prstGeom prst="rect">
               <a:avLst/>
@@ -5044,7 +5044,7 @@
                 </a:spcAft>
               </a:pPr>
               <a:r>
-                <a:rPr sz="819" i="0" b="0">
+                <a:rPr sz="919" i="0" b="0">
                   <a:solidFill>
                     <a:srgbClr val="4D4D4D">
                       <a:alpha val="100000"/>
@@ -5053,7 +5053,7 @@
                   <a:latin typeface="Arial"/>
                   <a:cs typeface="Arial"/>
                 </a:rPr>
-                <a:t>Median lag 1 yr, mean 2.09 yr; 81.7% of records lag by at least one year</a:t>
+                <a:t>Median lag 1 yr, mean 2.09 yr;</a:t>
               </a:r>
             </a:p>
           </p:txBody>
@@ -5066,8 +5066,51 @@
           </p:nvSpPr>
           <p:spPr>
             <a:xfrm>
-              <a:off x="691444" y="328384"/>
-              <a:ext cx="2993928" cy="90982"/>
+              <a:off x="729470" y="635517"/>
+              <a:ext cx="1602943" cy="83576"/>
+            </a:xfrm>
+            <a:prstGeom prst="rect">
+              <a:avLst/>
+            </a:prstGeom>
+            <a:noFill/>
+          </p:spPr>
+          <p:txBody>
+            <a:bodyPr lIns="0" rIns="0" tIns="0" bIns="0" anchorCtr="1" anchor="ctr" wrap="none"/>
+            <a:lstStyle/>
+            <a:p>
+              <a:pPr algn="l" marL="0" marR="0" indent="0">
+                <a:spcBef>
+                  <a:spcPts val="0"/>
+                </a:spcBef>
+                <a:spcAft>
+                  <a:spcPts val="0"/>
+                </a:spcAft>
+              </a:pPr>
+              <a:r>
+                <a:rPr sz="919" i="0" b="0">
+                  <a:solidFill>
+                    <a:srgbClr val="4D4D4D">
+                      <a:alpha val="100000"/>
+                    </a:srgbClr>
+                  </a:solidFill>
+                  <a:latin typeface="Arial"/>
+                  <a:cs typeface="Arial"/>
+                </a:rPr>
+                <a:t> 81.7% lag by at least one year</a:t>
+              </a:r>
+            </a:p>
+          </p:txBody>
+        </p:sp>
+        <p:sp>
+          <p:nvSpPr>
+            <p:cNvPr id="80" name="tx80"/>
+            <p:cNvSpPr/>
+            <p:nvPr/>
+          </p:nvSpPr>
+          <p:spPr>
+            <a:xfrm>
+              <a:off x="729470" y="328384"/>
+              <a:ext cx="2507010" cy="90982"/>
             </a:xfrm>
             <a:prstGeom prst="rect">
               <a:avLst/>
@@ -5096,21 +5139,21 @@
                   <a:latin typeface="Arial"/>
                   <a:cs typeface="Arial"/>
                 </a:rPr>
-                <a:t>Records appear in print years after they are made</a:t>
+                <a:t>Records reach print years after discovery</a:t>
               </a:r>
             </a:p>
           </p:txBody>
         </p:sp>
         <p:sp>
           <p:nvSpPr>
-            <p:cNvPr id="80" name="tx80"/>
-            <p:cNvSpPr/>
-            <p:nvPr/>
-          </p:nvSpPr>
-          <p:spPr>
-            <a:xfrm>
-              <a:off x="332181" y="323241"/>
-              <a:ext cx="84764" cy="109179"/>
+            <p:cNvPr id="81" name="tx81"/>
+            <p:cNvSpPr/>
+            <p:nvPr/>
+          </p:nvSpPr>
+          <p:spPr>
+            <a:xfrm>
+              <a:off x="323255" y="312698"/>
+              <a:ext cx="91805" cy="118231"/>
             </a:xfrm>
             <a:prstGeom prst="rect">
               <a:avLst/>
@@ -5130,7 +5173,7 @@
                 </a:spcAft>
               </a:pPr>
               <a:r>
-                <a:rPr sz="1200" i="0" b="1">
+                <a:rPr sz="1300" i="0" b="1">
                   <a:solidFill>
                     <a:srgbClr val="000000">
                       <a:alpha val="100000"/>
@@ -5146,14 +5189,14 @@
         </p:sp>
         <p:sp>
           <p:nvSpPr>
-            <p:cNvPr id="81" name="rc81"/>
-            <p:cNvSpPr/>
-            <p:nvPr/>
-          </p:nvSpPr>
-          <p:spPr>
-            <a:xfrm>
-              <a:off x="5018077" y="656226"/>
-              <a:ext cx="3837186" cy="2698617"/>
+            <p:cNvPr id="82" name="rc82"/>
+            <p:cNvSpPr/>
+            <p:nvPr/>
+          </p:nvSpPr>
+          <p:spPr>
+            <a:xfrm>
+              <a:off x="3969205" y="806953"/>
+              <a:ext cx="2718023" cy="2116315"/>
             </a:xfrm>
             <a:prstGeom prst="rect">
               <a:avLst/>
@@ -5172,27 +5215,27 @@
         </p:sp>
         <p:sp>
           <p:nvSpPr>
-            <p:cNvPr id="82" name="pl82"/>
-            <p:cNvSpPr/>
-            <p:nvPr/>
-          </p:nvSpPr>
-          <p:spPr>
-            <a:xfrm>
-              <a:off x="5018077" y="2609122"/>
-              <a:ext cx="3837186" cy="0"/>
+            <p:cNvPr id="83" name="pl83"/>
+            <p:cNvSpPr/>
+            <p:nvPr/>
+          </p:nvSpPr>
+          <p:spPr>
+            <a:xfrm>
+              <a:off x="3969205" y="2338457"/>
+              <a:ext cx="2718023" cy="0"/>
             </a:xfrm>
             <a:custGeom>
               <a:avLst/>
               <a:pathLst>
-                <a:path w="3837186" h="0">
+                <a:path w="2718023" h="0">
                   <a:moveTo>
                     <a:pt x="0" y="0"/>
                   </a:moveTo>
                   <a:lnTo>
-                    <a:pt x="3837186" y="0"/>
-                  </a:lnTo>
-                  <a:lnTo>
-                    <a:pt x="3837186" y="0"/>
+                    <a:pt x="2718023" y="0"/>
+                  </a:lnTo>
+                  <a:lnTo>
+                    <a:pt x="2718023" y="0"/>
                   </a:lnTo>
                 </a:path>
               </a:pathLst>
@@ -5215,27 +5258,27 @@
         </p:sp>
         <p:sp>
           <p:nvSpPr>
-            <p:cNvPr id="83" name="pl83"/>
-            <p:cNvSpPr/>
-            <p:nvPr/>
-          </p:nvSpPr>
-          <p:spPr>
-            <a:xfrm>
-              <a:off x="5018077" y="1830300"/>
-              <a:ext cx="3837186" cy="0"/>
+            <p:cNvPr id="84" name="pl84"/>
+            <p:cNvSpPr/>
+            <p:nvPr/>
+          </p:nvSpPr>
+          <p:spPr>
+            <a:xfrm>
+              <a:off x="3969205" y="1727688"/>
+              <a:ext cx="2718023" cy="0"/>
             </a:xfrm>
             <a:custGeom>
               <a:avLst/>
               <a:pathLst>
-                <a:path w="3837186" h="0">
+                <a:path w="2718023" h="0">
                   <a:moveTo>
                     <a:pt x="0" y="0"/>
                   </a:moveTo>
                   <a:lnTo>
-                    <a:pt x="3837186" y="0"/>
-                  </a:lnTo>
-                  <a:lnTo>
-                    <a:pt x="3837186" y="0"/>
+                    <a:pt x="2718023" y="0"/>
+                  </a:lnTo>
+                  <a:lnTo>
+                    <a:pt x="2718023" y="0"/>
                   </a:lnTo>
                 </a:path>
               </a:pathLst>
@@ -5258,27 +5301,27 @@
         </p:sp>
         <p:sp>
           <p:nvSpPr>
-            <p:cNvPr id="84" name="pl84"/>
-            <p:cNvSpPr/>
-            <p:nvPr/>
-          </p:nvSpPr>
-          <p:spPr>
-            <a:xfrm>
-              <a:off x="5018077" y="1051479"/>
-              <a:ext cx="3837186" cy="0"/>
+            <p:cNvPr id="85" name="pl85"/>
+            <p:cNvSpPr/>
+            <p:nvPr/>
+          </p:nvSpPr>
+          <p:spPr>
+            <a:xfrm>
+              <a:off x="3969205" y="1116919"/>
+              <a:ext cx="2718023" cy="0"/>
             </a:xfrm>
             <a:custGeom>
               <a:avLst/>
               <a:pathLst>
-                <a:path w="3837186" h="0">
+                <a:path w="2718023" h="0">
                   <a:moveTo>
                     <a:pt x="0" y="0"/>
                   </a:moveTo>
                   <a:lnTo>
-                    <a:pt x="3837186" y="0"/>
-                  </a:lnTo>
-                  <a:lnTo>
-                    <a:pt x="3837186" y="0"/>
+                    <a:pt x="2718023" y="0"/>
+                  </a:lnTo>
+                  <a:lnTo>
+                    <a:pt x="2718023" y="0"/>
                   </a:lnTo>
                 </a:path>
               </a:pathLst>
@@ -5301,87 +5344,87 @@
         </p:sp>
         <p:sp>
           <p:nvSpPr>
-            <p:cNvPr id="85" name="pl85"/>
-            <p:cNvSpPr/>
-            <p:nvPr/>
-          </p:nvSpPr>
-          <p:spPr>
-            <a:xfrm>
-              <a:off x="5192495" y="1168302"/>
-              <a:ext cx="3410832" cy="2024936"/>
+            <p:cNvPr id="86" name="pl86"/>
+            <p:cNvSpPr/>
+            <p:nvPr/>
+          </p:nvSpPr>
+          <p:spPr>
+            <a:xfrm>
+              <a:off x="4092752" y="1208534"/>
+              <a:ext cx="2416020" cy="1587999"/>
             </a:xfrm>
             <a:custGeom>
               <a:avLst/>
               <a:pathLst>
-                <a:path w="3410832" h="2024936">
+                <a:path w="2416020" h="1587999">
                   <a:moveTo>
-                    <a:pt x="0" y="1869172"/>
+                    <a:pt x="0" y="1465846"/>
                   </a:moveTo>
                   <a:lnTo>
-                    <a:pt x="155037" y="2024936"/>
-                  </a:lnTo>
-                  <a:lnTo>
-                    <a:pt x="310075" y="1479761"/>
-                  </a:lnTo>
-                  <a:lnTo>
-                    <a:pt x="465113" y="1713408"/>
-                  </a:lnTo>
-                  <a:lnTo>
-                    <a:pt x="620151" y="1246114"/>
-                  </a:lnTo>
-                  <a:lnTo>
-                    <a:pt x="775189" y="1401879"/>
-                  </a:lnTo>
-                  <a:lnTo>
-                    <a:pt x="930227" y="1908113"/>
-                  </a:lnTo>
-                  <a:lnTo>
-                    <a:pt x="1085264" y="1362938"/>
-                  </a:lnTo>
-                  <a:lnTo>
-                    <a:pt x="1240302" y="1090350"/>
-                  </a:lnTo>
-                  <a:lnTo>
-                    <a:pt x="1395340" y="1051409"/>
-                  </a:lnTo>
-                  <a:lnTo>
-                    <a:pt x="1550378" y="1323997"/>
-                  </a:lnTo>
-                  <a:lnTo>
-                    <a:pt x="1705416" y="856704"/>
-                  </a:lnTo>
-                  <a:lnTo>
-                    <a:pt x="1860454" y="817762"/>
-                  </a:lnTo>
-                  <a:lnTo>
-                    <a:pt x="2015492" y="895645"/>
-                  </a:lnTo>
-                  <a:lnTo>
-                    <a:pt x="2170529" y="467293"/>
-                  </a:lnTo>
-                  <a:lnTo>
-                    <a:pt x="2325567" y="467293"/>
-                  </a:lnTo>
-                  <a:lnTo>
-                    <a:pt x="2480605" y="1090350"/>
-                  </a:lnTo>
-                  <a:lnTo>
-                    <a:pt x="2635643" y="0"/>
-                  </a:lnTo>
-                  <a:lnTo>
-                    <a:pt x="2790681" y="467293"/>
-                  </a:lnTo>
-                  <a:lnTo>
-                    <a:pt x="2945719" y="661998"/>
-                  </a:lnTo>
-                  <a:lnTo>
-                    <a:pt x="3100757" y="895645"/>
-                  </a:lnTo>
-                  <a:lnTo>
-                    <a:pt x="3255794" y="700939"/>
-                  </a:lnTo>
-                  <a:lnTo>
-                    <a:pt x="3410832" y="1674466"/>
+                    <a:pt x="109819" y="1587999"/>
+                  </a:lnTo>
+                  <a:lnTo>
+                    <a:pt x="219638" y="1160461"/>
+                  </a:lnTo>
+                  <a:lnTo>
+                    <a:pt x="329457" y="1343692"/>
+                  </a:lnTo>
+                  <a:lnTo>
+                    <a:pt x="439276" y="977230"/>
+                  </a:lnTo>
+                  <a:lnTo>
+                    <a:pt x="549095" y="1099384"/>
+                  </a:lnTo>
+                  <a:lnTo>
+                    <a:pt x="658914" y="1496384"/>
+                  </a:lnTo>
+                  <a:lnTo>
+                    <a:pt x="768733" y="1068846"/>
+                  </a:lnTo>
+                  <a:lnTo>
+                    <a:pt x="878553" y="855076"/>
+                  </a:lnTo>
+                  <a:lnTo>
+                    <a:pt x="988372" y="824538"/>
+                  </a:lnTo>
+                  <a:lnTo>
+                    <a:pt x="1098191" y="1038307"/>
+                  </a:lnTo>
+                  <a:lnTo>
+                    <a:pt x="1208010" y="671846"/>
+                  </a:lnTo>
+                  <a:lnTo>
+                    <a:pt x="1317829" y="641307"/>
+                  </a:lnTo>
+                  <a:lnTo>
+                    <a:pt x="1427648" y="702384"/>
+                  </a:lnTo>
+                  <a:lnTo>
+                    <a:pt x="1537467" y="366461"/>
+                  </a:lnTo>
+                  <a:lnTo>
+                    <a:pt x="1647286" y="366461"/>
+                  </a:lnTo>
+                  <a:lnTo>
+                    <a:pt x="1757106" y="855076"/>
+                  </a:lnTo>
+                  <a:lnTo>
+                    <a:pt x="1866925" y="0"/>
+                  </a:lnTo>
+                  <a:lnTo>
+                    <a:pt x="1976744" y="366461"/>
+                  </a:lnTo>
+                  <a:lnTo>
+                    <a:pt x="2086563" y="519153"/>
+                  </a:lnTo>
+                  <a:lnTo>
+                    <a:pt x="2196382" y="702384"/>
+                  </a:lnTo>
+                  <a:lnTo>
+                    <a:pt x="2306201" y="549692"/>
+                  </a:lnTo>
+                  <a:lnTo>
+                    <a:pt x="2416020" y="1313153"/>
                   </a:lnTo>
                 </a:path>
               </a:pathLst>
@@ -5404,87 +5447,87 @@
         </p:sp>
         <p:sp>
           <p:nvSpPr>
-            <p:cNvPr id="86" name="pl86"/>
-            <p:cNvSpPr/>
-            <p:nvPr/>
-          </p:nvSpPr>
-          <p:spPr>
-            <a:xfrm>
-              <a:off x="5192495" y="778891"/>
-              <a:ext cx="3410832" cy="2453288"/>
+            <p:cNvPr id="87" name="pl87"/>
+            <p:cNvSpPr/>
+            <p:nvPr/>
+          </p:nvSpPr>
+          <p:spPr>
+            <a:xfrm>
+              <a:off x="4092752" y="903150"/>
+              <a:ext cx="2416020" cy="1923922"/>
             </a:xfrm>
             <a:custGeom>
               <a:avLst/>
               <a:pathLst>
-                <a:path w="3410832" h="2453288">
+                <a:path w="2416020" h="1923922">
                   <a:moveTo>
-                    <a:pt x="0" y="2414347"/>
+                    <a:pt x="0" y="1893384"/>
                   </a:moveTo>
                   <a:lnTo>
-                    <a:pt x="155037" y="2258583"/>
-                  </a:lnTo>
-                  <a:lnTo>
-                    <a:pt x="310075" y="2453288"/>
-                  </a:lnTo>
-                  <a:lnTo>
-                    <a:pt x="465113" y="2414347"/>
-                  </a:lnTo>
-                  <a:lnTo>
-                    <a:pt x="620151" y="1323997"/>
-                  </a:lnTo>
-                  <a:lnTo>
-                    <a:pt x="775189" y="1947054"/>
-                  </a:lnTo>
-                  <a:lnTo>
-                    <a:pt x="930227" y="2219642"/>
-                  </a:lnTo>
-                  <a:lnTo>
-                    <a:pt x="1085264" y="1985995"/>
-                  </a:lnTo>
-                  <a:lnTo>
-                    <a:pt x="1240302" y="1246114"/>
-                  </a:lnTo>
-                  <a:lnTo>
-                    <a:pt x="1395340" y="1596584"/>
-                  </a:lnTo>
-                  <a:lnTo>
-                    <a:pt x="1550378" y="2024936"/>
-                  </a:lnTo>
-                  <a:lnTo>
-                    <a:pt x="1705416" y="1557643"/>
-                  </a:lnTo>
-                  <a:lnTo>
-                    <a:pt x="1860454" y="1362938"/>
-                  </a:lnTo>
-                  <a:lnTo>
-                    <a:pt x="2015492" y="1674466"/>
-                  </a:lnTo>
-                  <a:lnTo>
-                    <a:pt x="2170529" y="1557643"/>
-                  </a:lnTo>
-                  <a:lnTo>
-                    <a:pt x="2325567" y="856704"/>
-                  </a:lnTo>
-                  <a:lnTo>
-                    <a:pt x="2480605" y="1012468"/>
-                  </a:lnTo>
-                  <a:lnTo>
-                    <a:pt x="2635643" y="817762"/>
-                  </a:lnTo>
-                  <a:lnTo>
-                    <a:pt x="2790681" y="1285056"/>
-                  </a:lnTo>
-                  <a:lnTo>
-                    <a:pt x="2945719" y="1323997"/>
-                  </a:lnTo>
-                  <a:lnTo>
-                    <a:pt x="3100757" y="895645"/>
-                  </a:lnTo>
-                  <a:lnTo>
-                    <a:pt x="3255794" y="272587"/>
-                  </a:lnTo>
-                  <a:lnTo>
-                    <a:pt x="3410832" y="0"/>
+                    <a:pt x="109819" y="1771230"/>
+                  </a:lnTo>
+                  <a:lnTo>
+                    <a:pt x="219638" y="1923922"/>
+                  </a:lnTo>
+                  <a:lnTo>
+                    <a:pt x="329457" y="1893384"/>
+                  </a:lnTo>
+                  <a:lnTo>
+                    <a:pt x="439276" y="1038307"/>
+                  </a:lnTo>
+                  <a:lnTo>
+                    <a:pt x="549095" y="1526922"/>
+                  </a:lnTo>
+                  <a:lnTo>
+                    <a:pt x="658914" y="1740692"/>
+                  </a:lnTo>
+                  <a:lnTo>
+                    <a:pt x="768733" y="1557461"/>
+                  </a:lnTo>
+                  <a:lnTo>
+                    <a:pt x="878553" y="977230"/>
+                  </a:lnTo>
+                  <a:lnTo>
+                    <a:pt x="988372" y="1252076"/>
+                  </a:lnTo>
+                  <a:lnTo>
+                    <a:pt x="1098191" y="1587999"/>
+                  </a:lnTo>
+                  <a:lnTo>
+                    <a:pt x="1208010" y="1221538"/>
+                  </a:lnTo>
+                  <a:lnTo>
+                    <a:pt x="1317829" y="1068846"/>
+                  </a:lnTo>
+                  <a:lnTo>
+                    <a:pt x="1427648" y="1313153"/>
+                  </a:lnTo>
+                  <a:lnTo>
+                    <a:pt x="1537467" y="1221538"/>
+                  </a:lnTo>
+                  <a:lnTo>
+                    <a:pt x="1647286" y="671846"/>
+                  </a:lnTo>
+                  <a:lnTo>
+                    <a:pt x="1757106" y="793999"/>
+                  </a:lnTo>
+                  <a:lnTo>
+                    <a:pt x="1866925" y="641307"/>
+                  </a:lnTo>
+                  <a:lnTo>
+                    <a:pt x="1976744" y="1007769"/>
+                  </a:lnTo>
+                  <a:lnTo>
+                    <a:pt x="2086563" y="1038307"/>
+                  </a:lnTo>
+                  <a:lnTo>
+                    <a:pt x="2196382" y="702384"/>
+                  </a:lnTo>
+                  <a:lnTo>
+                    <a:pt x="2306201" y="213769"/>
+                  </a:lnTo>
+                  <a:lnTo>
+                    <a:pt x="2416020" y="0"/>
                   </a:lnTo>
                 </a:path>
               </a:pathLst>
@@ -5507,14 +5550,14 @@
         </p:sp>
         <p:sp>
           <p:nvSpPr>
-            <p:cNvPr id="87" name="pt87"/>
-            <p:cNvSpPr/>
-            <p:nvPr/>
-          </p:nvSpPr>
-          <p:spPr>
-            <a:xfrm>
-              <a:off x="8583385" y="2822826"/>
-              <a:ext cx="39885" cy="39885"/>
+            <p:cNvPr id="88" name="pt88"/>
+            <p:cNvSpPr/>
+            <p:nvPr/>
+          </p:nvSpPr>
+          <p:spPr>
+            <a:xfrm>
+              <a:off x="6488421" y="2501336"/>
+              <a:ext cx="40703" cy="40703"/>
             </a:xfrm>
             <a:prstGeom prst="ellipse">
               <a:avLst/>
@@ -5524,7 +5567,7 @@
                 <a:alpha val="100000"/>
               </a:srgbClr>
             </a:solidFill>
-            <a:ln w="7363" cap="rnd">
+            <a:ln w="8181" cap="rnd">
               <a:solidFill>
                 <a:srgbClr val="0072B2">
                   <a:alpha val="100000"/>
@@ -5542,14 +5585,14 @@
         </p:sp>
         <p:sp>
           <p:nvSpPr>
-            <p:cNvPr id="88" name="pt88"/>
-            <p:cNvSpPr/>
-            <p:nvPr/>
-          </p:nvSpPr>
-          <p:spPr>
-            <a:xfrm>
-              <a:off x="7498120" y="1615652"/>
-              <a:ext cx="39885" cy="39885"/>
+            <p:cNvPr id="89" name="pt89"/>
+            <p:cNvSpPr/>
+            <p:nvPr/>
+          </p:nvSpPr>
+          <p:spPr>
+            <a:xfrm>
+              <a:off x="5719687" y="1554644"/>
+              <a:ext cx="40703" cy="40703"/>
             </a:xfrm>
             <a:prstGeom prst="ellipse">
               <a:avLst/>
@@ -5559,7 +5602,7 @@
                 <a:alpha val="100000"/>
               </a:srgbClr>
             </a:solidFill>
-            <a:ln w="7363" cap="rnd">
+            <a:ln w="8181" cap="rnd">
               <a:solidFill>
                 <a:srgbClr val="0072B2">
                   <a:alpha val="100000"/>
@@ -5577,14 +5620,14 @@
         </p:sp>
         <p:sp>
           <p:nvSpPr>
-            <p:cNvPr id="89" name="pt89"/>
-            <p:cNvSpPr/>
-            <p:nvPr/>
-          </p:nvSpPr>
-          <p:spPr>
-            <a:xfrm>
-              <a:off x="8118271" y="1810358"/>
-              <a:ext cx="39885" cy="39885"/>
+            <p:cNvPr id="90" name="pt90"/>
+            <p:cNvSpPr/>
+            <p:nvPr/>
+          </p:nvSpPr>
+          <p:spPr>
+            <a:xfrm>
+              <a:off x="6158963" y="1707336"/>
+              <a:ext cx="40703" cy="40703"/>
             </a:xfrm>
             <a:prstGeom prst="ellipse">
               <a:avLst/>
@@ -5594,7 +5637,7 @@
                 <a:alpha val="100000"/>
               </a:srgbClr>
             </a:solidFill>
-            <a:ln w="7363" cap="rnd">
+            <a:ln w="8181" cap="rnd">
               <a:solidFill>
                 <a:srgbClr val="0072B2">
                   <a:alpha val="100000"/>
@@ -5612,14 +5655,14 @@
         </p:sp>
         <p:sp>
           <p:nvSpPr>
-            <p:cNvPr id="90" name="pt90"/>
-            <p:cNvSpPr/>
-            <p:nvPr/>
-          </p:nvSpPr>
-          <p:spPr>
-            <a:xfrm>
-              <a:off x="6877968" y="2005063"/>
-              <a:ext cx="39885" cy="39885"/>
+            <p:cNvPr id="91" name="pt91"/>
+            <p:cNvSpPr/>
+            <p:nvPr/>
+          </p:nvSpPr>
+          <p:spPr>
+            <a:xfrm>
+              <a:off x="5280410" y="1860029"/>
+              <a:ext cx="40703" cy="40703"/>
             </a:xfrm>
             <a:prstGeom prst="ellipse">
               <a:avLst/>
@@ -5629,7 +5672,7 @@
                 <a:alpha val="100000"/>
               </a:srgbClr>
             </a:solidFill>
-            <a:ln w="7363" cap="rnd">
+            <a:ln w="8181" cap="rnd">
               <a:solidFill>
                 <a:srgbClr val="0072B2">
                   <a:alpha val="100000"/>
@@ -5647,14 +5690,14 @@
         </p:sp>
         <p:sp>
           <p:nvSpPr>
-            <p:cNvPr id="91" name="pt91"/>
-            <p:cNvSpPr/>
-            <p:nvPr/>
-          </p:nvSpPr>
-          <p:spPr>
-            <a:xfrm>
-              <a:off x="7343082" y="1615652"/>
-              <a:ext cx="39885" cy="39885"/>
+            <p:cNvPr id="92" name="pt92"/>
+            <p:cNvSpPr/>
+            <p:nvPr/>
+          </p:nvSpPr>
+          <p:spPr>
+            <a:xfrm>
+              <a:off x="5609868" y="1554644"/>
+              <a:ext cx="40703" cy="40703"/>
             </a:xfrm>
             <a:prstGeom prst="ellipse">
               <a:avLst/>
@@ -5664,7 +5707,7 @@
                 <a:alpha val="100000"/>
               </a:srgbClr>
             </a:solidFill>
-            <a:ln w="7363" cap="rnd">
+            <a:ln w="8181" cap="rnd">
               <a:solidFill>
                 <a:srgbClr val="0072B2">
                   <a:alpha val="100000"/>
@@ -5682,14 +5725,14 @@
         </p:sp>
         <p:sp>
           <p:nvSpPr>
-            <p:cNvPr id="92" name="pt92"/>
-            <p:cNvSpPr/>
-            <p:nvPr/>
-          </p:nvSpPr>
-          <p:spPr>
-            <a:xfrm>
-              <a:off x="6412855" y="2238710"/>
-              <a:ext cx="39885" cy="39885"/>
+            <p:cNvPr id="93" name="pt93"/>
+            <p:cNvSpPr/>
+            <p:nvPr/>
+          </p:nvSpPr>
+          <p:spPr>
+            <a:xfrm>
+              <a:off x="4950953" y="2043259"/>
+              <a:ext cx="40703" cy="40703"/>
             </a:xfrm>
             <a:prstGeom prst="ellipse">
               <a:avLst/>
@@ -5699,7 +5742,7 @@
                 <a:alpha val="100000"/>
               </a:srgbClr>
             </a:solidFill>
-            <a:ln w="7363" cap="rnd">
+            <a:ln w="8181" cap="rnd">
               <a:solidFill>
                 <a:srgbClr val="0072B2">
                   <a:alpha val="100000"/>
@@ -5717,14 +5760,14 @@
         </p:sp>
         <p:sp>
           <p:nvSpPr>
-            <p:cNvPr id="93" name="pt93"/>
-            <p:cNvSpPr/>
-            <p:nvPr/>
-          </p:nvSpPr>
-          <p:spPr>
-            <a:xfrm>
-              <a:off x="6722931" y="2472356"/>
-              <a:ext cx="39885" cy="39885"/>
+            <p:cNvPr id="94" name="pt94"/>
+            <p:cNvSpPr/>
+            <p:nvPr/>
+          </p:nvSpPr>
+          <p:spPr>
+            <a:xfrm>
+              <a:off x="5170591" y="2226490"/>
+              <a:ext cx="40703" cy="40703"/>
             </a:xfrm>
             <a:prstGeom prst="ellipse">
               <a:avLst/>
@@ -5734,7 +5777,7 @@
                 <a:alpha val="100000"/>
               </a:srgbClr>
             </a:solidFill>
-            <a:ln w="7363" cap="rnd">
+            <a:ln w="8181" cap="rnd">
               <a:solidFill>
                 <a:srgbClr val="0072B2">
                   <a:alpha val="100000"/>
@@ -5752,14 +5795,14 @@
         </p:sp>
         <p:sp>
           <p:nvSpPr>
-            <p:cNvPr id="94" name="pt94"/>
-            <p:cNvSpPr/>
-            <p:nvPr/>
-          </p:nvSpPr>
-          <p:spPr>
-            <a:xfrm>
-              <a:off x="7653158" y="2238710"/>
-              <a:ext cx="39885" cy="39885"/>
+            <p:cNvPr id="95" name="pt95"/>
+            <p:cNvSpPr/>
+            <p:nvPr/>
+          </p:nvSpPr>
+          <p:spPr>
+            <a:xfrm>
+              <a:off x="5829506" y="2043259"/>
+              <a:ext cx="40703" cy="40703"/>
             </a:xfrm>
             <a:prstGeom prst="ellipse">
               <a:avLst/>
@@ -5769,7 +5812,7 @@
                 <a:alpha val="100000"/>
               </a:srgbClr>
             </a:solidFill>
-            <a:ln w="7363" cap="rnd">
+            <a:ln w="8181" cap="rnd">
               <a:solidFill>
                 <a:srgbClr val="0072B2">
                   <a:alpha val="100000"/>
@@ -5787,14 +5830,14 @@
         </p:sp>
         <p:sp>
           <p:nvSpPr>
-            <p:cNvPr id="95" name="pt95"/>
-            <p:cNvSpPr/>
-            <p:nvPr/>
-          </p:nvSpPr>
-          <p:spPr>
-            <a:xfrm>
-              <a:off x="7963233" y="1615652"/>
-              <a:ext cx="39885" cy="39885"/>
+            <p:cNvPr id="96" name="pt96"/>
+            <p:cNvSpPr/>
+            <p:nvPr/>
+          </p:nvSpPr>
+          <p:spPr>
+            <a:xfrm>
+              <a:off x="6049144" y="1554644"/>
+              <a:ext cx="40703" cy="40703"/>
             </a:xfrm>
             <a:prstGeom prst="ellipse">
               <a:avLst/>
@@ -5804,7 +5847,7 @@
                 <a:alpha val="100000"/>
               </a:srgbClr>
             </a:solidFill>
-            <a:ln w="7363" cap="rnd">
+            <a:ln w="8181" cap="rnd">
               <a:solidFill>
                 <a:srgbClr val="0072B2">
                   <a:alpha val="100000"/>
@@ -5822,14 +5865,14 @@
         </p:sp>
         <p:sp>
           <p:nvSpPr>
-            <p:cNvPr id="96" name="pt96"/>
-            <p:cNvSpPr/>
-            <p:nvPr/>
-          </p:nvSpPr>
-          <p:spPr>
-            <a:xfrm>
-              <a:off x="5792703" y="2394474"/>
-              <a:ext cx="39885" cy="39885"/>
+            <p:cNvPr id="97" name="pt97"/>
+            <p:cNvSpPr/>
+            <p:nvPr/>
+          </p:nvSpPr>
+          <p:spPr>
+            <a:xfrm>
+              <a:off x="4511676" y="2165413"/>
+              <a:ext cx="40703" cy="40703"/>
             </a:xfrm>
             <a:prstGeom prst="ellipse">
               <a:avLst/>
@@ -5839,7 +5882,7 @@
                 <a:alpha val="100000"/>
               </a:srgbClr>
             </a:solidFill>
-            <a:ln w="7363" cap="rnd">
+            <a:ln w="8181" cap="rnd">
               <a:solidFill>
                 <a:srgbClr val="0072B2">
                   <a:alpha val="100000"/>
@@ -5857,14 +5900,14 @@
         </p:sp>
         <p:sp>
           <p:nvSpPr>
-            <p:cNvPr id="97" name="pt97"/>
-            <p:cNvSpPr/>
-            <p:nvPr/>
-          </p:nvSpPr>
-          <p:spPr>
-            <a:xfrm>
-              <a:off x="6102779" y="3056473"/>
-              <a:ext cx="39885" cy="39885"/>
+            <p:cNvPr id="98" name="pt98"/>
+            <p:cNvSpPr/>
+            <p:nvPr/>
+          </p:nvSpPr>
+          <p:spPr>
+            <a:xfrm>
+              <a:off x="4731315" y="2684567"/>
+              <a:ext cx="40703" cy="40703"/>
             </a:xfrm>
             <a:prstGeom prst="ellipse">
               <a:avLst/>
@@ -5874,7 +5917,7 @@
                 <a:alpha val="100000"/>
               </a:srgbClr>
             </a:solidFill>
-            <a:ln w="7363" cap="rnd">
+            <a:ln w="8181" cap="rnd">
               <a:solidFill>
                 <a:srgbClr val="0072B2">
                   <a:alpha val="100000"/>
@@ -5892,14 +5935,14 @@
         </p:sp>
         <p:sp>
           <p:nvSpPr>
-            <p:cNvPr id="98" name="pt98"/>
-            <p:cNvSpPr/>
-            <p:nvPr/>
-          </p:nvSpPr>
-          <p:spPr>
-            <a:xfrm>
-              <a:off x="6567893" y="2199769"/>
-              <a:ext cx="39885" cy="39885"/>
+            <p:cNvPr id="99" name="pt99"/>
+            <p:cNvSpPr/>
+            <p:nvPr/>
+          </p:nvSpPr>
+          <p:spPr>
+            <a:xfrm>
+              <a:off x="5060772" y="2012721"/>
+              <a:ext cx="40703" cy="40703"/>
             </a:xfrm>
             <a:prstGeom prst="ellipse">
               <a:avLst/>
@@ -5909,7 +5952,7 @@
                 <a:alpha val="100000"/>
               </a:srgbClr>
             </a:solidFill>
-            <a:ln w="7363" cap="rnd">
+            <a:ln w="8181" cap="rnd">
               <a:solidFill>
                 <a:srgbClr val="0072B2">
                   <a:alpha val="100000"/>
@@ -5927,14 +5970,14 @@
         </p:sp>
         <p:sp>
           <p:nvSpPr>
-            <p:cNvPr id="99" name="pt99"/>
-            <p:cNvSpPr/>
-            <p:nvPr/>
-          </p:nvSpPr>
-          <p:spPr>
-            <a:xfrm>
-              <a:off x="7808196" y="1148359"/>
-              <a:ext cx="39885" cy="39885"/>
+            <p:cNvPr id="100" name="pt100"/>
+            <p:cNvSpPr/>
+            <p:nvPr/>
+          </p:nvSpPr>
+          <p:spPr>
+            <a:xfrm>
+              <a:off x="5939325" y="1188182"/>
+              <a:ext cx="40703" cy="40703"/>
             </a:xfrm>
             <a:prstGeom prst="ellipse">
               <a:avLst/>
@@ -5944,7 +5987,7 @@
                 <a:alpha val="100000"/>
               </a:srgbClr>
             </a:solidFill>
-            <a:ln w="7363" cap="rnd">
+            <a:ln w="8181" cap="rnd">
               <a:solidFill>
                 <a:srgbClr val="0072B2">
                   <a:alpha val="100000"/>
@@ -5962,14 +6005,14 @@
         </p:sp>
         <p:sp>
           <p:nvSpPr>
-            <p:cNvPr id="100" name="pt100"/>
-            <p:cNvSpPr/>
-            <p:nvPr/>
-          </p:nvSpPr>
-          <p:spPr>
-            <a:xfrm>
-              <a:off x="8273309" y="2044004"/>
-              <a:ext cx="39885" cy="39885"/>
+            <p:cNvPr id="101" name="pt101"/>
+            <p:cNvSpPr/>
+            <p:nvPr/>
+          </p:nvSpPr>
+          <p:spPr>
+            <a:xfrm>
+              <a:off x="6268782" y="1890567"/>
+              <a:ext cx="40703" cy="40703"/>
             </a:xfrm>
             <a:prstGeom prst="ellipse">
               <a:avLst/>
@@ -5979,7 +6022,7 @@
                 <a:alpha val="100000"/>
               </a:srgbClr>
             </a:solidFill>
-            <a:ln w="7363" cap="rnd">
+            <a:ln w="8181" cap="rnd">
               <a:solidFill>
                 <a:srgbClr val="0072B2">
                   <a:alpha val="100000"/>
@@ -5997,14 +6040,14 @@
         </p:sp>
         <p:sp>
           <p:nvSpPr>
-            <p:cNvPr id="101" name="pt101"/>
-            <p:cNvSpPr/>
-            <p:nvPr/>
-          </p:nvSpPr>
-          <p:spPr>
-            <a:xfrm>
-              <a:off x="7188044" y="2044004"/>
-              <a:ext cx="39885" cy="39885"/>
+            <p:cNvPr id="102" name="pt102"/>
+            <p:cNvSpPr/>
+            <p:nvPr/>
+          </p:nvSpPr>
+          <p:spPr>
+            <a:xfrm>
+              <a:off x="5500049" y="1890567"/>
+              <a:ext cx="40703" cy="40703"/>
             </a:xfrm>
             <a:prstGeom prst="ellipse">
               <a:avLst/>
@@ -6014,7 +6057,7 @@
                 <a:alpha val="100000"/>
               </a:srgbClr>
             </a:solidFill>
-            <a:ln w="7363" cap="rnd">
+            <a:ln w="8181" cap="rnd">
               <a:solidFill>
                 <a:srgbClr val="0072B2">
                   <a:alpha val="100000"/>
@@ -6032,14 +6075,14 @@
         </p:sp>
         <p:sp>
           <p:nvSpPr>
-            <p:cNvPr id="102" name="pt102"/>
-            <p:cNvSpPr/>
-            <p:nvPr/>
-          </p:nvSpPr>
-          <p:spPr>
-            <a:xfrm>
-              <a:off x="8428347" y="1849299"/>
-              <a:ext cx="39885" cy="39885"/>
+            <p:cNvPr id="103" name="pt103"/>
+            <p:cNvSpPr/>
+            <p:nvPr/>
+          </p:nvSpPr>
+          <p:spPr>
+            <a:xfrm>
+              <a:off x="6378602" y="1737875"/>
+              <a:ext cx="40703" cy="40703"/>
             </a:xfrm>
             <a:prstGeom prst="ellipse">
               <a:avLst/>
@@ -6049,7 +6092,7 @@
                 <a:alpha val="100000"/>
               </a:srgbClr>
             </a:solidFill>
-            <a:ln w="7363" cap="rnd">
+            <a:ln w="8181" cap="rnd">
               <a:solidFill>
                 <a:srgbClr val="0072B2">
                   <a:alpha val="100000"/>
@@ -6067,14 +6110,14 @@
         </p:sp>
         <p:sp>
           <p:nvSpPr>
-            <p:cNvPr id="103" name="pt103"/>
-            <p:cNvSpPr/>
-            <p:nvPr/>
-          </p:nvSpPr>
-          <p:spPr>
-            <a:xfrm>
-              <a:off x="5637666" y="2861767"/>
-              <a:ext cx="39885" cy="39885"/>
+            <p:cNvPr id="104" name="pt104"/>
+            <p:cNvSpPr/>
+            <p:nvPr/>
+          </p:nvSpPr>
+          <p:spPr>
+            <a:xfrm>
+              <a:off x="4401857" y="2531875"/>
+              <a:ext cx="40703" cy="40703"/>
             </a:xfrm>
             <a:prstGeom prst="ellipse">
               <a:avLst/>
@@ -6084,7 +6127,7 @@
                 <a:alpha val="100000"/>
               </a:srgbClr>
             </a:solidFill>
-            <a:ln w="7363" cap="rnd">
+            <a:ln w="8181" cap="rnd">
               <a:solidFill>
                 <a:srgbClr val="0072B2">
                   <a:alpha val="100000"/>
@@ -6102,14 +6145,14 @@
         </p:sp>
         <p:sp>
           <p:nvSpPr>
-            <p:cNvPr id="104" name="pt104"/>
-            <p:cNvSpPr/>
-            <p:nvPr/>
-          </p:nvSpPr>
-          <p:spPr>
-            <a:xfrm>
-              <a:off x="6257817" y="2511297"/>
-              <a:ext cx="39885" cy="39885"/>
+            <p:cNvPr id="105" name="pt105"/>
+            <p:cNvSpPr/>
+            <p:nvPr/>
+          </p:nvSpPr>
+          <p:spPr>
+            <a:xfrm>
+              <a:off x="4841134" y="2257029"/>
+              <a:ext cx="40703" cy="40703"/>
             </a:xfrm>
             <a:prstGeom prst="ellipse">
               <a:avLst/>
@@ -6119,7 +6162,7 @@
                 <a:alpha val="100000"/>
               </a:srgbClr>
             </a:solidFill>
-            <a:ln w="7363" cap="rnd">
+            <a:ln w="8181" cap="rnd">
               <a:solidFill>
                 <a:srgbClr val="0072B2">
                   <a:alpha val="100000"/>
@@ -6137,14 +6180,14 @@
         </p:sp>
         <p:sp>
           <p:nvSpPr>
-            <p:cNvPr id="105" name="pt105"/>
-            <p:cNvSpPr/>
-            <p:nvPr/>
-          </p:nvSpPr>
-          <p:spPr>
-            <a:xfrm>
-              <a:off x="5327590" y="3173296"/>
-              <a:ext cx="39885" cy="39885"/>
+            <p:cNvPr id="106" name="pt106"/>
+            <p:cNvSpPr/>
+            <p:nvPr/>
+          </p:nvSpPr>
+          <p:spPr>
+            <a:xfrm>
+              <a:off x="4182219" y="2776182"/>
+              <a:ext cx="40703" cy="40703"/>
             </a:xfrm>
             <a:prstGeom prst="ellipse">
               <a:avLst/>
@@ -6154,7 +6197,7 @@
                 <a:alpha val="100000"/>
               </a:srgbClr>
             </a:solidFill>
-            <a:ln w="7363" cap="rnd">
+            <a:ln w="8181" cap="rnd">
               <a:solidFill>
                 <a:srgbClr val="0072B2">
                   <a:alpha val="100000"/>
@@ -6172,14 +6215,14 @@
         </p:sp>
         <p:sp>
           <p:nvSpPr>
-            <p:cNvPr id="106" name="pt106"/>
-            <p:cNvSpPr/>
-            <p:nvPr/>
-          </p:nvSpPr>
-          <p:spPr>
-            <a:xfrm>
-              <a:off x="5947741" y="2550239"/>
-              <a:ext cx="39885" cy="39885"/>
+            <p:cNvPr id="107" name="pt107"/>
+            <p:cNvSpPr/>
+            <p:nvPr/>
+          </p:nvSpPr>
+          <p:spPr>
+            <a:xfrm>
+              <a:off x="4621496" y="2287567"/>
+              <a:ext cx="40703" cy="40703"/>
             </a:xfrm>
             <a:prstGeom prst="ellipse">
               <a:avLst/>
@@ -6189,7 +6232,7 @@
                 <a:alpha val="100000"/>
               </a:srgbClr>
             </a:solidFill>
-            <a:ln w="7363" cap="rnd">
+            <a:ln w="8181" cap="rnd">
               <a:solidFill>
                 <a:srgbClr val="0072B2">
                   <a:alpha val="100000"/>
@@ -6207,14 +6250,14 @@
         </p:sp>
         <p:sp>
           <p:nvSpPr>
-            <p:cNvPr id="107" name="pt107"/>
-            <p:cNvSpPr/>
-            <p:nvPr/>
-          </p:nvSpPr>
-          <p:spPr>
-            <a:xfrm>
-              <a:off x="7033006" y="1966122"/>
-              <a:ext cx="39885" cy="39885"/>
+            <p:cNvPr id="108" name="pt108"/>
+            <p:cNvSpPr/>
+            <p:nvPr/>
+          </p:nvSpPr>
+          <p:spPr>
+            <a:xfrm>
+              <a:off x="5390229" y="1829490"/>
+              <a:ext cx="40703" cy="40703"/>
             </a:xfrm>
             <a:prstGeom prst="ellipse">
               <a:avLst/>
@@ -6224,7 +6267,7 @@
                 <a:alpha val="100000"/>
               </a:srgbClr>
             </a:solidFill>
-            <a:ln w="7363" cap="rnd">
+            <a:ln w="8181" cap="rnd">
               <a:solidFill>
                 <a:srgbClr val="0072B2">
                   <a:alpha val="100000"/>
@@ -6242,14 +6285,14 @@
         </p:sp>
         <p:sp>
           <p:nvSpPr>
-            <p:cNvPr id="108" name="pt108"/>
-            <p:cNvSpPr/>
-            <p:nvPr/>
-          </p:nvSpPr>
-          <p:spPr>
-            <a:xfrm>
-              <a:off x="5482628" y="2628121"/>
-              <a:ext cx="39885" cy="39885"/>
+            <p:cNvPr id="109" name="pt109"/>
+            <p:cNvSpPr/>
+            <p:nvPr/>
+          </p:nvSpPr>
+          <p:spPr>
+            <a:xfrm>
+              <a:off x="4292038" y="2348644"/>
+              <a:ext cx="40703" cy="40703"/>
             </a:xfrm>
             <a:prstGeom prst="ellipse">
               <a:avLst/>
@@ -6259,7 +6302,7 @@
                 <a:alpha val="100000"/>
               </a:srgbClr>
             </a:solidFill>
-            <a:ln w="7363" cap="rnd">
+            <a:ln w="8181" cap="rnd">
               <a:solidFill>
                 <a:srgbClr val="0072B2">
                   <a:alpha val="100000"/>
@@ -6277,14 +6320,14 @@
         </p:sp>
         <p:sp>
           <p:nvSpPr>
-            <p:cNvPr id="109" name="pt109"/>
-            <p:cNvSpPr/>
-            <p:nvPr/>
-          </p:nvSpPr>
-          <p:spPr>
-            <a:xfrm>
-              <a:off x="5172552" y="3017532"/>
-              <a:ext cx="39885" cy="39885"/>
+            <p:cNvPr id="110" name="pt110"/>
+            <p:cNvSpPr/>
+            <p:nvPr/>
+          </p:nvSpPr>
+          <p:spPr>
+            <a:xfrm>
+              <a:off x="4072400" y="2654029"/>
+              <a:ext cx="40703" cy="40703"/>
             </a:xfrm>
             <a:prstGeom prst="ellipse">
               <a:avLst/>
@@ -6294,7 +6337,7 @@
                 <a:alpha val="100000"/>
               </a:srgbClr>
             </a:solidFill>
-            <a:ln w="7363" cap="rnd">
+            <a:ln w="8181" cap="rnd">
               <a:solidFill>
                 <a:srgbClr val="0072B2">
                   <a:alpha val="100000"/>
@@ -6312,14 +6355,14 @@
         </p:sp>
         <p:sp>
           <p:nvSpPr>
-            <p:cNvPr id="110" name="pt110"/>
-            <p:cNvSpPr/>
-            <p:nvPr/>
-          </p:nvSpPr>
-          <p:spPr>
-            <a:xfrm>
-              <a:off x="8583385" y="758948"/>
-              <a:ext cx="39885" cy="39885"/>
+            <p:cNvPr id="111" name="pt111"/>
+            <p:cNvSpPr/>
+            <p:nvPr/>
+          </p:nvSpPr>
+          <p:spPr>
+            <a:xfrm>
+              <a:off x="6488421" y="882798"/>
+              <a:ext cx="40703" cy="40703"/>
             </a:xfrm>
             <a:prstGeom prst="ellipse">
               <a:avLst/>
@@ -6329,7 +6372,7 @@
                 <a:alpha val="100000"/>
               </a:srgbClr>
             </a:solidFill>
-            <a:ln w="7363" cap="rnd">
+            <a:ln w="8181" cap="rnd">
               <a:solidFill>
                 <a:srgbClr val="E69F00">
                   <a:alpha val="100000"/>
@@ -6347,14 +6390,14 @@
         </p:sp>
         <p:sp>
           <p:nvSpPr>
-            <p:cNvPr id="111" name="pt111"/>
-            <p:cNvSpPr/>
-            <p:nvPr/>
-          </p:nvSpPr>
-          <p:spPr>
-            <a:xfrm>
-              <a:off x="7808196" y="1576711"/>
-              <a:ext cx="39885" cy="39885"/>
+            <p:cNvPr id="112" name="pt112"/>
+            <p:cNvSpPr/>
+            <p:nvPr/>
+          </p:nvSpPr>
+          <p:spPr>
+            <a:xfrm>
+              <a:off x="5939325" y="1524106"/>
+              <a:ext cx="40703" cy="40703"/>
             </a:xfrm>
             <a:prstGeom prst="ellipse">
               <a:avLst/>
@@ -6364,7 +6407,7 @@
                 <a:alpha val="100000"/>
               </a:srgbClr>
             </a:solidFill>
-            <a:ln w="7363" cap="rnd">
+            <a:ln w="8181" cap="rnd">
               <a:solidFill>
                 <a:srgbClr val="E69F00">
                   <a:alpha val="100000"/>
@@ -6382,14 +6425,14 @@
         </p:sp>
         <p:sp>
           <p:nvSpPr>
-            <p:cNvPr id="112" name="pt112"/>
-            <p:cNvSpPr/>
-            <p:nvPr/>
-          </p:nvSpPr>
-          <p:spPr>
-            <a:xfrm>
-              <a:off x="7653158" y="1771417"/>
-              <a:ext cx="39885" cy="39885"/>
+            <p:cNvPr id="113" name="pt113"/>
+            <p:cNvSpPr/>
+            <p:nvPr/>
+          </p:nvSpPr>
+          <p:spPr>
+            <a:xfrm>
+              <a:off x="5829506" y="1676798"/>
+              <a:ext cx="40703" cy="40703"/>
             </a:xfrm>
             <a:prstGeom prst="ellipse">
               <a:avLst/>
@@ -6399,7 +6442,7 @@
                 <a:alpha val="100000"/>
               </a:srgbClr>
             </a:solidFill>
-            <a:ln w="7363" cap="rnd">
+            <a:ln w="8181" cap="rnd">
               <a:solidFill>
                 <a:srgbClr val="E69F00">
                   <a:alpha val="100000"/>
@@ -6417,14 +6460,14 @@
         </p:sp>
         <p:sp>
           <p:nvSpPr>
-            <p:cNvPr id="113" name="pt113"/>
-            <p:cNvSpPr/>
-            <p:nvPr/>
-          </p:nvSpPr>
-          <p:spPr>
-            <a:xfrm>
-              <a:off x="7498120" y="1615652"/>
-              <a:ext cx="39885" cy="39885"/>
+            <p:cNvPr id="114" name="pt114"/>
+            <p:cNvSpPr/>
+            <p:nvPr/>
+          </p:nvSpPr>
+          <p:spPr>
+            <a:xfrm>
+              <a:off x="5719687" y="1554644"/>
+              <a:ext cx="40703" cy="40703"/>
             </a:xfrm>
             <a:prstGeom prst="ellipse">
               <a:avLst/>
@@ -6434,7 +6477,7 @@
                 <a:alpha val="100000"/>
               </a:srgbClr>
             </a:solidFill>
-            <a:ln w="7363" cap="rnd">
+            <a:ln w="8181" cap="rnd">
               <a:solidFill>
                 <a:srgbClr val="E69F00">
                   <a:alpha val="100000"/>
@@ -6452,14 +6495,14 @@
         </p:sp>
         <p:sp>
           <p:nvSpPr>
-            <p:cNvPr id="114" name="pt114"/>
-            <p:cNvSpPr/>
-            <p:nvPr/>
-          </p:nvSpPr>
-          <p:spPr>
-            <a:xfrm>
-              <a:off x="6877968" y="2316592"/>
-              <a:ext cx="39885" cy="39885"/>
+            <p:cNvPr id="115" name="pt115"/>
+            <p:cNvSpPr/>
+            <p:nvPr/>
+          </p:nvSpPr>
+          <p:spPr>
+            <a:xfrm>
+              <a:off x="5280410" y="2104336"/>
+              <a:ext cx="40703" cy="40703"/>
             </a:xfrm>
             <a:prstGeom prst="ellipse">
               <a:avLst/>
@@ -6469,7 +6512,7 @@
                 <a:alpha val="100000"/>
               </a:srgbClr>
             </a:solidFill>
-            <a:ln w="7363" cap="rnd">
+            <a:ln w="8181" cap="rnd">
               <a:solidFill>
                 <a:srgbClr val="E69F00">
                   <a:alpha val="100000"/>
@@ -6487,14 +6530,14 @@
         </p:sp>
         <p:sp>
           <p:nvSpPr>
-            <p:cNvPr id="115" name="pt115"/>
-            <p:cNvSpPr/>
-            <p:nvPr/>
-          </p:nvSpPr>
-          <p:spPr>
-            <a:xfrm>
-              <a:off x="7188044" y="2433415"/>
-              <a:ext cx="39885" cy="39885"/>
+            <p:cNvPr id="116" name="pt116"/>
+            <p:cNvSpPr/>
+            <p:nvPr/>
+          </p:nvSpPr>
+          <p:spPr>
+            <a:xfrm>
+              <a:off x="5500049" y="2195952"/>
+              <a:ext cx="40703" cy="40703"/>
             </a:xfrm>
             <a:prstGeom prst="ellipse">
               <a:avLst/>
@@ -6504,7 +6547,7 @@
                 <a:alpha val="100000"/>
               </a:srgbClr>
             </a:solidFill>
-            <a:ln w="7363" cap="rnd">
+            <a:ln w="8181" cap="rnd">
               <a:solidFill>
                 <a:srgbClr val="E69F00">
                   <a:alpha val="100000"/>
@@ -6522,14 +6565,14 @@
         </p:sp>
         <p:sp>
           <p:nvSpPr>
-            <p:cNvPr id="116" name="pt116"/>
-            <p:cNvSpPr/>
-            <p:nvPr/>
-          </p:nvSpPr>
-          <p:spPr>
-            <a:xfrm>
-              <a:off x="7963233" y="2044004"/>
-              <a:ext cx="39885" cy="39885"/>
+            <p:cNvPr id="117" name="pt117"/>
+            <p:cNvSpPr/>
+            <p:nvPr/>
+          </p:nvSpPr>
+          <p:spPr>
+            <a:xfrm>
+              <a:off x="6049144" y="1890567"/>
+              <a:ext cx="40703" cy="40703"/>
             </a:xfrm>
             <a:prstGeom prst="ellipse">
               <a:avLst/>
@@ -6539,7 +6582,7 @@
                 <a:alpha val="100000"/>
               </a:srgbClr>
             </a:solidFill>
-            <a:ln w="7363" cap="rnd">
+            <a:ln w="8181" cap="rnd">
               <a:solidFill>
                 <a:srgbClr val="E69F00">
                   <a:alpha val="100000"/>
@@ -6557,14 +6600,14 @@
         </p:sp>
         <p:sp>
           <p:nvSpPr>
-            <p:cNvPr id="117" name="pt117"/>
-            <p:cNvSpPr/>
-            <p:nvPr/>
-          </p:nvSpPr>
-          <p:spPr>
-            <a:xfrm>
-              <a:off x="8428347" y="1031536"/>
-              <a:ext cx="39885" cy="39885"/>
+            <p:cNvPr id="118" name="pt118"/>
+            <p:cNvSpPr/>
+            <p:nvPr/>
+          </p:nvSpPr>
+          <p:spPr>
+            <a:xfrm>
+              <a:off x="6378602" y="1096567"/>
+              <a:ext cx="40703" cy="40703"/>
             </a:xfrm>
             <a:prstGeom prst="ellipse">
               <a:avLst/>
@@ -6574,7 +6617,7 @@
                 <a:alpha val="100000"/>
               </a:srgbClr>
             </a:solidFill>
-            <a:ln w="7363" cap="rnd">
+            <a:ln w="8181" cap="rnd">
               <a:solidFill>
                 <a:srgbClr val="E69F00">
                   <a:alpha val="100000"/>
@@ -6592,14 +6635,14 @@
         </p:sp>
         <p:sp>
           <p:nvSpPr>
-            <p:cNvPr id="118" name="pt118"/>
-            <p:cNvSpPr/>
-            <p:nvPr/>
-          </p:nvSpPr>
-          <p:spPr>
-            <a:xfrm>
-              <a:off x="6412855" y="2005063"/>
-              <a:ext cx="39885" cy="39885"/>
+            <p:cNvPr id="119" name="pt119"/>
+            <p:cNvSpPr/>
+            <p:nvPr/>
+          </p:nvSpPr>
+          <p:spPr>
+            <a:xfrm>
+              <a:off x="4950953" y="1860029"/>
+              <a:ext cx="40703" cy="40703"/>
             </a:xfrm>
             <a:prstGeom prst="ellipse">
               <a:avLst/>
@@ -6609,7 +6652,7 @@
                 <a:alpha val="100000"/>
               </a:srgbClr>
             </a:solidFill>
-            <a:ln w="7363" cap="rnd">
+            <a:ln w="8181" cap="rnd">
               <a:solidFill>
                 <a:srgbClr val="E69F00">
                   <a:alpha val="100000"/>
@@ -6627,14 +6670,14 @@
         </p:sp>
         <p:sp>
           <p:nvSpPr>
-            <p:cNvPr id="119" name="pt119"/>
-            <p:cNvSpPr/>
-            <p:nvPr/>
-          </p:nvSpPr>
-          <p:spPr>
-            <a:xfrm>
-              <a:off x="8273309" y="1654593"/>
-              <a:ext cx="39885" cy="39885"/>
+            <p:cNvPr id="120" name="pt120"/>
+            <p:cNvSpPr/>
+            <p:nvPr/>
+          </p:nvSpPr>
+          <p:spPr>
+            <a:xfrm>
+              <a:off x="6268782" y="1585182"/>
+              <a:ext cx="40703" cy="40703"/>
             </a:xfrm>
             <a:prstGeom prst="ellipse">
               <a:avLst/>
@@ -6644,7 +6687,7 @@
                 <a:alpha val="100000"/>
               </a:srgbClr>
             </a:solidFill>
-            <a:ln w="7363" cap="rnd">
+            <a:ln w="8181" cap="rnd">
               <a:solidFill>
                 <a:srgbClr val="E69F00">
                   <a:alpha val="100000"/>
@@ -6662,14 +6705,14 @@
         </p:sp>
         <p:sp>
           <p:nvSpPr>
-            <p:cNvPr id="120" name="pt120"/>
-            <p:cNvSpPr/>
-            <p:nvPr/>
-          </p:nvSpPr>
-          <p:spPr>
-            <a:xfrm>
-              <a:off x="6102779" y="2978591"/>
-              <a:ext cx="39885" cy="39885"/>
+            <p:cNvPr id="121" name="pt121"/>
+            <p:cNvSpPr/>
+            <p:nvPr/>
+          </p:nvSpPr>
+          <p:spPr>
+            <a:xfrm>
+              <a:off x="4731315" y="2623490"/>
+              <a:ext cx="40703" cy="40703"/>
             </a:xfrm>
             <a:prstGeom prst="ellipse">
               <a:avLst/>
@@ -6679,7 +6722,7 @@
                 <a:alpha val="100000"/>
               </a:srgbClr>
             </a:solidFill>
-            <a:ln w="7363" cap="rnd">
+            <a:ln w="8181" cap="rnd">
               <a:solidFill>
                 <a:srgbClr val="E69F00">
                   <a:alpha val="100000"/>
@@ -6697,14 +6740,14 @@
         </p:sp>
         <p:sp>
           <p:nvSpPr>
-            <p:cNvPr id="121" name="pt121"/>
-            <p:cNvSpPr/>
-            <p:nvPr/>
-          </p:nvSpPr>
-          <p:spPr>
-            <a:xfrm>
-              <a:off x="8118271" y="2082945"/>
-              <a:ext cx="39885" cy="39885"/>
+            <p:cNvPr id="122" name="pt122"/>
+            <p:cNvSpPr/>
+            <p:nvPr/>
+          </p:nvSpPr>
+          <p:spPr>
+            <a:xfrm>
+              <a:off x="6158963" y="1921106"/>
+              <a:ext cx="40703" cy="40703"/>
             </a:xfrm>
             <a:prstGeom prst="ellipse">
               <a:avLst/>
@@ -6714,7 +6757,7 @@
                 <a:alpha val="100000"/>
               </a:srgbClr>
             </a:solidFill>
-            <a:ln w="7363" cap="rnd">
+            <a:ln w="8181" cap="rnd">
               <a:solidFill>
                 <a:srgbClr val="E69F00">
                   <a:alpha val="100000"/>
@@ -6732,14 +6775,14 @@
         </p:sp>
         <p:sp>
           <p:nvSpPr>
-            <p:cNvPr id="122" name="pt122"/>
-            <p:cNvSpPr/>
-            <p:nvPr/>
-          </p:nvSpPr>
-          <p:spPr>
-            <a:xfrm>
-              <a:off x="5947741" y="2706003"/>
-              <a:ext cx="39885" cy="39885"/>
+            <p:cNvPr id="123" name="pt123"/>
+            <p:cNvSpPr/>
+            <p:nvPr/>
+          </p:nvSpPr>
+          <p:spPr>
+            <a:xfrm>
+              <a:off x="4621496" y="2409721"/>
+              <a:ext cx="40703" cy="40703"/>
             </a:xfrm>
             <a:prstGeom prst="ellipse">
               <a:avLst/>
@@ -6749,7 +6792,7 @@
                 <a:alpha val="100000"/>
               </a:srgbClr>
             </a:solidFill>
-            <a:ln w="7363" cap="rnd">
+            <a:ln w="8181" cap="rnd">
               <a:solidFill>
                 <a:srgbClr val="E69F00">
                   <a:alpha val="100000"/>
@@ -6767,14 +6810,14 @@
         </p:sp>
         <p:sp>
           <p:nvSpPr>
-            <p:cNvPr id="123" name="pt123"/>
-            <p:cNvSpPr/>
-            <p:nvPr/>
-          </p:nvSpPr>
-          <p:spPr>
-            <a:xfrm>
-              <a:off x="6722931" y="2783885"/>
-              <a:ext cx="39885" cy="39885"/>
+            <p:cNvPr id="124" name="pt124"/>
+            <p:cNvSpPr/>
+            <p:nvPr/>
+          </p:nvSpPr>
+          <p:spPr>
+            <a:xfrm>
+              <a:off x="5170591" y="2470798"/>
+              <a:ext cx="40703" cy="40703"/>
             </a:xfrm>
             <a:prstGeom prst="ellipse">
               <a:avLst/>
@@ -6784,7 +6827,7 @@
                 <a:alpha val="100000"/>
               </a:srgbClr>
             </a:solidFill>
-            <a:ln w="7363" cap="rnd">
+            <a:ln w="8181" cap="rnd">
               <a:solidFill>
                 <a:srgbClr val="E69F00">
                   <a:alpha val="100000"/>
@@ -6802,14 +6845,14 @@
         </p:sp>
         <p:sp>
           <p:nvSpPr>
-            <p:cNvPr id="124" name="pt124"/>
-            <p:cNvSpPr/>
-            <p:nvPr/>
-          </p:nvSpPr>
-          <p:spPr>
-            <a:xfrm>
-              <a:off x="5792703" y="2082945"/>
-              <a:ext cx="39885" cy="39885"/>
+            <p:cNvPr id="125" name="pt125"/>
+            <p:cNvSpPr/>
+            <p:nvPr/>
+          </p:nvSpPr>
+          <p:spPr>
+            <a:xfrm>
+              <a:off x="4511676" y="1921106"/>
+              <a:ext cx="40703" cy="40703"/>
             </a:xfrm>
             <a:prstGeom prst="ellipse">
               <a:avLst/>
@@ -6819,7 +6862,7 @@
                 <a:alpha val="100000"/>
               </a:srgbClr>
             </a:solidFill>
-            <a:ln w="7363" cap="rnd">
+            <a:ln w="8181" cap="rnd">
               <a:solidFill>
                 <a:srgbClr val="E69F00">
                   <a:alpha val="100000"/>
@@ -6837,14 +6880,14 @@
         </p:sp>
         <p:sp>
           <p:nvSpPr>
-            <p:cNvPr id="125" name="pt125"/>
-            <p:cNvSpPr/>
-            <p:nvPr/>
-          </p:nvSpPr>
-          <p:spPr>
-            <a:xfrm>
-              <a:off x="7343082" y="2316592"/>
-              <a:ext cx="39885" cy="39885"/>
+            <p:cNvPr id="126" name="pt126"/>
+            <p:cNvSpPr/>
+            <p:nvPr/>
+          </p:nvSpPr>
+          <p:spPr>
+            <a:xfrm>
+              <a:off x="5609868" y="2104336"/>
+              <a:ext cx="40703" cy="40703"/>
             </a:xfrm>
             <a:prstGeom prst="ellipse">
               <a:avLst/>
@@ -6854,7 +6897,7 @@
                 <a:alpha val="100000"/>
               </a:srgbClr>
             </a:solidFill>
-            <a:ln w="7363" cap="rnd">
+            <a:ln w="8181" cap="rnd">
               <a:solidFill>
                 <a:srgbClr val="E69F00">
                   <a:alpha val="100000"/>
@@ -6872,14 +6915,14 @@
         </p:sp>
         <p:sp>
           <p:nvSpPr>
-            <p:cNvPr id="126" name="pt126"/>
-            <p:cNvSpPr/>
-            <p:nvPr/>
-          </p:nvSpPr>
-          <p:spPr>
-            <a:xfrm>
-              <a:off x="5482628" y="3212237"/>
-              <a:ext cx="39885" cy="39885"/>
+            <p:cNvPr id="127" name="pt127"/>
+            <p:cNvSpPr/>
+            <p:nvPr/>
+          </p:nvSpPr>
+          <p:spPr>
+            <a:xfrm>
+              <a:off x="4292038" y="2806721"/>
+              <a:ext cx="40703" cy="40703"/>
             </a:xfrm>
             <a:prstGeom prst="ellipse">
               <a:avLst/>
@@ -6889,7 +6932,7 @@
                 <a:alpha val="100000"/>
               </a:srgbClr>
             </a:solidFill>
-            <a:ln w="7363" cap="rnd">
+            <a:ln w="8181" cap="rnd">
               <a:solidFill>
                 <a:srgbClr val="E69F00">
                   <a:alpha val="100000"/>
@@ -6907,14 +6950,14 @@
         </p:sp>
         <p:sp>
           <p:nvSpPr>
-            <p:cNvPr id="127" name="pt127"/>
-            <p:cNvSpPr/>
-            <p:nvPr/>
-          </p:nvSpPr>
-          <p:spPr>
-            <a:xfrm>
-              <a:off x="5172552" y="3173296"/>
-              <a:ext cx="39885" cy="39885"/>
+            <p:cNvPr id="128" name="pt128"/>
+            <p:cNvSpPr/>
+            <p:nvPr/>
+          </p:nvSpPr>
+          <p:spPr>
+            <a:xfrm>
+              <a:off x="4072400" y="2776182"/>
+              <a:ext cx="40703" cy="40703"/>
             </a:xfrm>
             <a:prstGeom prst="ellipse">
               <a:avLst/>
@@ -6924,7 +6967,7 @@
                 <a:alpha val="100000"/>
               </a:srgbClr>
             </a:solidFill>
-            <a:ln w="7363" cap="rnd">
+            <a:ln w="8181" cap="rnd">
               <a:solidFill>
                 <a:srgbClr val="E69F00">
                   <a:alpha val="100000"/>
@@ -6942,14 +6985,14 @@
         </p:sp>
         <p:sp>
           <p:nvSpPr>
-            <p:cNvPr id="128" name="pt128"/>
-            <p:cNvSpPr/>
-            <p:nvPr/>
-          </p:nvSpPr>
-          <p:spPr>
-            <a:xfrm>
-              <a:off x="6257817" y="2744944"/>
-              <a:ext cx="39885" cy="39885"/>
+            <p:cNvPr id="129" name="pt129"/>
+            <p:cNvSpPr/>
+            <p:nvPr/>
+          </p:nvSpPr>
+          <p:spPr>
+            <a:xfrm>
+              <a:off x="4841134" y="2440259"/>
+              <a:ext cx="40703" cy="40703"/>
             </a:xfrm>
             <a:prstGeom prst="ellipse">
               <a:avLst/>
@@ -6959,7 +7002,7 @@
                 <a:alpha val="100000"/>
               </a:srgbClr>
             </a:solidFill>
-            <a:ln w="7363" cap="rnd">
+            <a:ln w="8181" cap="rnd">
               <a:solidFill>
                 <a:srgbClr val="E69F00">
                   <a:alpha val="100000"/>
@@ -6977,14 +7020,14 @@
         </p:sp>
         <p:sp>
           <p:nvSpPr>
-            <p:cNvPr id="129" name="pt129"/>
-            <p:cNvSpPr/>
-            <p:nvPr/>
-          </p:nvSpPr>
-          <p:spPr>
-            <a:xfrm>
-              <a:off x="5637666" y="3173296"/>
-              <a:ext cx="39885" cy="39885"/>
+            <p:cNvPr id="130" name="pt130"/>
+            <p:cNvSpPr/>
+            <p:nvPr/>
+          </p:nvSpPr>
+          <p:spPr>
+            <a:xfrm>
+              <a:off x="4401857" y="2776182"/>
+              <a:ext cx="40703" cy="40703"/>
             </a:xfrm>
             <a:prstGeom prst="ellipse">
               <a:avLst/>
@@ -6994,7 +7037,7 @@
                 <a:alpha val="100000"/>
               </a:srgbClr>
             </a:solidFill>
-            <a:ln w="7363" cap="rnd">
+            <a:ln w="8181" cap="rnd">
               <a:solidFill>
                 <a:srgbClr val="E69F00">
                   <a:alpha val="100000"/>
@@ -7012,14 +7055,14 @@
         </p:sp>
         <p:sp>
           <p:nvSpPr>
-            <p:cNvPr id="130" name="pt130"/>
-            <p:cNvSpPr/>
-            <p:nvPr/>
-          </p:nvSpPr>
-          <p:spPr>
-            <a:xfrm>
-              <a:off x="7033006" y="2121886"/>
-              <a:ext cx="39885" cy="39885"/>
+            <p:cNvPr id="131" name="pt131"/>
+            <p:cNvSpPr/>
+            <p:nvPr/>
+          </p:nvSpPr>
+          <p:spPr>
+            <a:xfrm>
+              <a:off x="5390229" y="1951644"/>
+              <a:ext cx="40703" cy="40703"/>
             </a:xfrm>
             <a:prstGeom prst="ellipse">
               <a:avLst/>
@@ -7029,7 +7072,7 @@
                 <a:alpha val="100000"/>
               </a:srgbClr>
             </a:solidFill>
-            <a:ln w="7363" cap="rnd">
+            <a:ln w="8181" cap="rnd">
               <a:solidFill>
                 <a:srgbClr val="E69F00">
                   <a:alpha val="100000"/>
@@ -7047,14 +7090,14 @@
         </p:sp>
         <p:sp>
           <p:nvSpPr>
-            <p:cNvPr id="131" name="pt131"/>
-            <p:cNvSpPr/>
-            <p:nvPr/>
-          </p:nvSpPr>
-          <p:spPr>
-            <a:xfrm>
-              <a:off x="5327590" y="3017532"/>
-              <a:ext cx="39885" cy="39885"/>
+            <p:cNvPr id="132" name="pt132"/>
+            <p:cNvSpPr/>
+            <p:nvPr/>
+          </p:nvSpPr>
+          <p:spPr>
+            <a:xfrm>
+              <a:off x="4182219" y="2654029"/>
+              <a:ext cx="40703" cy="40703"/>
             </a:xfrm>
             <a:prstGeom prst="ellipse">
               <a:avLst/>
@@ -7064,7 +7107,7 @@
                 <a:alpha val="100000"/>
               </a:srgbClr>
             </a:solidFill>
-            <a:ln w="7363" cap="rnd">
+            <a:ln w="8181" cap="rnd">
               <a:solidFill>
                 <a:srgbClr val="E69F00">
                   <a:alpha val="100000"/>
@@ -7082,14 +7125,14 @@
         </p:sp>
         <p:sp>
           <p:nvSpPr>
-            <p:cNvPr id="132" name="pt132"/>
-            <p:cNvSpPr/>
-            <p:nvPr/>
-          </p:nvSpPr>
-          <p:spPr>
-            <a:xfrm>
-              <a:off x="6567893" y="2355533"/>
-              <a:ext cx="39885" cy="39885"/>
+            <p:cNvPr id="133" name="pt133"/>
+            <p:cNvSpPr/>
+            <p:nvPr/>
+          </p:nvSpPr>
+          <p:spPr>
+            <a:xfrm>
+              <a:off x="5060772" y="2134875"/>
+              <a:ext cx="40703" cy="40703"/>
             </a:xfrm>
             <a:prstGeom prst="ellipse">
               <a:avLst/>
@@ -7099,7 +7142,7 @@
                 <a:alpha val="100000"/>
               </a:srgbClr>
             </a:solidFill>
-            <a:ln w="7363" cap="rnd">
+            <a:ln w="8181" cap="rnd">
               <a:solidFill>
                 <a:srgbClr val="E69F00">
                   <a:alpha val="100000"/>
@@ -7117,14 +7160,14 @@
         </p:sp>
         <p:sp>
           <p:nvSpPr>
-            <p:cNvPr id="133" name="rc133"/>
-            <p:cNvSpPr/>
-            <p:nvPr/>
-          </p:nvSpPr>
-          <p:spPr>
-            <a:xfrm>
-              <a:off x="8215733" y="656226"/>
-              <a:ext cx="465113" cy="2698617"/>
+            <p:cNvPr id="134" name="rc134"/>
+            <p:cNvSpPr/>
+            <p:nvPr/>
+          </p:nvSpPr>
+          <p:spPr>
+            <a:xfrm>
+              <a:off x="6234225" y="806953"/>
+              <a:ext cx="329457" cy="2116315"/>
             </a:xfrm>
             <a:prstGeom prst="rect">
               <a:avLst/>
@@ -7143,14 +7186,14 @@
         </p:sp>
         <p:sp>
           <p:nvSpPr>
-            <p:cNvPr id="134" name="tx134"/>
-            <p:cNvSpPr/>
-            <p:nvPr/>
-          </p:nvSpPr>
-          <p:spPr>
-            <a:xfrm>
-              <a:off x="8171272" y="763677"/>
-              <a:ext cx="554034" cy="62087"/>
+            <p:cNvPr id="135" name="tx135"/>
+            <p:cNvSpPr/>
+            <p:nvPr/>
+          </p:nvSpPr>
+          <p:spPr>
+            <a:xfrm>
+              <a:off x="5544465" y="853578"/>
+              <a:ext cx="656813" cy="73609"/>
             </a:xfrm>
             <a:prstGeom prst="rect">
               <a:avLst/>
@@ -7170,7 +7213,7 @@
                 </a:spcAft>
               </a:pPr>
               <a:r>
-                <a:rPr sz="682" i="0" b="0">
+                <a:rPr sz="810" i="0" b="0">
                   <a:solidFill>
                     <a:srgbClr val="4D4D4D">
                       <a:alpha val="100000"/>
@@ -7186,14 +7229,14 @@
         </p:sp>
         <p:sp>
           <p:nvSpPr>
-            <p:cNvPr id="135" name="tx135"/>
-            <p:cNvSpPr/>
-            <p:nvPr/>
-          </p:nvSpPr>
-          <p:spPr>
-            <a:xfrm>
-              <a:off x="8113436" y="888560"/>
-              <a:ext cx="669706" cy="62087"/>
+            <p:cNvPr id="136" name="tx136"/>
+            <p:cNvSpPr/>
+            <p:nvPr/>
+          </p:nvSpPr>
+          <p:spPr>
+            <a:xfrm>
+              <a:off x="5407122" y="1001876"/>
+              <a:ext cx="794156" cy="73609"/>
             </a:xfrm>
             <a:prstGeom prst="rect">
               <a:avLst/>
@@ -7213,7 +7256,7 @@
                 </a:spcAft>
               </a:pPr>
               <a:r>
-                <a:rPr sz="682" i="0" b="0">
+                <a:rPr sz="810" i="0" b="0">
                   <a:solidFill>
                     <a:srgbClr val="4D4D4D">
                       <a:alpha val="100000"/>
@@ -7229,21 +7272,21 @@
         </p:sp>
         <p:sp>
           <p:nvSpPr>
-            <p:cNvPr id="136" name="pl136"/>
-            <p:cNvSpPr/>
-            <p:nvPr/>
-          </p:nvSpPr>
-          <p:spPr>
-            <a:xfrm>
-              <a:off x="5018077" y="656226"/>
-              <a:ext cx="0" cy="2698617"/>
+            <p:cNvPr id="137" name="pl137"/>
+            <p:cNvSpPr/>
+            <p:nvPr/>
+          </p:nvSpPr>
+          <p:spPr>
+            <a:xfrm>
+              <a:off x="3969205" y="806953"/>
+              <a:ext cx="0" cy="2116315"/>
             </a:xfrm>
             <a:custGeom>
               <a:avLst/>
               <a:pathLst>
-                <a:path w="0" h="2698617">
+                <a:path w="0" h="2116315">
                   <a:moveTo>
-                    <a:pt x="0" y="2698617"/>
+                    <a:pt x="0" y="2116315"/>
                   </a:moveTo>
                   <a:lnTo>
                     <a:pt x="0" y="0"/>
@@ -7269,14 +7312,14 @@
         </p:sp>
         <p:sp>
           <p:nvSpPr>
-            <p:cNvPr id="137" name="tx137"/>
-            <p:cNvSpPr/>
-            <p:nvPr/>
-          </p:nvSpPr>
-          <p:spPr>
-            <a:xfrm>
-              <a:off x="4865336" y="2576432"/>
-              <a:ext cx="101498" cy="65379"/>
+            <p:cNvPr id="138" name="tx138"/>
+            <p:cNvSpPr/>
+            <p:nvPr/>
+          </p:nvSpPr>
+          <p:spPr>
+            <a:xfrm>
+              <a:off x="3799249" y="2302064"/>
+              <a:ext cx="113019" cy="72786"/>
             </a:xfrm>
             <a:prstGeom prst="rect">
               <a:avLst/>
@@ -7296,7 +7339,7 @@
                 </a:spcAft>
               </a:pPr>
               <a:r>
-                <a:rPr sz="720" i="0" b="0">
+                <a:rPr sz="800" i="0" b="0">
                   <a:solidFill>
                     <a:srgbClr val="262626">
                       <a:alpha val="100000"/>
@@ -7312,14 +7355,14 @@
         </p:sp>
         <p:sp>
           <p:nvSpPr>
-            <p:cNvPr id="138" name="tx138"/>
-            <p:cNvSpPr/>
-            <p:nvPr/>
-          </p:nvSpPr>
-          <p:spPr>
-            <a:xfrm>
-              <a:off x="4865336" y="1797611"/>
-              <a:ext cx="101498" cy="65379"/>
+            <p:cNvPr id="139" name="tx139"/>
+            <p:cNvSpPr/>
+            <p:nvPr/>
+          </p:nvSpPr>
+          <p:spPr>
+            <a:xfrm>
+              <a:off x="3799249" y="1691295"/>
+              <a:ext cx="113019" cy="72786"/>
             </a:xfrm>
             <a:prstGeom prst="rect">
               <a:avLst/>
@@ -7339,7 +7382,7 @@
                 </a:spcAft>
               </a:pPr>
               <a:r>
-                <a:rPr sz="720" i="0" b="0">
+                <a:rPr sz="800" i="0" b="0">
                   <a:solidFill>
                     <a:srgbClr val="262626">
                       <a:alpha val="100000"/>
@@ -7355,14 +7398,14 @@
         </p:sp>
         <p:sp>
           <p:nvSpPr>
-            <p:cNvPr id="139" name="tx139"/>
-            <p:cNvSpPr/>
-            <p:nvPr/>
-          </p:nvSpPr>
-          <p:spPr>
-            <a:xfrm>
-              <a:off x="4865336" y="1018789"/>
-              <a:ext cx="101498" cy="65379"/>
+            <p:cNvPr id="140" name="tx140"/>
+            <p:cNvSpPr/>
+            <p:nvPr/>
+          </p:nvSpPr>
+          <p:spPr>
+            <a:xfrm>
+              <a:off x="3799249" y="1080526"/>
+              <a:ext cx="113019" cy="72786"/>
             </a:xfrm>
             <a:prstGeom prst="rect">
               <a:avLst/>
@@ -7382,7 +7425,7 @@
                 </a:spcAft>
               </a:pPr>
               <a:r>
-                <a:rPr sz="720" i="0" b="0">
+                <a:rPr sz="800" i="0" b="0">
                   <a:solidFill>
                     <a:srgbClr val="262626">
                       <a:alpha val="100000"/>
@@ -7398,24 +7441,24 @@
         </p:sp>
         <p:sp>
           <p:nvSpPr>
-            <p:cNvPr id="140" name="pl140"/>
-            <p:cNvSpPr/>
-            <p:nvPr/>
-          </p:nvSpPr>
-          <p:spPr>
-            <a:xfrm>
-              <a:off x="4989609" y="2609122"/>
-              <a:ext cx="28468" cy="0"/>
+            <p:cNvPr id="141" name="pl141"/>
+            <p:cNvSpPr/>
+            <p:nvPr/>
+          </p:nvSpPr>
+          <p:spPr>
+            <a:xfrm>
+              <a:off x="3937574" y="2338457"/>
+              <a:ext cx="31631" cy="0"/>
             </a:xfrm>
             <a:custGeom>
               <a:avLst/>
               <a:pathLst>
-                <a:path w="28468" h="0">
+                <a:path w="31631" h="0">
                   <a:moveTo>
                     <a:pt x="0" y="0"/>
                   </a:moveTo>
                   <a:lnTo>
-                    <a:pt x="28468" y="0"/>
+                    <a:pt x="31631" y="0"/>
                   </a:lnTo>
                 </a:path>
               </a:pathLst>
@@ -7438,24 +7481,24 @@
         </p:sp>
         <p:sp>
           <p:nvSpPr>
-            <p:cNvPr id="141" name="pl141"/>
-            <p:cNvSpPr/>
-            <p:nvPr/>
-          </p:nvSpPr>
-          <p:spPr>
-            <a:xfrm>
-              <a:off x="4989609" y="1830300"/>
-              <a:ext cx="28468" cy="0"/>
+            <p:cNvPr id="142" name="pl142"/>
+            <p:cNvSpPr/>
+            <p:nvPr/>
+          </p:nvSpPr>
+          <p:spPr>
+            <a:xfrm>
+              <a:off x="3937574" y="1727688"/>
+              <a:ext cx="31631" cy="0"/>
             </a:xfrm>
             <a:custGeom>
               <a:avLst/>
               <a:pathLst>
-                <a:path w="28468" h="0">
+                <a:path w="31631" h="0">
                   <a:moveTo>
                     <a:pt x="0" y="0"/>
                   </a:moveTo>
                   <a:lnTo>
-                    <a:pt x="28468" y="0"/>
+                    <a:pt x="31631" y="0"/>
                   </a:lnTo>
                 </a:path>
               </a:pathLst>
@@ -7478,24 +7521,24 @@
         </p:sp>
         <p:sp>
           <p:nvSpPr>
-            <p:cNvPr id="142" name="pl142"/>
-            <p:cNvSpPr/>
-            <p:nvPr/>
-          </p:nvSpPr>
-          <p:spPr>
-            <a:xfrm>
-              <a:off x="4989609" y="1051479"/>
-              <a:ext cx="28468" cy="0"/>
+            <p:cNvPr id="143" name="pl143"/>
+            <p:cNvSpPr/>
+            <p:nvPr/>
+          </p:nvSpPr>
+          <p:spPr>
+            <a:xfrm>
+              <a:off x="3937574" y="1116919"/>
+              <a:ext cx="31631" cy="0"/>
             </a:xfrm>
             <a:custGeom>
               <a:avLst/>
               <a:pathLst>
-                <a:path w="28468" h="0">
+                <a:path w="31631" h="0">
                   <a:moveTo>
                     <a:pt x="0" y="0"/>
                   </a:moveTo>
                   <a:lnTo>
-                    <a:pt x="28468" y="0"/>
+                    <a:pt x="31631" y="0"/>
                   </a:lnTo>
                 </a:path>
               </a:pathLst>
@@ -7518,24 +7561,24 @@
         </p:sp>
         <p:sp>
           <p:nvSpPr>
-            <p:cNvPr id="143" name="pl143"/>
-            <p:cNvSpPr/>
-            <p:nvPr/>
-          </p:nvSpPr>
-          <p:spPr>
-            <a:xfrm>
-              <a:off x="5018077" y="3354844"/>
-              <a:ext cx="3837186" cy="0"/>
+            <p:cNvPr id="144" name="pl144"/>
+            <p:cNvSpPr/>
+            <p:nvPr/>
+          </p:nvSpPr>
+          <p:spPr>
+            <a:xfrm>
+              <a:off x="3969205" y="2923269"/>
+              <a:ext cx="2718023" cy="0"/>
             </a:xfrm>
             <a:custGeom>
               <a:avLst/>
               <a:pathLst>
-                <a:path w="3837186" h="0">
+                <a:path w="2718023" h="0">
                   <a:moveTo>
                     <a:pt x="0" y="0"/>
                   </a:moveTo>
                   <a:lnTo>
-                    <a:pt x="3837186" y="0"/>
+                    <a:pt x="2718023" y="0"/>
                   </a:lnTo>
                 </a:path>
               </a:pathLst>
@@ -7558,21 +7601,21 @@
         </p:sp>
         <p:sp>
           <p:nvSpPr>
-            <p:cNvPr id="144" name="pl144"/>
-            <p:cNvSpPr/>
-            <p:nvPr/>
-          </p:nvSpPr>
-          <p:spPr>
-            <a:xfrm>
-              <a:off x="5657608" y="3354844"/>
-              <a:ext cx="0" cy="28468"/>
+            <p:cNvPr id="145" name="pl145"/>
+            <p:cNvSpPr/>
+            <p:nvPr/>
+          </p:nvSpPr>
+          <p:spPr>
+            <a:xfrm>
+              <a:off x="4422209" y="2923269"/>
+              <a:ext cx="0" cy="31631"/>
             </a:xfrm>
             <a:custGeom>
               <a:avLst/>
               <a:pathLst>
-                <a:path w="0" h="28468">
+                <a:path w="0" h="31631">
                   <a:moveTo>
-                    <a:pt x="0" y="28468"/>
+                    <a:pt x="0" y="31631"/>
                   </a:moveTo>
                   <a:lnTo>
                     <a:pt x="0" y="0"/>
@@ -7598,21 +7641,21 @@
         </p:sp>
         <p:sp>
           <p:nvSpPr>
-            <p:cNvPr id="145" name="pl145"/>
-            <p:cNvSpPr/>
-            <p:nvPr/>
-          </p:nvSpPr>
-          <p:spPr>
-            <a:xfrm>
-              <a:off x="6432797" y="3354844"/>
-              <a:ext cx="0" cy="28468"/>
+            <p:cNvPr id="146" name="pl146"/>
+            <p:cNvSpPr/>
+            <p:nvPr/>
+          </p:nvSpPr>
+          <p:spPr>
+            <a:xfrm>
+              <a:off x="4971305" y="2923269"/>
+              <a:ext cx="0" cy="31631"/>
             </a:xfrm>
             <a:custGeom>
               <a:avLst/>
               <a:pathLst>
-                <a:path w="0" h="28468">
+                <a:path w="0" h="31631">
                   <a:moveTo>
-                    <a:pt x="0" y="28468"/>
+                    <a:pt x="0" y="31631"/>
                   </a:moveTo>
                   <a:lnTo>
                     <a:pt x="0" y="0"/>
@@ -7638,21 +7681,21 @@
         </p:sp>
         <p:sp>
           <p:nvSpPr>
-            <p:cNvPr id="146" name="pl146"/>
-            <p:cNvSpPr/>
-            <p:nvPr/>
-          </p:nvSpPr>
-          <p:spPr>
-            <a:xfrm>
-              <a:off x="7207987" y="3354844"/>
-              <a:ext cx="0" cy="28468"/>
+            <p:cNvPr id="147" name="pl147"/>
+            <p:cNvSpPr/>
+            <p:nvPr/>
+          </p:nvSpPr>
+          <p:spPr>
+            <a:xfrm>
+              <a:off x="5520400" y="2923269"/>
+              <a:ext cx="0" cy="31631"/>
             </a:xfrm>
             <a:custGeom>
               <a:avLst/>
               <a:pathLst>
-                <a:path w="0" h="28468">
+                <a:path w="0" h="31631">
                   <a:moveTo>
-                    <a:pt x="0" y="28468"/>
+                    <a:pt x="0" y="31631"/>
                   </a:moveTo>
                   <a:lnTo>
                     <a:pt x="0" y="0"/>
@@ -7678,21 +7721,21 @@
         </p:sp>
         <p:sp>
           <p:nvSpPr>
-            <p:cNvPr id="147" name="pl147"/>
-            <p:cNvSpPr/>
-            <p:nvPr/>
-          </p:nvSpPr>
-          <p:spPr>
-            <a:xfrm>
-              <a:off x="7983176" y="3354844"/>
-              <a:ext cx="0" cy="28468"/>
+            <p:cNvPr id="148" name="pl148"/>
+            <p:cNvSpPr/>
+            <p:nvPr/>
+          </p:nvSpPr>
+          <p:spPr>
+            <a:xfrm>
+              <a:off x="6069496" y="2923269"/>
+              <a:ext cx="0" cy="31631"/>
             </a:xfrm>
             <a:custGeom>
               <a:avLst/>
               <a:pathLst>
-                <a:path w="0" h="28468">
+                <a:path w="0" h="31631">
                   <a:moveTo>
-                    <a:pt x="0" y="28468"/>
+                    <a:pt x="0" y="31631"/>
                   </a:moveTo>
                   <a:lnTo>
                     <a:pt x="0" y="0"/>
@@ -7718,21 +7761,21 @@
         </p:sp>
         <p:sp>
           <p:nvSpPr>
-            <p:cNvPr id="148" name="pl148"/>
-            <p:cNvSpPr/>
-            <p:nvPr/>
-          </p:nvSpPr>
-          <p:spPr>
-            <a:xfrm>
-              <a:off x="8758365" y="3354844"/>
-              <a:ext cx="0" cy="28468"/>
+            <p:cNvPr id="149" name="pl149"/>
+            <p:cNvSpPr/>
+            <p:nvPr/>
+          </p:nvSpPr>
+          <p:spPr>
+            <a:xfrm>
+              <a:off x="6618591" y="2923269"/>
+              <a:ext cx="0" cy="31631"/>
             </a:xfrm>
             <a:custGeom>
               <a:avLst/>
               <a:pathLst>
-                <a:path w="0" h="28468">
+                <a:path w="0" h="31631">
                   <a:moveTo>
-                    <a:pt x="0" y="28468"/>
+                    <a:pt x="0" y="31631"/>
                   </a:moveTo>
                   <a:lnTo>
                     <a:pt x="0" y="0"/>
@@ -7758,14 +7801,14 @@
         </p:sp>
         <p:sp>
           <p:nvSpPr>
-            <p:cNvPr id="149" name="tx149"/>
-            <p:cNvSpPr/>
-            <p:nvPr/>
-          </p:nvSpPr>
-          <p:spPr>
-            <a:xfrm>
-              <a:off x="5556110" y="3406087"/>
-              <a:ext cx="202996" cy="65379"/>
+            <p:cNvPr id="150" name="tx150"/>
+            <p:cNvSpPr/>
+            <p:nvPr/>
+          </p:nvSpPr>
+          <p:spPr>
+            <a:xfrm>
+              <a:off x="4309189" y="2980205"/>
+              <a:ext cx="226039" cy="72786"/>
             </a:xfrm>
             <a:prstGeom prst="rect">
               <a:avLst/>
@@ -7785,7 +7828,7 @@
                 </a:spcAft>
               </a:pPr>
               <a:r>
-                <a:rPr sz="720" i="0" b="0">
+                <a:rPr sz="800" i="0" b="0">
                   <a:solidFill>
                     <a:srgbClr val="262626">
                       <a:alpha val="100000"/>
@@ -7801,14 +7844,14 @@
         </p:sp>
         <p:sp>
           <p:nvSpPr>
-            <p:cNvPr id="150" name="tx150"/>
-            <p:cNvSpPr/>
-            <p:nvPr/>
-          </p:nvSpPr>
-          <p:spPr>
-            <a:xfrm>
-              <a:off x="6331299" y="3406087"/>
-              <a:ext cx="202996" cy="65379"/>
+            <p:cNvPr id="151" name="tx151"/>
+            <p:cNvSpPr/>
+            <p:nvPr/>
+          </p:nvSpPr>
+          <p:spPr>
+            <a:xfrm>
+              <a:off x="4858285" y="2980205"/>
+              <a:ext cx="226039" cy="72786"/>
             </a:xfrm>
             <a:prstGeom prst="rect">
               <a:avLst/>
@@ -7828,7 +7871,7 @@
                 </a:spcAft>
               </a:pPr>
               <a:r>
-                <a:rPr sz="720" i="0" b="0">
+                <a:rPr sz="800" i="0" b="0">
                   <a:solidFill>
                     <a:srgbClr val="262626">
                       <a:alpha val="100000"/>
@@ -7844,14 +7887,14 @@
         </p:sp>
         <p:sp>
           <p:nvSpPr>
-            <p:cNvPr id="151" name="tx151"/>
-            <p:cNvSpPr/>
-            <p:nvPr/>
-          </p:nvSpPr>
-          <p:spPr>
-            <a:xfrm>
-              <a:off x="7106488" y="3406087"/>
-              <a:ext cx="202996" cy="65379"/>
+            <p:cNvPr id="152" name="tx152"/>
+            <p:cNvSpPr/>
+            <p:nvPr/>
+          </p:nvSpPr>
+          <p:spPr>
+            <a:xfrm>
+              <a:off x="5407380" y="2980205"/>
+              <a:ext cx="226039" cy="72786"/>
             </a:xfrm>
             <a:prstGeom prst="rect">
               <a:avLst/>
@@ -7871,7 +7914,7 @@
                 </a:spcAft>
               </a:pPr>
               <a:r>
-                <a:rPr sz="720" i="0" b="0">
+                <a:rPr sz="800" i="0" b="0">
                   <a:solidFill>
                     <a:srgbClr val="262626">
                       <a:alpha val="100000"/>
@@ -7887,14 +7930,14 @@
         </p:sp>
         <p:sp>
           <p:nvSpPr>
-            <p:cNvPr id="152" name="tx152"/>
-            <p:cNvSpPr/>
-            <p:nvPr/>
-          </p:nvSpPr>
-          <p:spPr>
-            <a:xfrm>
-              <a:off x="7881678" y="3406087"/>
-              <a:ext cx="202996" cy="65379"/>
+            <p:cNvPr id="153" name="tx153"/>
+            <p:cNvSpPr/>
+            <p:nvPr/>
+          </p:nvSpPr>
+          <p:spPr>
+            <a:xfrm>
+              <a:off x="5956476" y="2980205"/>
+              <a:ext cx="226039" cy="72786"/>
             </a:xfrm>
             <a:prstGeom prst="rect">
               <a:avLst/>
@@ -7914,7 +7957,7 @@
                 </a:spcAft>
               </a:pPr>
               <a:r>
-                <a:rPr sz="720" i="0" b="0">
+                <a:rPr sz="800" i="0" b="0">
                   <a:solidFill>
                     <a:srgbClr val="262626">
                       <a:alpha val="100000"/>
@@ -7930,14 +7973,14 @@
         </p:sp>
         <p:sp>
           <p:nvSpPr>
-            <p:cNvPr id="153" name="tx153"/>
-            <p:cNvSpPr/>
-            <p:nvPr/>
-          </p:nvSpPr>
-          <p:spPr>
-            <a:xfrm>
-              <a:off x="8656867" y="3406087"/>
-              <a:ext cx="202996" cy="65379"/>
+            <p:cNvPr id="154" name="tx154"/>
+            <p:cNvSpPr/>
+            <p:nvPr/>
+          </p:nvSpPr>
+          <p:spPr>
+            <a:xfrm>
+              <a:off x="6505572" y="2980205"/>
+              <a:ext cx="226039" cy="72786"/>
             </a:xfrm>
             <a:prstGeom prst="rect">
               <a:avLst/>
@@ -7957,7 +8000,7 @@
                 </a:spcAft>
               </a:pPr>
               <a:r>
-                <a:rPr sz="720" i="0" b="0">
+                <a:rPr sz="800" i="0" b="0">
                   <a:solidFill>
                     <a:srgbClr val="262626">
                       <a:alpha val="100000"/>
@@ -7973,14 +8016,285 @@
         </p:sp>
         <p:sp>
           <p:nvSpPr>
-            <p:cNvPr id="154" name="tx154"/>
+            <p:cNvPr id="155" name="tx155"/>
             <p:cNvSpPr/>
             <p:nvPr/>
           </p:nvSpPr>
           <p:spPr>
             <a:xfrm rot="-5400000">
-              <a:off x="4193999" y="1964616"/>
-              <a:ext cx="1155984" cy="81838"/>
+              <a:off x="3052694" y="1819620"/>
+              <a:ext cx="1285463" cy="90982"/>
+            </a:xfrm>
+            <a:prstGeom prst="rect">
+              <a:avLst/>
+            </a:prstGeom>
+            <a:noFill/>
+          </p:spPr>
+          <p:txBody>
+            <a:bodyPr lIns="0" rIns="0" tIns="0" bIns="0" anchorCtr="1" anchor="ctr" wrap="none"/>
+            <a:lstStyle/>
+            <a:p>
+              <a:pPr algn="l" marL="0" marR="0" indent="0">
+                <a:spcBef>
+                  <a:spcPts val="0"/>
+                </a:spcBef>
+                <a:spcAft>
+                  <a:spcPts val="0"/>
+                </a:spcAft>
+              </a:pPr>
+              <a:r>
+                <a:rPr sz="1000" i="0" b="0">
+                  <a:solidFill>
+                    <a:srgbClr val="0D0D0D">
+                      <a:alpha val="100000"/>
+                    </a:srgbClr>
+                  </a:solidFill>
+                  <a:latin typeface="Arial"/>
+                  <a:cs typeface="Arial"/>
+                </a:rPr>
+                <a:t>New provincial records</a:t>
+              </a:r>
+            </a:p>
+          </p:txBody>
+        </p:sp>
+        <p:sp>
+          <p:nvSpPr>
+            <p:cNvPr id="156" name="rc156"/>
+            <p:cNvSpPr/>
+            <p:nvPr/>
+          </p:nvSpPr>
+          <p:spPr>
+            <a:xfrm>
+              <a:off x="3948858" y="904939"/>
+              <a:ext cx="1345345" cy="354271"/>
+            </a:xfrm>
+            <a:prstGeom prst="rect">
+              <a:avLst/>
+            </a:prstGeom>
+            <a:solidFill>
+              <a:srgbClr val="FFFFFF">
+                <a:alpha val="100000"/>
+              </a:srgbClr>
+            </a:solidFill>
+          </p:spPr>
+          <p:txBody>
+            <a:bodyPr/>
+            <a:lstStyle/>
+            <a:p/>
+          </p:txBody>
+        </p:sp>
+        <p:sp>
+          <p:nvSpPr>
+            <p:cNvPr id="157" name="rc157"/>
+            <p:cNvSpPr/>
+            <p:nvPr/>
+          </p:nvSpPr>
+          <p:spPr>
+            <a:xfrm>
+              <a:off x="4012121" y="968201"/>
+              <a:ext cx="113872" cy="113872"/>
+            </a:xfrm>
+            <a:prstGeom prst="rect">
+              <a:avLst/>
+            </a:prstGeom>
+            <a:solidFill>
+              <a:srgbClr val="FFFFFF">
+                <a:alpha val="100000"/>
+              </a:srgbClr>
+            </a:solidFill>
+          </p:spPr>
+          <p:txBody>
+            <a:bodyPr/>
+            <a:lstStyle/>
+            <a:p/>
+          </p:txBody>
+        </p:sp>
+        <p:sp>
+          <p:nvSpPr>
+            <p:cNvPr id="158" name="pl158"/>
+            <p:cNvSpPr/>
+            <p:nvPr/>
+          </p:nvSpPr>
+          <p:spPr>
+            <a:xfrm>
+              <a:off x="4023508" y="1025138"/>
+              <a:ext cx="91098" cy="0"/>
+            </a:xfrm>
+            <a:custGeom>
+              <a:avLst/>
+              <a:pathLst>
+                <a:path w="91098" h="0">
+                  <a:moveTo>
+                    <a:pt x="0" y="0"/>
+                  </a:moveTo>
+                  <a:lnTo>
+                    <a:pt x="91098" y="0"/>
+                  </a:lnTo>
+                </a:path>
+              </a:pathLst>
+            </a:custGeom>
+            <a:ln w="18970" cap="flat">
+              <a:solidFill>
+                <a:srgbClr val="0072B2">
+                  <a:alpha val="100000"/>
+                </a:srgbClr>
+              </a:solidFill>
+              <a:prstDash val="solid"/>
+              <a:round/>
+            </a:ln>
+          </p:spPr>
+          <p:txBody>
+            <a:bodyPr/>
+            <a:lstStyle/>
+            <a:p/>
+          </p:txBody>
+        </p:sp>
+        <p:sp>
+          <p:nvSpPr>
+            <p:cNvPr id="159" name="pt159"/>
+            <p:cNvSpPr/>
+            <p:nvPr/>
+          </p:nvSpPr>
+          <p:spPr>
+            <a:xfrm>
+              <a:off x="4048705" y="1004786"/>
+              <a:ext cx="40703" cy="40703"/>
+            </a:xfrm>
+            <a:prstGeom prst="ellipse">
+              <a:avLst/>
+            </a:prstGeom>
+            <a:solidFill>
+              <a:srgbClr val="0072B2">
+                <a:alpha val="100000"/>
+              </a:srgbClr>
+            </a:solidFill>
+            <a:ln w="8181" cap="rnd">
+              <a:solidFill>
+                <a:srgbClr val="0072B2">
+                  <a:alpha val="100000"/>
+                </a:srgbClr>
+              </a:solidFill>
+              <a:prstDash val="solid"/>
+              <a:round/>
+            </a:ln>
+          </p:spPr>
+          <p:txBody>
+            <a:bodyPr/>
+            <a:lstStyle/>
+            <a:p/>
+          </p:txBody>
+        </p:sp>
+        <p:sp>
+          <p:nvSpPr>
+            <p:cNvPr id="160" name="rc160"/>
+            <p:cNvSpPr/>
+            <p:nvPr/>
+          </p:nvSpPr>
+          <p:spPr>
+            <a:xfrm>
+              <a:off x="4012121" y="1082074"/>
+              <a:ext cx="113872" cy="113872"/>
+            </a:xfrm>
+            <a:prstGeom prst="rect">
+              <a:avLst/>
+            </a:prstGeom>
+            <a:solidFill>
+              <a:srgbClr val="FFFFFF">
+                <a:alpha val="100000"/>
+              </a:srgbClr>
+            </a:solidFill>
+          </p:spPr>
+          <p:txBody>
+            <a:bodyPr/>
+            <a:lstStyle/>
+            <a:p/>
+          </p:txBody>
+        </p:sp>
+        <p:sp>
+          <p:nvSpPr>
+            <p:cNvPr id="161" name="pl161"/>
+            <p:cNvSpPr/>
+            <p:nvPr/>
+          </p:nvSpPr>
+          <p:spPr>
+            <a:xfrm>
+              <a:off x="4023508" y="1139011"/>
+              <a:ext cx="91098" cy="0"/>
+            </a:xfrm>
+            <a:custGeom>
+              <a:avLst/>
+              <a:pathLst>
+                <a:path w="91098" h="0">
+                  <a:moveTo>
+                    <a:pt x="0" y="0"/>
+                  </a:moveTo>
+                  <a:lnTo>
+                    <a:pt x="91098" y="0"/>
+                  </a:lnTo>
+                </a:path>
+              </a:pathLst>
+            </a:custGeom>
+            <a:ln w="18970" cap="flat">
+              <a:solidFill>
+                <a:srgbClr val="E69F00">
+                  <a:alpha val="100000"/>
+                </a:srgbClr>
+              </a:solidFill>
+              <a:prstDash val="solid"/>
+              <a:round/>
+            </a:ln>
+          </p:spPr>
+          <p:txBody>
+            <a:bodyPr/>
+            <a:lstStyle/>
+            <a:p/>
+          </p:txBody>
+        </p:sp>
+        <p:sp>
+          <p:nvSpPr>
+            <p:cNvPr id="162" name="pt162"/>
+            <p:cNvSpPr/>
+            <p:nvPr/>
+          </p:nvSpPr>
+          <p:spPr>
+            <a:xfrm>
+              <a:off x="4048705" y="1118659"/>
+              <a:ext cx="40703" cy="40703"/>
+            </a:xfrm>
+            <a:prstGeom prst="ellipse">
+              <a:avLst/>
+            </a:prstGeom>
+            <a:solidFill>
+              <a:srgbClr val="E69F00">
+                <a:alpha val="100000"/>
+              </a:srgbClr>
+            </a:solidFill>
+            <a:ln w="8181" cap="rnd">
+              <a:solidFill>
+                <a:srgbClr val="E69F00">
+                  <a:alpha val="100000"/>
+                </a:srgbClr>
+              </a:solidFill>
+              <a:prstDash val="solid"/>
+              <a:round/>
+            </a:ln>
+          </p:spPr>
+          <p:txBody>
+            <a:bodyPr/>
+            <a:lstStyle/>
+            <a:p/>
+          </p:txBody>
+        </p:sp>
+        <p:sp>
+          <p:nvSpPr>
+            <p:cNvPr id="163" name="tx163"/>
+            <p:cNvSpPr/>
+            <p:nvPr/>
+          </p:nvSpPr>
+          <p:spPr>
+            <a:xfrm>
+              <a:off x="4189256" y="984218"/>
+              <a:ext cx="984260" cy="81838"/>
             </a:xfrm>
             <a:prstGeom prst="rect">
               <a:avLst/>
@@ -8002,256 +8316,28 @@
               <a:r>
                 <a:rPr sz="900" i="0" b="0">
                   <a:solidFill>
-                    <a:srgbClr val="0D0D0D">
+                    <a:srgbClr val="000000">
                       <a:alpha val="100000"/>
                     </a:srgbClr>
                   </a:solidFill>
                   <a:latin typeface="Arial"/>
                   <a:cs typeface="Arial"/>
                 </a:rPr>
-                <a:t>New provincial records</a:t>
+                <a:t>Discovery year (v2)</a:t>
               </a:r>
             </a:p>
           </p:txBody>
         </p:sp>
         <p:sp>
           <p:nvSpPr>
-            <p:cNvPr id="155" name="rc155"/>
-            <p:cNvSpPr/>
-            <p:nvPr/>
-          </p:nvSpPr>
-          <p:spPr>
-            <a:xfrm>
-              <a:off x="5333471" y="836237"/>
-              <a:ext cx="1211061" cy="341618"/>
-            </a:xfrm>
-            <a:prstGeom prst="rect">
-              <a:avLst/>
-            </a:prstGeom>
-            <a:solidFill>
-              <a:srgbClr val="FFFFFF">
-                <a:alpha val="100000"/>
-              </a:srgbClr>
-            </a:solidFill>
-          </p:spPr>
-          <p:txBody>
-            <a:bodyPr/>
-            <a:lstStyle/>
-            <a:p/>
-          </p:txBody>
-        </p:sp>
-        <p:sp>
-          <p:nvSpPr>
-            <p:cNvPr id="156" name="rc156"/>
-            <p:cNvSpPr/>
-            <p:nvPr/>
-          </p:nvSpPr>
-          <p:spPr>
-            <a:xfrm>
-              <a:off x="5390408" y="893174"/>
-              <a:ext cx="113872" cy="113872"/>
-            </a:xfrm>
-            <a:prstGeom prst="rect">
-              <a:avLst/>
-            </a:prstGeom>
-            <a:solidFill>
-              <a:srgbClr val="FFFFFF">
-                <a:alpha val="100000"/>
-              </a:srgbClr>
-            </a:solidFill>
-          </p:spPr>
-          <p:txBody>
-            <a:bodyPr/>
-            <a:lstStyle/>
-            <a:p/>
-          </p:txBody>
-        </p:sp>
-        <p:sp>
-          <p:nvSpPr>
-            <p:cNvPr id="157" name="pl157"/>
-            <p:cNvSpPr/>
-            <p:nvPr/>
-          </p:nvSpPr>
-          <p:spPr>
-            <a:xfrm>
-              <a:off x="5401795" y="950110"/>
-              <a:ext cx="91098" cy="0"/>
-            </a:xfrm>
-            <a:custGeom>
-              <a:avLst/>
-              <a:pathLst>
-                <a:path w="91098" h="0">
-                  <a:moveTo>
-                    <a:pt x="0" y="0"/>
-                  </a:moveTo>
-                  <a:lnTo>
-                    <a:pt x="91098" y="0"/>
-                  </a:lnTo>
-                </a:path>
-              </a:pathLst>
-            </a:custGeom>
-            <a:ln w="18970" cap="flat">
-              <a:solidFill>
-                <a:srgbClr val="0072B2">
-                  <a:alpha val="100000"/>
-                </a:srgbClr>
-              </a:solidFill>
-              <a:prstDash val="solid"/>
-              <a:round/>
-            </a:ln>
-          </p:spPr>
-          <p:txBody>
-            <a:bodyPr/>
-            <a:lstStyle/>
-            <a:p/>
-          </p:txBody>
-        </p:sp>
-        <p:sp>
-          <p:nvSpPr>
-            <p:cNvPr id="158" name="pt158"/>
-            <p:cNvSpPr/>
-            <p:nvPr/>
-          </p:nvSpPr>
-          <p:spPr>
-            <a:xfrm>
-              <a:off x="5427402" y="930168"/>
-              <a:ext cx="39885" cy="39885"/>
-            </a:xfrm>
-            <a:prstGeom prst="ellipse">
-              <a:avLst/>
-            </a:prstGeom>
-            <a:solidFill>
-              <a:srgbClr val="0072B2">
-                <a:alpha val="100000"/>
-              </a:srgbClr>
-            </a:solidFill>
-            <a:ln w="7363" cap="rnd">
-              <a:solidFill>
-                <a:srgbClr val="0072B2">
-                  <a:alpha val="100000"/>
-                </a:srgbClr>
-              </a:solidFill>
-              <a:prstDash val="solid"/>
-              <a:round/>
-            </a:ln>
-          </p:spPr>
-          <p:txBody>
-            <a:bodyPr/>
-            <a:lstStyle/>
-            <a:p/>
-          </p:txBody>
-        </p:sp>
-        <p:sp>
-          <p:nvSpPr>
-            <p:cNvPr id="159" name="rc159"/>
-            <p:cNvSpPr/>
-            <p:nvPr/>
-          </p:nvSpPr>
-          <p:spPr>
-            <a:xfrm>
-              <a:off x="5390408" y="1007047"/>
-              <a:ext cx="113872" cy="113872"/>
-            </a:xfrm>
-            <a:prstGeom prst="rect">
-              <a:avLst/>
-            </a:prstGeom>
-            <a:solidFill>
-              <a:srgbClr val="FFFFFF">
-                <a:alpha val="100000"/>
-              </a:srgbClr>
-            </a:solidFill>
-          </p:spPr>
-          <p:txBody>
-            <a:bodyPr/>
-            <a:lstStyle/>
-            <a:p/>
-          </p:txBody>
-        </p:sp>
-        <p:sp>
-          <p:nvSpPr>
-            <p:cNvPr id="160" name="pl160"/>
-            <p:cNvSpPr/>
-            <p:nvPr/>
-          </p:nvSpPr>
-          <p:spPr>
-            <a:xfrm>
-              <a:off x="5401795" y="1063983"/>
-              <a:ext cx="91098" cy="0"/>
-            </a:xfrm>
-            <a:custGeom>
-              <a:avLst/>
-              <a:pathLst>
-                <a:path w="91098" h="0">
-                  <a:moveTo>
-                    <a:pt x="0" y="0"/>
-                  </a:moveTo>
-                  <a:lnTo>
-                    <a:pt x="91098" y="0"/>
-                  </a:lnTo>
-                </a:path>
-              </a:pathLst>
-            </a:custGeom>
-            <a:ln w="18970" cap="flat">
-              <a:solidFill>
-                <a:srgbClr val="E69F00">
-                  <a:alpha val="100000"/>
-                </a:srgbClr>
-              </a:solidFill>
-              <a:prstDash val="solid"/>
-              <a:round/>
-            </a:ln>
-          </p:spPr>
-          <p:txBody>
-            <a:bodyPr/>
-            <a:lstStyle/>
-            <a:p/>
-          </p:txBody>
-        </p:sp>
-        <p:sp>
-          <p:nvSpPr>
-            <p:cNvPr id="161" name="pt161"/>
-            <p:cNvSpPr/>
-            <p:nvPr/>
-          </p:nvSpPr>
-          <p:spPr>
-            <a:xfrm>
-              <a:off x="5427402" y="1044041"/>
-              <a:ext cx="39885" cy="39885"/>
-            </a:xfrm>
-            <a:prstGeom prst="ellipse">
-              <a:avLst/>
-            </a:prstGeom>
-            <a:solidFill>
-              <a:srgbClr val="E69F00">
-                <a:alpha val="100000"/>
-              </a:srgbClr>
-            </a:solidFill>
-            <a:ln w="7363" cap="rnd">
-              <a:solidFill>
-                <a:srgbClr val="E69F00">
-                  <a:alpha val="100000"/>
-                </a:srgbClr>
-              </a:solidFill>
-              <a:prstDash val="solid"/>
-              <a:round/>
-            </a:ln>
-          </p:spPr>
-          <p:txBody>
-            <a:bodyPr/>
-            <a:lstStyle/>
-            <a:p/>
-          </p:txBody>
-        </p:sp>
-        <p:sp>
-          <p:nvSpPr>
-            <p:cNvPr id="162" name="tx162"/>
-            <p:cNvSpPr/>
-            <p:nvPr/>
-          </p:nvSpPr>
-          <p:spPr>
-            <a:xfrm>
-              <a:off x="5561217" y="913717"/>
-              <a:ext cx="875355" cy="72786"/>
+            <p:cNvPr id="164" name="tx164"/>
+            <p:cNvSpPr/>
+            <p:nvPr/>
+          </p:nvSpPr>
+          <p:spPr>
+            <a:xfrm>
+              <a:off x="4189256" y="1098091"/>
+              <a:ext cx="1041684" cy="81838"/>
             </a:xfrm>
             <a:prstGeom prst="rect">
               <a:avLst/>
@@ -8271,50 +8357,7 @@
                 </a:spcAft>
               </a:pPr>
               <a:r>
-                <a:rPr sz="800" i="0" b="0">
-                  <a:solidFill>
-                    <a:srgbClr val="000000">
-                      <a:alpha val="100000"/>
-                    </a:srgbClr>
-                  </a:solidFill>
-                  <a:latin typeface="Arial"/>
-                  <a:cs typeface="Arial"/>
-                </a:rPr>
-                <a:t>Discovery year (v2)</a:t>
-              </a:r>
-            </a:p>
-          </p:txBody>
-        </p:sp>
-        <p:sp>
-          <p:nvSpPr>
-            <p:cNvPr id="163" name="tx163"/>
-            <p:cNvSpPr/>
-            <p:nvPr/>
-          </p:nvSpPr>
-          <p:spPr>
-            <a:xfrm>
-              <a:off x="5561217" y="1027590"/>
-              <a:ext cx="926378" cy="72786"/>
-            </a:xfrm>
-            <a:prstGeom prst="rect">
-              <a:avLst/>
-            </a:prstGeom>
-            <a:noFill/>
-          </p:spPr>
-          <p:txBody>
-            <a:bodyPr lIns="0" rIns="0" tIns="0" bIns="0" anchorCtr="1" anchor="ctr" wrap="none"/>
-            <a:lstStyle/>
-            <a:p>
-              <a:pPr algn="l" marL="0" marR="0" indent="0">
-                <a:spcBef>
-                  <a:spcPts val="0"/>
-                </a:spcBef>
-                <a:spcAft>
-                  <a:spcPts val="0"/>
-                </a:spcAft>
-              </a:pPr>
-              <a:r>
-                <a:rPr sz="800" i="0" b="0">
+                <a:rPr sz="900" i="0" b="0">
                   <a:solidFill>
                     <a:srgbClr val="000000">
                       <a:alpha val="100000"/>
@@ -8330,14 +8373,14 @@
         </p:sp>
         <p:sp>
           <p:nvSpPr>
-            <p:cNvPr id="164" name="tx164"/>
-            <p:cNvSpPr/>
-            <p:nvPr/>
-          </p:nvSpPr>
-          <p:spPr>
-            <a:xfrm>
-              <a:off x="5018077" y="503004"/>
-              <a:ext cx="2525298" cy="74432"/>
+            <p:cNvPr id="165" name="tx165"/>
+            <p:cNvSpPr/>
+            <p:nvPr/>
+          </p:nvSpPr>
+          <p:spPr>
+            <a:xfrm>
+              <a:off x="3969205" y="509330"/>
+              <a:ext cx="1797161" cy="83576"/>
             </a:xfrm>
             <a:prstGeom prst="rect">
               <a:avLst/>
@@ -8357,7 +8400,7 @@
                 </a:spcAft>
               </a:pPr>
               <a:r>
-                <a:rPr sz="819" i="0" b="0">
+                <a:rPr sz="919" i="0" b="0">
                   <a:solidFill>
                     <a:srgbClr val="4D4D4D">
                       <a:alpha val="100000"/>
@@ -8366,21 +8409,64 @@
                   <a:latin typeface="Arial"/>
                   <a:cs typeface="Arial"/>
                 </a:rPr>
-                <a:t>The same events, dated two ways; 83.1% change year</a:t>
+                <a:t>The same events, dated two ways;</a:t>
               </a:r>
             </a:p>
           </p:txBody>
         </p:sp>
         <p:sp>
           <p:nvSpPr>
-            <p:cNvPr id="165" name="tx165"/>
-            <p:cNvSpPr/>
-            <p:nvPr/>
-          </p:nvSpPr>
-          <p:spPr>
-            <a:xfrm>
-              <a:off x="5018077" y="328384"/>
-              <a:ext cx="3289645" cy="90982"/>
+            <p:cNvPr id="166" name="tx166"/>
+            <p:cNvSpPr/>
+            <p:nvPr/>
+          </p:nvSpPr>
+          <p:spPr>
+            <a:xfrm>
+              <a:off x="3969205" y="635517"/>
+              <a:ext cx="1038392" cy="83576"/>
+            </a:xfrm>
+            <a:prstGeom prst="rect">
+              <a:avLst/>
+            </a:prstGeom>
+            <a:noFill/>
+          </p:spPr>
+          <p:txBody>
+            <a:bodyPr lIns="0" rIns="0" tIns="0" bIns="0" anchorCtr="1" anchor="ctr" wrap="none"/>
+            <a:lstStyle/>
+            <a:p>
+              <a:pPr algn="l" marL="0" marR="0" indent="0">
+                <a:spcBef>
+                  <a:spcPts val="0"/>
+                </a:spcBef>
+                <a:spcAft>
+                  <a:spcPts val="0"/>
+                </a:spcAft>
+              </a:pPr>
+              <a:r>
+                <a:rPr sz="919" i="0" b="0">
+                  <a:solidFill>
+                    <a:srgbClr val="4D4D4D">
+                      <a:alpha val="100000"/>
+                    </a:srgbClr>
+                  </a:solidFill>
+                  <a:latin typeface="Arial"/>
+                  <a:cs typeface="Arial"/>
+                </a:rPr>
+                <a:t> 83.1% change year</a:t>
+              </a:r>
+            </a:p>
+          </p:txBody>
+        </p:sp>
+        <p:sp>
+          <p:nvSpPr>
+            <p:cNvPr id="167" name="tx167"/>
+            <p:cNvSpPr/>
+            <p:nvPr/>
+          </p:nvSpPr>
+          <p:spPr>
+            <a:xfrm>
+              <a:off x="3969205" y="328384"/>
+              <a:ext cx="2781604" cy="90982"/>
             </a:xfrm>
             <a:prstGeom prst="rect">
               <a:avLst/>
@@ -8409,21 +8495,21 @@
                   <a:latin typeface="Arial"/>
                   <a:cs typeface="Arial"/>
                 </a:rPr>
-                <a:t>Publication-year dating manufactures a terminal surge</a:t>
+                <a:t>Publication-year dating fakes a terminal surge</a:t>
               </a:r>
             </a:p>
           </p:txBody>
         </p:sp>
         <p:sp>
           <p:nvSpPr>
-            <p:cNvPr id="166" name="tx166"/>
-            <p:cNvSpPr/>
-            <p:nvPr/>
-          </p:nvSpPr>
-          <p:spPr>
-            <a:xfrm>
-              <a:off x="4712140" y="323241"/>
-              <a:ext cx="93085" cy="109179"/>
+            <p:cNvPr id="168" name="tx168"/>
+            <p:cNvSpPr/>
+            <p:nvPr/>
+          </p:nvSpPr>
+          <p:spPr>
+            <a:xfrm>
+              <a:off x="3622464" y="312698"/>
+              <a:ext cx="100858" cy="118231"/>
             </a:xfrm>
             <a:prstGeom prst="rect">
               <a:avLst/>
@@ -8443,7 +8529,7 @@
                 </a:spcAft>
               </a:pPr>
               <a:r>
-                <a:rPr sz="1200" i="0" b="1">
+                <a:rPr sz="1300" i="0" b="1">
                   <a:solidFill>
                     <a:srgbClr val="000000">
                       <a:alpha val="100000"/>
@@ -8459,14 +8545,14 @@
         </p:sp>
         <p:sp>
           <p:nvSpPr>
-            <p:cNvPr id="167" name="rc167"/>
-            <p:cNvSpPr/>
-            <p:nvPr/>
-          </p:nvSpPr>
-          <p:spPr>
-            <a:xfrm>
-              <a:off x="691444" y="4104515"/>
-              <a:ext cx="8163820" cy="2563686"/>
+            <p:cNvPr id="169" name="rc169"/>
+            <p:cNvSpPr/>
+            <p:nvPr/>
+          </p:nvSpPr>
+          <p:spPr>
+            <a:xfrm>
+              <a:off x="729470" y="3727916"/>
+              <a:ext cx="5957758" cy="2010499"/>
             </a:xfrm>
             <a:prstGeom prst="rect">
               <a:avLst/>
@@ -8485,27 +8571,27 @@
         </p:sp>
         <p:sp>
           <p:nvSpPr>
-            <p:cNvPr id="168" name="pl168"/>
-            <p:cNvSpPr/>
-            <p:nvPr/>
-          </p:nvSpPr>
-          <p:spPr>
-            <a:xfrm>
-              <a:off x="691444" y="6177257"/>
-              <a:ext cx="8163820" cy="0"/>
+            <p:cNvPr id="170" name="pl170"/>
+            <p:cNvSpPr/>
+            <p:nvPr/>
+          </p:nvSpPr>
+          <p:spPr>
+            <a:xfrm>
+              <a:off x="729470" y="5353405"/>
+              <a:ext cx="5957758" cy="0"/>
             </a:xfrm>
             <a:custGeom>
               <a:avLst/>
               <a:pathLst>
-                <a:path w="8163820" h="0">
+                <a:path w="5957758" h="0">
                   <a:moveTo>
                     <a:pt x="0" y="0"/>
                   </a:moveTo>
                   <a:lnTo>
-                    <a:pt x="8163820" y="0"/>
-                  </a:lnTo>
-                  <a:lnTo>
-                    <a:pt x="8163820" y="0"/>
+                    <a:pt x="5957758" y="0"/>
+                  </a:lnTo>
+                  <a:lnTo>
+                    <a:pt x="5957758" y="0"/>
                   </a:lnTo>
                 </a:path>
               </a:pathLst>
@@ -8528,27 +8614,27 @@
         </p:sp>
         <p:sp>
           <p:nvSpPr>
-            <p:cNvPr id="169" name="pl169"/>
-            <p:cNvSpPr/>
-            <p:nvPr/>
-          </p:nvSpPr>
-          <p:spPr>
-            <a:xfrm>
-              <a:off x="691444" y="5680528"/>
-              <a:ext cx="8163820" cy="0"/>
+            <p:cNvPr id="171" name="pl171"/>
+            <p:cNvSpPr/>
+            <p:nvPr/>
+          </p:nvSpPr>
+          <p:spPr>
+            <a:xfrm>
+              <a:off x="729470" y="4963860"/>
+              <a:ext cx="5957758" cy="0"/>
             </a:xfrm>
             <a:custGeom>
               <a:avLst/>
               <a:pathLst>
-                <a:path w="8163820" h="0">
+                <a:path w="5957758" h="0">
                   <a:moveTo>
                     <a:pt x="0" y="0"/>
                   </a:moveTo>
                   <a:lnTo>
-                    <a:pt x="8163820" y="0"/>
-                  </a:lnTo>
-                  <a:lnTo>
-                    <a:pt x="8163820" y="0"/>
+                    <a:pt x="5957758" y="0"/>
+                  </a:lnTo>
+                  <a:lnTo>
+                    <a:pt x="5957758" y="0"/>
                   </a:lnTo>
                 </a:path>
               </a:pathLst>
@@ -8571,27 +8657,27 @@
         </p:sp>
         <p:sp>
           <p:nvSpPr>
-            <p:cNvPr id="170" name="pl170"/>
-            <p:cNvSpPr/>
-            <p:nvPr/>
-          </p:nvSpPr>
-          <p:spPr>
-            <a:xfrm>
-              <a:off x="691444" y="5183800"/>
-              <a:ext cx="8163820" cy="0"/>
+            <p:cNvPr id="172" name="pl172"/>
+            <p:cNvSpPr/>
+            <p:nvPr/>
+          </p:nvSpPr>
+          <p:spPr>
+            <a:xfrm>
+              <a:off x="729470" y="4574315"/>
+              <a:ext cx="5957758" cy="0"/>
             </a:xfrm>
             <a:custGeom>
               <a:avLst/>
               <a:pathLst>
-                <a:path w="8163820" h="0">
+                <a:path w="5957758" h="0">
                   <a:moveTo>
                     <a:pt x="0" y="0"/>
                   </a:moveTo>
                   <a:lnTo>
-                    <a:pt x="8163820" y="0"/>
-                  </a:lnTo>
-                  <a:lnTo>
-                    <a:pt x="8163820" y="0"/>
+                    <a:pt x="5957758" y="0"/>
+                  </a:lnTo>
+                  <a:lnTo>
+                    <a:pt x="5957758" y="0"/>
                   </a:lnTo>
                 </a:path>
               </a:pathLst>
@@ -8614,27 +8700,27 @@
         </p:sp>
         <p:sp>
           <p:nvSpPr>
-            <p:cNvPr id="171" name="pl171"/>
-            <p:cNvSpPr/>
-            <p:nvPr/>
-          </p:nvSpPr>
-          <p:spPr>
-            <a:xfrm>
-              <a:off x="691444" y="4687072"/>
-              <a:ext cx="8163820" cy="0"/>
+            <p:cNvPr id="173" name="pl173"/>
+            <p:cNvSpPr/>
+            <p:nvPr/>
+          </p:nvSpPr>
+          <p:spPr>
+            <a:xfrm>
+              <a:off x="729470" y="4184770"/>
+              <a:ext cx="5957758" cy="0"/>
             </a:xfrm>
             <a:custGeom>
               <a:avLst/>
               <a:pathLst>
-                <a:path w="8163820" h="0">
+                <a:path w="5957758" h="0">
                   <a:moveTo>
                     <a:pt x="0" y="0"/>
                   </a:moveTo>
                   <a:lnTo>
-                    <a:pt x="8163820" y="0"/>
-                  </a:lnTo>
-                  <a:lnTo>
-                    <a:pt x="8163820" y="0"/>
+                    <a:pt x="5957758" y="0"/>
+                  </a:lnTo>
+                  <a:lnTo>
+                    <a:pt x="5957758" y="0"/>
                   </a:lnTo>
                 </a:path>
               </a:pathLst>
@@ -8657,27 +8743,27 @@
         </p:sp>
         <p:sp>
           <p:nvSpPr>
-            <p:cNvPr id="172" name="pl172"/>
-            <p:cNvSpPr/>
-            <p:nvPr/>
-          </p:nvSpPr>
-          <p:spPr>
-            <a:xfrm>
-              <a:off x="691444" y="4190344"/>
-              <a:ext cx="8163820" cy="0"/>
+            <p:cNvPr id="174" name="pl174"/>
+            <p:cNvSpPr/>
+            <p:nvPr/>
+          </p:nvSpPr>
+          <p:spPr>
+            <a:xfrm>
+              <a:off x="729470" y="3795225"/>
+              <a:ext cx="5957758" cy="0"/>
             </a:xfrm>
             <a:custGeom>
               <a:avLst/>
               <a:pathLst>
-                <a:path w="8163820" h="0">
+                <a:path w="5957758" h="0">
                   <a:moveTo>
                     <a:pt x="0" y="0"/>
                   </a:moveTo>
                   <a:lnTo>
-                    <a:pt x="8163820" y="0"/>
-                  </a:lnTo>
-                  <a:lnTo>
-                    <a:pt x="8163820" y="0"/>
+                    <a:pt x="5957758" y="0"/>
+                  </a:lnTo>
+                  <a:lnTo>
+                    <a:pt x="5957758" y="0"/>
                   </a:lnTo>
                 </a:path>
               </a:pathLst>
@@ -8700,27 +8786,27 @@
         </p:sp>
         <p:sp>
           <p:nvSpPr>
-            <p:cNvPr id="173" name="pl173"/>
-            <p:cNvSpPr/>
-            <p:nvPr/>
-          </p:nvSpPr>
-          <p:spPr>
-            <a:xfrm>
-              <a:off x="691444" y="6177257"/>
-              <a:ext cx="8163820" cy="0"/>
+            <p:cNvPr id="175" name="pl175"/>
+            <p:cNvSpPr/>
+            <p:nvPr/>
+          </p:nvSpPr>
+          <p:spPr>
+            <a:xfrm>
+              <a:off x="729470" y="5353405"/>
+              <a:ext cx="5957758" cy="0"/>
             </a:xfrm>
             <a:custGeom>
               <a:avLst/>
               <a:pathLst>
-                <a:path w="8163820" h="0">
+                <a:path w="5957758" h="0">
                   <a:moveTo>
                     <a:pt x="0" y="0"/>
                   </a:moveTo>
                   <a:lnTo>
-                    <a:pt x="8163820" y="0"/>
-                  </a:lnTo>
-                  <a:lnTo>
-                    <a:pt x="8163820" y="0"/>
+                    <a:pt x="5957758" y="0"/>
+                  </a:lnTo>
+                  <a:lnTo>
+                    <a:pt x="5957758" y="0"/>
                   </a:lnTo>
                 </a:path>
               </a:pathLst>
@@ -8743,36 +8829,36 @@
         </p:sp>
         <p:sp>
           <p:nvSpPr>
-            <p:cNvPr id="174" name="pl174"/>
-            <p:cNvSpPr/>
-            <p:nvPr/>
-          </p:nvSpPr>
-          <p:spPr>
-            <a:xfrm>
-              <a:off x="1481491" y="4221046"/>
-              <a:ext cx="6583726" cy="1294089"/>
+            <p:cNvPr id="176" name="pl176"/>
+            <p:cNvSpPr/>
+            <p:nvPr/>
+          </p:nvSpPr>
+          <p:spPr>
+            <a:xfrm>
+              <a:off x="1306027" y="3819302"/>
+              <a:ext cx="4804644" cy="1014853"/>
             </a:xfrm>
             <a:custGeom>
               <a:avLst/>
               <a:pathLst>
-                <a:path w="6583726" h="1294089">
+                <a:path w="4804644" h="1014853">
                   <a:moveTo>
                     <a:pt x="0" y="0"/>
                   </a:moveTo>
                   <a:lnTo>
-                    <a:pt x="1316745" y="1198491"/>
-                  </a:lnTo>
-                  <a:lnTo>
-                    <a:pt x="2633490" y="1294089"/>
-                  </a:lnTo>
-                  <a:lnTo>
-                    <a:pt x="3950235" y="1238601"/>
-                  </a:lnTo>
-                  <a:lnTo>
-                    <a:pt x="5266980" y="843627"/>
-                  </a:lnTo>
-                  <a:lnTo>
-                    <a:pt x="6583726" y="953273"/>
+                    <a:pt x="960928" y="939883"/>
+                  </a:lnTo>
+                  <a:lnTo>
+                    <a:pt x="1921857" y="1014853"/>
+                  </a:lnTo>
+                  <a:lnTo>
+                    <a:pt x="2882786" y="971338"/>
+                  </a:lnTo>
+                  <a:lnTo>
+                    <a:pt x="3843715" y="661591"/>
+                  </a:lnTo>
+                  <a:lnTo>
+                    <a:pt x="4804644" y="747578"/>
                   </a:lnTo>
                 </a:path>
               </a:pathLst>
@@ -8795,36 +8881,36 @@
         </p:sp>
         <p:sp>
           <p:nvSpPr>
-            <p:cNvPr id="175" name="pl175"/>
-            <p:cNvSpPr/>
-            <p:nvPr/>
-          </p:nvSpPr>
-          <p:spPr>
-            <a:xfrm>
-              <a:off x="1481491" y="5092204"/>
-              <a:ext cx="6583726" cy="186849"/>
+            <p:cNvPr id="177" name="pl177"/>
+            <p:cNvSpPr/>
+            <p:nvPr/>
+          </p:nvSpPr>
+          <p:spPr>
+            <a:xfrm>
+              <a:off x="1306027" y="4502484"/>
+              <a:ext cx="4804644" cy="146531"/>
             </a:xfrm>
             <a:custGeom>
               <a:avLst/>
               <a:pathLst>
-                <a:path w="6583726" h="186849">
+                <a:path w="4804644" h="146531">
                   <a:moveTo>
-                    <a:pt x="0" y="106571"/>
+                    <a:pt x="0" y="83575"/>
                   </a:moveTo>
                   <a:lnTo>
-                    <a:pt x="1316745" y="0"/>
-                  </a:lnTo>
-                  <a:lnTo>
-                    <a:pt x="2633490" y="11110"/>
-                  </a:lnTo>
-                  <a:lnTo>
-                    <a:pt x="3950235" y="12854"/>
-                  </a:lnTo>
-                  <a:lnTo>
-                    <a:pt x="5266980" y="21936"/>
-                  </a:lnTo>
-                  <a:lnTo>
-                    <a:pt x="6583726" y="186849"/>
+                    <a:pt x="960928" y="0"/>
+                  </a:lnTo>
+                  <a:lnTo>
+                    <a:pt x="1921857" y="8712"/>
+                  </a:lnTo>
+                  <a:lnTo>
+                    <a:pt x="2882786" y="10081"/>
+                  </a:lnTo>
+                  <a:lnTo>
+                    <a:pt x="3843715" y="17203"/>
+                  </a:lnTo>
+                  <a:lnTo>
+                    <a:pt x="4804644" y="146531"/>
                   </a:lnTo>
                 </a:path>
               </a:pathLst>
@@ -8847,36 +8933,36 @@
         </p:sp>
         <p:sp>
           <p:nvSpPr>
-            <p:cNvPr id="176" name="pl176"/>
-            <p:cNvSpPr/>
-            <p:nvPr/>
-          </p:nvSpPr>
-          <p:spPr>
-            <a:xfrm>
-              <a:off x="1481491" y="6189437"/>
-              <a:ext cx="6583726" cy="359592"/>
+            <p:cNvPr id="178" name="pl178"/>
+            <p:cNvSpPr/>
+            <p:nvPr/>
+          </p:nvSpPr>
+          <p:spPr>
+            <a:xfrm>
+              <a:off x="1306027" y="5362958"/>
+              <a:ext cx="4804644" cy="282000"/>
             </a:xfrm>
             <a:custGeom>
               <a:avLst/>
               <a:pathLst>
-                <a:path w="6583726" h="359592">
+                <a:path w="4804644" h="282000">
                   <a:moveTo>
-                    <a:pt x="0" y="359592"/>
+                    <a:pt x="0" y="282000"/>
                   </a:moveTo>
                   <a:lnTo>
-                    <a:pt x="1316745" y="59554"/>
-                  </a:lnTo>
-                  <a:lnTo>
-                    <a:pt x="2633490" y="90987"/>
-                  </a:lnTo>
-                  <a:lnTo>
-                    <a:pt x="3950235" y="91415"/>
-                  </a:lnTo>
-                  <a:lnTo>
-                    <a:pt x="5266980" y="83307"/>
-                  </a:lnTo>
-                  <a:lnTo>
-                    <a:pt x="6583726" y="0"/>
+                    <a:pt x="960928" y="46704"/>
+                  </a:lnTo>
+                  <a:lnTo>
+                    <a:pt x="1921857" y="71354"/>
+                  </a:lnTo>
+                  <a:lnTo>
+                    <a:pt x="2882786" y="71690"/>
+                  </a:lnTo>
+                  <a:lnTo>
+                    <a:pt x="3843715" y="65331"/>
+                  </a:lnTo>
+                  <a:lnTo>
+                    <a:pt x="4804644" y="0"/>
                   </a:lnTo>
                 </a:path>
               </a:pathLst>
@@ -8899,36 +8985,36 @@
         </p:sp>
         <p:sp>
           <p:nvSpPr>
-            <p:cNvPr id="177" name="pl177"/>
-            <p:cNvSpPr/>
-            <p:nvPr/>
-          </p:nvSpPr>
-          <p:spPr>
-            <a:xfrm>
-              <a:off x="1481491" y="6485391"/>
-              <a:ext cx="6583726" cy="66279"/>
+            <p:cNvPr id="179" name="pl179"/>
+            <p:cNvSpPr/>
+            <p:nvPr/>
+          </p:nvSpPr>
+          <p:spPr>
+            <a:xfrm>
+              <a:off x="1306027" y="5595051"/>
+              <a:ext cx="4804644" cy="51977"/>
             </a:xfrm>
             <a:custGeom>
               <a:avLst/>
               <a:pathLst>
-                <a:path w="6583726" h="66279">
+                <a:path w="4804644" h="51977">
                   <a:moveTo>
                     <a:pt x="0" y="0"/>
                   </a:moveTo>
                   <a:lnTo>
-                    <a:pt x="1316745" y="42397"/>
-                  </a:lnTo>
-                  <a:lnTo>
-                    <a:pt x="2633490" y="30967"/>
-                  </a:lnTo>
-                  <a:lnTo>
-                    <a:pt x="3950235" y="32364"/>
-                  </a:lnTo>
-                  <a:lnTo>
-                    <a:pt x="5266980" y="33546"/>
-                  </a:lnTo>
-                  <a:lnTo>
-                    <a:pt x="6583726" y="66279"/>
+                    <a:pt x="960928" y="33248"/>
+                  </a:lnTo>
+                  <a:lnTo>
+                    <a:pt x="1921857" y="24285"/>
+                  </a:lnTo>
+                  <a:lnTo>
+                    <a:pt x="2882786" y="25380"/>
+                  </a:lnTo>
+                  <a:lnTo>
+                    <a:pt x="3843715" y="26307"/>
+                  </a:lnTo>
+                  <a:lnTo>
+                    <a:pt x="4804644" y="51977"/>
                   </a:lnTo>
                 </a:path>
               </a:pathLst>
@@ -8951,14 +9037,14 @@
         </p:sp>
         <p:sp>
           <p:nvSpPr>
-            <p:cNvPr id="178" name="pt178"/>
-            <p:cNvSpPr/>
-            <p:nvPr/>
-          </p:nvSpPr>
-          <p:spPr>
-            <a:xfrm>
-              <a:off x="1450708" y="4190263"/>
-              <a:ext cx="61566" cy="61566"/>
+            <p:cNvPr id="180" name="pt180"/>
+            <p:cNvSpPr/>
+            <p:nvPr/>
+          </p:nvSpPr>
+          <p:spPr>
+            <a:xfrm>
+              <a:off x="1274835" y="3788110"/>
+              <a:ext cx="62384" cy="62384"/>
             </a:xfrm>
             <a:prstGeom prst="ellipse">
               <a:avLst/>
@@ -8968,7 +9054,7 @@
                 <a:alpha val="100000"/>
               </a:srgbClr>
             </a:solidFill>
-            <a:ln w="7363" cap="rnd">
+            <a:ln w="8181" cap="rnd">
               <a:solidFill>
                 <a:srgbClr val="0072B2">
                   <a:alpha val="100000"/>
@@ -8986,14 +9072,14 @@
         </p:sp>
         <p:sp>
           <p:nvSpPr>
-            <p:cNvPr id="179" name="pt179"/>
-            <p:cNvSpPr/>
-            <p:nvPr/>
-          </p:nvSpPr>
-          <p:spPr>
-            <a:xfrm>
-              <a:off x="2767453" y="5388754"/>
-              <a:ext cx="61566" cy="61566"/>
+            <p:cNvPr id="181" name="pt181"/>
+            <p:cNvSpPr/>
+            <p:nvPr/>
+          </p:nvSpPr>
+          <p:spPr>
+            <a:xfrm>
+              <a:off x="2235764" y="4727993"/>
+              <a:ext cx="62384" cy="62384"/>
             </a:xfrm>
             <a:prstGeom prst="ellipse">
               <a:avLst/>
@@ -9003,7 +9089,7 @@
                 <a:alpha val="100000"/>
               </a:srgbClr>
             </a:solidFill>
-            <a:ln w="7363" cap="rnd">
+            <a:ln w="8181" cap="rnd">
               <a:solidFill>
                 <a:srgbClr val="0072B2">
                   <a:alpha val="100000"/>
@@ -9021,14 +9107,14 @@
         </p:sp>
         <p:sp>
           <p:nvSpPr>
-            <p:cNvPr id="180" name="pt180"/>
-            <p:cNvSpPr/>
-            <p:nvPr/>
-          </p:nvSpPr>
-          <p:spPr>
-            <a:xfrm>
-              <a:off x="4084198" y="5484353"/>
-              <a:ext cx="61566" cy="61566"/>
+            <p:cNvPr id="182" name="pt182"/>
+            <p:cNvSpPr/>
+            <p:nvPr/>
+          </p:nvSpPr>
+          <p:spPr>
+            <a:xfrm>
+              <a:off x="3196693" y="4802964"/>
+              <a:ext cx="62384" cy="62384"/>
             </a:xfrm>
             <a:prstGeom prst="ellipse">
               <a:avLst/>
@@ -9038,7 +9124,7 @@
                 <a:alpha val="100000"/>
               </a:srgbClr>
             </a:solidFill>
-            <a:ln w="7363" cap="rnd">
+            <a:ln w="8181" cap="rnd">
               <a:solidFill>
                 <a:srgbClr val="0072B2">
                   <a:alpha val="100000"/>
@@ -9056,14 +9142,14 @@
         </p:sp>
         <p:sp>
           <p:nvSpPr>
-            <p:cNvPr id="181" name="pt181"/>
-            <p:cNvSpPr/>
-            <p:nvPr/>
-          </p:nvSpPr>
-          <p:spPr>
-            <a:xfrm>
-              <a:off x="5400943" y="5428864"/>
-              <a:ext cx="61566" cy="61566"/>
+            <p:cNvPr id="183" name="pt183"/>
+            <p:cNvSpPr/>
+            <p:nvPr/>
+          </p:nvSpPr>
+          <p:spPr>
+            <a:xfrm>
+              <a:off x="4157621" y="4759448"/>
+              <a:ext cx="62384" cy="62384"/>
             </a:xfrm>
             <a:prstGeom prst="ellipse">
               <a:avLst/>
@@ -9073,7 +9159,7 @@
                 <a:alpha val="100000"/>
               </a:srgbClr>
             </a:solidFill>
-            <a:ln w="7363" cap="rnd">
+            <a:ln w="8181" cap="rnd">
               <a:solidFill>
                 <a:srgbClr val="0072B2">
                   <a:alpha val="100000"/>
@@ -9091,14 +9177,14 @@
         </p:sp>
         <p:sp>
           <p:nvSpPr>
-            <p:cNvPr id="182" name="pt182"/>
-            <p:cNvSpPr/>
-            <p:nvPr/>
-          </p:nvSpPr>
-          <p:spPr>
-            <a:xfrm>
-              <a:off x="6717689" y="5033890"/>
-              <a:ext cx="61566" cy="61566"/>
+            <p:cNvPr id="184" name="pt184"/>
+            <p:cNvSpPr/>
+            <p:nvPr/>
+          </p:nvSpPr>
+          <p:spPr>
+            <a:xfrm>
+              <a:off x="5118550" y="4449701"/>
+              <a:ext cx="62384" cy="62384"/>
             </a:xfrm>
             <a:prstGeom prst="ellipse">
               <a:avLst/>
@@ -9108,7 +9194,7 @@
                 <a:alpha val="100000"/>
               </a:srgbClr>
             </a:solidFill>
-            <a:ln w="7363" cap="rnd">
+            <a:ln w="8181" cap="rnd">
               <a:solidFill>
                 <a:srgbClr val="0072B2">
                   <a:alpha val="100000"/>
@@ -9126,14 +9212,14 @@
         </p:sp>
         <p:sp>
           <p:nvSpPr>
-            <p:cNvPr id="183" name="pt183"/>
-            <p:cNvSpPr/>
-            <p:nvPr/>
-          </p:nvSpPr>
-          <p:spPr>
-            <a:xfrm>
-              <a:off x="8034434" y="5143537"/>
-              <a:ext cx="61566" cy="61566"/>
+            <p:cNvPr id="185" name="pt185"/>
+            <p:cNvSpPr/>
+            <p:nvPr/>
+          </p:nvSpPr>
+          <p:spPr>
+            <a:xfrm>
+              <a:off x="6079479" y="4535688"/>
+              <a:ext cx="62384" cy="62384"/>
             </a:xfrm>
             <a:prstGeom prst="ellipse">
               <a:avLst/>
@@ -9143,7 +9229,7 @@
                 <a:alpha val="100000"/>
               </a:srgbClr>
             </a:solidFill>
-            <a:ln w="7363" cap="rnd">
+            <a:ln w="8181" cap="rnd">
               <a:solidFill>
                 <a:srgbClr val="0072B2">
                   <a:alpha val="100000"/>
@@ -9161,14 +9247,14 @@
         </p:sp>
         <p:sp>
           <p:nvSpPr>
-            <p:cNvPr id="184" name="pt184"/>
-            <p:cNvSpPr/>
-            <p:nvPr/>
-          </p:nvSpPr>
-          <p:spPr>
-            <a:xfrm>
-              <a:off x="1450708" y="5167993"/>
-              <a:ext cx="61566" cy="61566"/>
+            <p:cNvPr id="186" name="pt186"/>
+            <p:cNvSpPr/>
+            <p:nvPr/>
+          </p:nvSpPr>
+          <p:spPr>
+            <a:xfrm>
+              <a:off x="1274835" y="4554867"/>
+              <a:ext cx="62384" cy="62384"/>
             </a:xfrm>
             <a:prstGeom prst="ellipse">
               <a:avLst/>
@@ -9178,7 +9264,7 @@
                 <a:alpha val="100000"/>
               </a:srgbClr>
             </a:solidFill>
-            <a:ln w="7363" cap="rnd">
+            <a:ln w="8181" cap="rnd">
               <a:solidFill>
                 <a:srgbClr val="009E73">
                   <a:alpha val="100000"/>
@@ -9196,14 +9282,14 @@
         </p:sp>
         <p:sp>
           <p:nvSpPr>
-            <p:cNvPr id="185" name="pt185"/>
-            <p:cNvSpPr/>
-            <p:nvPr/>
-          </p:nvSpPr>
-          <p:spPr>
-            <a:xfrm>
-              <a:off x="2767453" y="5061421"/>
-              <a:ext cx="61566" cy="61566"/>
+            <p:cNvPr id="187" name="pt187"/>
+            <p:cNvSpPr/>
+            <p:nvPr/>
+          </p:nvSpPr>
+          <p:spPr>
+            <a:xfrm>
+              <a:off x="2235764" y="4471292"/>
+              <a:ext cx="62384" cy="62384"/>
             </a:xfrm>
             <a:prstGeom prst="ellipse">
               <a:avLst/>
@@ -9213,7 +9299,7 @@
                 <a:alpha val="100000"/>
               </a:srgbClr>
             </a:solidFill>
-            <a:ln w="7363" cap="rnd">
+            <a:ln w="8181" cap="rnd">
               <a:solidFill>
                 <a:srgbClr val="009E73">
                   <a:alpha val="100000"/>
@@ -9231,14 +9317,14 @@
         </p:sp>
         <p:sp>
           <p:nvSpPr>
-            <p:cNvPr id="186" name="pt186"/>
-            <p:cNvSpPr/>
-            <p:nvPr/>
-          </p:nvSpPr>
-          <p:spPr>
-            <a:xfrm>
-              <a:off x="4084198" y="5072531"/>
-              <a:ext cx="61566" cy="61566"/>
+            <p:cNvPr id="188" name="pt188"/>
+            <p:cNvSpPr/>
+            <p:nvPr/>
+          </p:nvSpPr>
+          <p:spPr>
+            <a:xfrm>
+              <a:off x="3196693" y="4480004"/>
+              <a:ext cx="62384" cy="62384"/>
             </a:xfrm>
             <a:prstGeom prst="ellipse">
               <a:avLst/>
@@ -9248,7 +9334,7 @@
                 <a:alpha val="100000"/>
               </a:srgbClr>
             </a:solidFill>
-            <a:ln w="7363" cap="rnd">
+            <a:ln w="8181" cap="rnd">
               <a:solidFill>
                 <a:srgbClr val="009E73">
                   <a:alpha val="100000"/>
@@ -9266,14 +9352,14 @@
         </p:sp>
         <p:sp>
           <p:nvSpPr>
-            <p:cNvPr id="187" name="pt187"/>
-            <p:cNvSpPr/>
-            <p:nvPr/>
-          </p:nvSpPr>
-          <p:spPr>
-            <a:xfrm>
-              <a:off x="5400943" y="5074276"/>
-              <a:ext cx="61566" cy="61566"/>
+            <p:cNvPr id="189" name="pt189"/>
+            <p:cNvSpPr/>
+            <p:nvPr/>
+          </p:nvSpPr>
+          <p:spPr>
+            <a:xfrm>
+              <a:off x="4157621" y="4481373"/>
+              <a:ext cx="62384" cy="62384"/>
             </a:xfrm>
             <a:prstGeom prst="ellipse">
               <a:avLst/>
@@ -9283,7 +9369,7 @@
                 <a:alpha val="100000"/>
               </a:srgbClr>
             </a:solidFill>
-            <a:ln w="7363" cap="rnd">
+            <a:ln w="8181" cap="rnd">
               <a:solidFill>
                 <a:srgbClr val="009E73">
                   <a:alpha val="100000"/>
@@ -9301,14 +9387,14 @@
         </p:sp>
         <p:sp>
           <p:nvSpPr>
-            <p:cNvPr id="188" name="pt188"/>
-            <p:cNvSpPr/>
-            <p:nvPr/>
-          </p:nvSpPr>
-          <p:spPr>
-            <a:xfrm>
-              <a:off x="6717689" y="5083358"/>
-              <a:ext cx="61566" cy="61566"/>
+            <p:cNvPr id="190" name="pt190"/>
+            <p:cNvSpPr/>
+            <p:nvPr/>
+          </p:nvSpPr>
+          <p:spPr>
+            <a:xfrm>
+              <a:off x="5118550" y="4488495"/>
+              <a:ext cx="62384" cy="62384"/>
             </a:xfrm>
             <a:prstGeom prst="ellipse">
               <a:avLst/>
@@ -9318,7 +9404,7 @@
                 <a:alpha val="100000"/>
               </a:srgbClr>
             </a:solidFill>
-            <a:ln w="7363" cap="rnd">
+            <a:ln w="8181" cap="rnd">
               <a:solidFill>
                 <a:srgbClr val="009E73">
                   <a:alpha val="100000"/>
@@ -9336,14 +9422,14 @@
         </p:sp>
         <p:sp>
           <p:nvSpPr>
-            <p:cNvPr id="189" name="pt189"/>
-            <p:cNvSpPr/>
-            <p:nvPr/>
-          </p:nvSpPr>
-          <p:spPr>
-            <a:xfrm>
-              <a:off x="8034434" y="5248271"/>
-              <a:ext cx="61566" cy="61566"/>
+            <p:cNvPr id="191" name="pt191"/>
+            <p:cNvSpPr/>
+            <p:nvPr/>
+          </p:nvSpPr>
+          <p:spPr>
+            <a:xfrm>
+              <a:off x="6079479" y="4617823"/>
+              <a:ext cx="62384" cy="62384"/>
             </a:xfrm>
             <a:prstGeom prst="ellipse">
               <a:avLst/>
@@ -9353,7 +9439,7 @@
                 <a:alpha val="100000"/>
               </a:srgbClr>
             </a:solidFill>
-            <a:ln w="7363" cap="rnd">
+            <a:ln w="8181" cap="rnd">
               <a:solidFill>
                 <a:srgbClr val="009E73">
                   <a:alpha val="100000"/>
@@ -9371,14 +9457,14 @@
         </p:sp>
         <p:sp>
           <p:nvSpPr>
-            <p:cNvPr id="190" name="pt190"/>
-            <p:cNvSpPr/>
-            <p:nvPr/>
-          </p:nvSpPr>
-          <p:spPr>
-            <a:xfrm>
-              <a:off x="1450708" y="6518246"/>
-              <a:ext cx="61566" cy="61566"/>
+            <p:cNvPr id="192" name="pt192"/>
+            <p:cNvSpPr/>
+            <p:nvPr/>
+          </p:nvSpPr>
+          <p:spPr>
+            <a:xfrm>
+              <a:off x="1274835" y="5613766"/>
+              <a:ext cx="62384" cy="62384"/>
             </a:xfrm>
             <a:prstGeom prst="ellipse">
               <a:avLst/>
@@ -9388,7 +9474,7 @@
                 <a:alpha val="100000"/>
               </a:srgbClr>
             </a:solidFill>
-            <a:ln w="7363" cap="rnd">
+            <a:ln w="8181" cap="rnd">
               <a:solidFill>
                 <a:srgbClr val="999999">
                   <a:alpha val="100000"/>
@@ -9406,14 +9492,14 @@
         </p:sp>
         <p:sp>
           <p:nvSpPr>
-            <p:cNvPr id="191" name="pt191"/>
-            <p:cNvSpPr/>
-            <p:nvPr/>
-          </p:nvSpPr>
-          <p:spPr>
-            <a:xfrm>
-              <a:off x="2767453" y="6218209"/>
-              <a:ext cx="61566" cy="61566"/>
+            <p:cNvPr id="193" name="pt193"/>
+            <p:cNvSpPr/>
+            <p:nvPr/>
+          </p:nvSpPr>
+          <p:spPr>
+            <a:xfrm>
+              <a:off x="2235764" y="5378470"/>
+              <a:ext cx="62384" cy="62384"/>
             </a:xfrm>
             <a:prstGeom prst="ellipse">
               <a:avLst/>
@@ -9423,7 +9509,7 @@
                 <a:alpha val="100000"/>
               </a:srgbClr>
             </a:solidFill>
-            <a:ln w="7363" cap="rnd">
+            <a:ln w="8181" cap="rnd">
               <a:solidFill>
                 <a:srgbClr val="999999">
                   <a:alpha val="100000"/>
@@ -9441,14 +9527,14 @@
         </p:sp>
         <p:sp>
           <p:nvSpPr>
-            <p:cNvPr id="192" name="pt192"/>
-            <p:cNvSpPr/>
-            <p:nvPr/>
-          </p:nvSpPr>
-          <p:spPr>
-            <a:xfrm>
-              <a:off x="4084198" y="6249641"/>
-              <a:ext cx="61566" cy="61566"/>
+            <p:cNvPr id="194" name="pt194"/>
+            <p:cNvSpPr/>
+            <p:nvPr/>
+          </p:nvSpPr>
+          <p:spPr>
+            <a:xfrm>
+              <a:off x="3196693" y="5403119"/>
+              <a:ext cx="62384" cy="62384"/>
             </a:xfrm>
             <a:prstGeom prst="ellipse">
               <a:avLst/>
@@ -9458,7 +9544,7 @@
                 <a:alpha val="100000"/>
               </a:srgbClr>
             </a:solidFill>
-            <a:ln w="7363" cap="rnd">
+            <a:ln w="8181" cap="rnd">
               <a:solidFill>
                 <a:srgbClr val="999999">
                   <a:alpha val="100000"/>
@@ -9476,14 +9562,14 @@
         </p:sp>
         <p:sp>
           <p:nvSpPr>
-            <p:cNvPr id="193" name="pt193"/>
-            <p:cNvSpPr/>
-            <p:nvPr/>
-          </p:nvSpPr>
-          <p:spPr>
-            <a:xfrm>
-              <a:off x="5400943" y="6250069"/>
-              <a:ext cx="61566" cy="61566"/>
+            <p:cNvPr id="195" name="pt195"/>
+            <p:cNvSpPr/>
+            <p:nvPr/>
+          </p:nvSpPr>
+          <p:spPr>
+            <a:xfrm>
+              <a:off x="4157621" y="5403455"/>
+              <a:ext cx="62384" cy="62384"/>
             </a:xfrm>
             <a:prstGeom prst="ellipse">
               <a:avLst/>
@@ -9493,7 +9579,7 @@
                 <a:alpha val="100000"/>
               </a:srgbClr>
             </a:solidFill>
-            <a:ln w="7363" cap="rnd">
+            <a:ln w="8181" cap="rnd">
               <a:solidFill>
                 <a:srgbClr val="999999">
                   <a:alpha val="100000"/>
@@ -9511,14 +9597,14 @@
         </p:sp>
         <p:sp>
           <p:nvSpPr>
-            <p:cNvPr id="194" name="pt194"/>
-            <p:cNvSpPr/>
-            <p:nvPr/>
-          </p:nvSpPr>
-          <p:spPr>
-            <a:xfrm>
-              <a:off x="6717689" y="6241961"/>
-              <a:ext cx="61566" cy="61566"/>
+            <p:cNvPr id="196" name="pt196"/>
+            <p:cNvSpPr/>
+            <p:nvPr/>
+          </p:nvSpPr>
+          <p:spPr>
+            <a:xfrm>
+              <a:off x="5118550" y="5397097"/>
+              <a:ext cx="62384" cy="62384"/>
             </a:xfrm>
             <a:prstGeom prst="ellipse">
               <a:avLst/>
@@ -9528,7 +9614,7 @@
                 <a:alpha val="100000"/>
               </a:srgbClr>
             </a:solidFill>
-            <a:ln w="7363" cap="rnd">
+            <a:ln w="8181" cap="rnd">
               <a:solidFill>
                 <a:srgbClr val="999999">
                   <a:alpha val="100000"/>
@@ -9546,14 +9632,14 @@
         </p:sp>
         <p:sp>
           <p:nvSpPr>
-            <p:cNvPr id="195" name="pt195"/>
-            <p:cNvSpPr/>
-            <p:nvPr/>
-          </p:nvSpPr>
-          <p:spPr>
-            <a:xfrm>
-              <a:off x="8034434" y="6158654"/>
-              <a:ext cx="61566" cy="61566"/>
+            <p:cNvPr id="197" name="pt197"/>
+            <p:cNvSpPr/>
+            <p:nvPr/>
+          </p:nvSpPr>
+          <p:spPr>
+            <a:xfrm>
+              <a:off x="6079479" y="5331765"/>
+              <a:ext cx="62384" cy="62384"/>
             </a:xfrm>
             <a:prstGeom prst="ellipse">
               <a:avLst/>
@@ -9563,7 +9649,7 @@
                 <a:alpha val="100000"/>
               </a:srgbClr>
             </a:solidFill>
-            <a:ln w="7363" cap="rnd">
+            <a:ln w="8181" cap="rnd">
               <a:solidFill>
                 <a:srgbClr val="999999">
                   <a:alpha val="100000"/>
@@ -9581,14 +9667,14 @@
         </p:sp>
         <p:sp>
           <p:nvSpPr>
-            <p:cNvPr id="196" name="pt196"/>
-            <p:cNvSpPr/>
-            <p:nvPr/>
-          </p:nvSpPr>
-          <p:spPr>
-            <a:xfrm>
-              <a:off x="1450708" y="6454608"/>
-              <a:ext cx="61566" cy="61566"/>
+            <p:cNvPr id="198" name="pt198"/>
+            <p:cNvSpPr/>
+            <p:nvPr/>
+          </p:nvSpPr>
+          <p:spPr>
+            <a:xfrm>
+              <a:off x="1274835" y="5563859"/>
+              <a:ext cx="62384" cy="62384"/>
             </a:xfrm>
             <a:prstGeom prst="ellipse">
               <a:avLst/>
@@ -9598,7 +9684,7 @@
                 <a:alpha val="100000"/>
               </a:srgbClr>
             </a:solidFill>
-            <a:ln w="7363" cap="rnd">
+            <a:ln w="8181" cap="rnd">
               <a:solidFill>
                 <a:srgbClr val="CC79A7">
                   <a:alpha val="100000"/>
@@ -9616,14 +9702,14 @@
         </p:sp>
         <p:sp>
           <p:nvSpPr>
-            <p:cNvPr id="197" name="pt197"/>
-            <p:cNvSpPr/>
-            <p:nvPr/>
-          </p:nvSpPr>
-          <p:spPr>
-            <a:xfrm>
-              <a:off x="2767453" y="6497005"/>
-              <a:ext cx="61566" cy="61566"/>
+            <p:cNvPr id="199" name="pt199"/>
+            <p:cNvSpPr/>
+            <p:nvPr/>
+          </p:nvSpPr>
+          <p:spPr>
+            <a:xfrm>
+              <a:off x="2235764" y="5597108"/>
+              <a:ext cx="62384" cy="62384"/>
             </a:xfrm>
             <a:prstGeom prst="ellipse">
               <a:avLst/>
@@ -9633,7 +9719,7 @@
                 <a:alpha val="100000"/>
               </a:srgbClr>
             </a:solidFill>
-            <a:ln w="7363" cap="rnd">
+            <a:ln w="8181" cap="rnd">
               <a:solidFill>
                 <a:srgbClr val="CC79A7">
                   <a:alpha val="100000"/>
@@ -9651,14 +9737,14 @@
         </p:sp>
         <p:sp>
           <p:nvSpPr>
-            <p:cNvPr id="198" name="pt198"/>
-            <p:cNvSpPr/>
-            <p:nvPr/>
-          </p:nvSpPr>
-          <p:spPr>
-            <a:xfrm>
-              <a:off x="4084198" y="6485576"/>
-              <a:ext cx="61566" cy="61566"/>
+            <p:cNvPr id="200" name="pt200"/>
+            <p:cNvSpPr/>
+            <p:nvPr/>
+          </p:nvSpPr>
+          <p:spPr>
+            <a:xfrm>
+              <a:off x="3196693" y="5588145"/>
+              <a:ext cx="62384" cy="62384"/>
             </a:xfrm>
             <a:prstGeom prst="ellipse">
               <a:avLst/>
@@ -9668,7 +9754,7 @@
                 <a:alpha val="100000"/>
               </a:srgbClr>
             </a:solidFill>
-            <a:ln w="7363" cap="rnd">
+            <a:ln w="8181" cap="rnd">
               <a:solidFill>
                 <a:srgbClr val="CC79A7">
                   <a:alpha val="100000"/>
@@ -9686,14 +9772,14 @@
         </p:sp>
         <p:sp>
           <p:nvSpPr>
-            <p:cNvPr id="199" name="pt199"/>
-            <p:cNvSpPr/>
-            <p:nvPr/>
-          </p:nvSpPr>
-          <p:spPr>
-            <a:xfrm>
-              <a:off x="5400943" y="6486972"/>
-              <a:ext cx="61566" cy="61566"/>
+            <p:cNvPr id="201" name="pt201"/>
+            <p:cNvSpPr/>
+            <p:nvPr/>
+          </p:nvSpPr>
+          <p:spPr>
+            <a:xfrm>
+              <a:off x="4157621" y="5589240"/>
+              <a:ext cx="62384" cy="62384"/>
             </a:xfrm>
             <a:prstGeom prst="ellipse">
               <a:avLst/>
@@ -9703,7 +9789,7 @@
                 <a:alpha val="100000"/>
               </a:srgbClr>
             </a:solidFill>
-            <a:ln w="7363" cap="rnd">
+            <a:ln w="8181" cap="rnd">
               <a:solidFill>
                 <a:srgbClr val="CC79A7">
                   <a:alpha val="100000"/>
@@ -9721,14 +9807,14 @@
         </p:sp>
         <p:sp>
           <p:nvSpPr>
-            <p:cNvPr id="200" name="pt200"/>
-            <p:cNvSpPr/>
-            <p:nvPr/>
-          </p:nvSpPr>
-          <p:spPr>
-            <a:xfrm>
-              <a:off x="6717689" y="6488154"/>
-              <a:ext cx="61566" cy="61566"/>
+            <p:cNvPr id="202" name="pt202"/>
+            <p:cNvSpPr/>
+            <p:nvPr/>
+          </p:nvSpPr>
+          <p:spPr>
+            <a:xfrm>
+              <a:off x="5118550" y="5590167"/>
+              <a:ext cx="62384" cy="62384"/>
             </a:xfrm>
             <a:prstGeom prst="ellipse">
               <a:avLst/>
@@ -9738,7 +9824,7 @@
                 <a:alpha val="100000"/>
               </a:srgbClr>
             </a:solidFill>
-            <a:ln w="7363" cap="rnd">
+            <a:ln w="8181" cap="rnd">
               <a:solidFill>
                 <a:srgbClr val="CC79A7">
                   <a:alpha val="100000"/>
@@ -9756,14 +9842,14 @@
         </p:sp>
         <p:sp>
           <p:nvSpPr>
-            <p:cNvPr id="201" name="pt201"/>
-            <p:cNvSpPr/>
-            <p:nvPr/>
-          </p:nvSpPr>
-          <p:spPr>
-            <a:xfrm>
-              <a:off x="8034434" y="6520887"/>
-              <a:ext cx="61566" cy="61566"/>
+            <p:cNvPr id="203" name="pt203"/>
+            <p:cNvSpPr/>
+            <p:nvPr/>
+          </p:nvSpPr>
+          <p:spPr>
+            <a:xfrm>
+              <a:off x="6079479" y="5615837"/>
+              <a:ext cx="62384" cy="62384"/>
             </a:xfrm>
             <a:prstGeom prst="ellipse">
               <a:avLst/>
@@ -9773,7 +9859,7 @@
                 <a:alpha val="100000"/>
               </a:srgbClr>
             </a:solidFill>
-            <a:ln w="7363" cap="rnd">
+            <a:ln w="8181" cap="rnd">
               <a:solidFill>
                 <a:srgbClr val="CC79A7">
                   <a:alpha val="100000"/>
@@ -9791,14 +9877,14 @@
         </p:sp>
         <p:sp>
           <p:nvSpPr>
-            <p:cNvPr id="202" name="rc202"/>
-            <p:cNvSpPr/>
-            <p:nvPr/>
-          </p:nvSpPr>
-          <p:spPr>
-            <a:xfrm>
-              <a:off x="2139863" y="4104515"/>
-              <a:ext cx="1316745" cy="2563686"/>
+            <p:cNvPr id="204" name="rc204"/>
+            <p:cNvSpPr/>
+            <p:nvPr/>
+          </p:nvSpPr>
+          <p:spPr>
+            <a:xfrm>
+              <a:off x="1786492" y="3727916"/>
+              <a:ext cx="960928" cy="2010499"/>
             </a:xfrm>
             <a:prstGeom prst="rect">
               <a:avLst/>
@@ -9817,14 +9903,14 @@
         </p:sp>
         <p:sp>
           <p:nvSpPr>
-            <p:cNvPr id="203" name="tx203"/>
-            <p:cNvSpPr/>
-            <p:nvPr/>
-          </p:nvSpPr>
-          <p:spPr>
-            <a:xfrm>
-              <a:off x="2620111" y="4356711"/>
-              <a:ext cx="356250" cy="64648"/>
+            <p:cNvPr id="205" name="tx205"/>
+            <p:cNvSpPr/>
+            <p:nvPr/>
+          </p:nvSpPr>
+          <p:spPr>
+            <a:xfrm>
+              <a:off x="2064188" y="3914238"/>
+              <a:ext cx="405536" cy="73609"/>
             </a:xfrm>
             <a:prstGeom prst="rect">
               <a:avLst/>
@@ -9844,7 +9930,7 @@
                 </a:spcAft>
               </a:pPr>
               <a:r>
-                <a:rPr sz="711" i="0" b="0">
+                <a:rPr sz="810" i="0" b="0">
                   <a:solidFill>
                     <a:srgbClr val="D55E00">
                       <a:alpha val="100000"/>
@@ -9860,21 +9946,21 @@
         </p:sp>
         <p:sp>
           <p:nvSpPr>
-            <p:cNvPr id="204" name="pl204"/>
-            <p:cNvSpPr/>
-            <p:nvPr/>
-          </p:nvSpPr>
-          <p:spPr>
-            <a:xfrm>
-              <a:off x="691444" y="4104515"/>
-              <a:ext cx="0" cy="2563686"/>
+            <p:cNvPr id="206" name="pl206"/>
+            <p:cNvSpPr/>
+            <p:nvPr/>
+          </p:nvSpPr>
+          <p:spPr>
+            <a:xfrm>
+              <a:off x="729470" y="3727916"/>
+              <a:ext cx="0" cy="2010499"/>
             </a:xfrm>
             <a:custGeom>
               <a:avLst/>
               <a:pathLst>
-                <a:path w="0" h="2563686">
+                <a:path w="0" h="2010499">
                   <a:moveTo>
-                    <a:pt x="0" y="2563686"/>
+                    <a:pt x="0" y="2010499"/>
                   </a:moveTo>
                   <a:lnTo>
                     <a:pt x="0" y="0"/>
@@ -9900,14 +9986,14 @@
         </p:sp>
         <p:sp>
           <p:nvSpPr>
-            <p:cNvPr id="205" name="tx205"/>
-            <p:cNvSpPr/>
-            <p:nvPr/>
-          </p:nvSpPr>
-          <p:spPr>
-            <a:xfrm>
-              <a:off x="513374" y="6144567"/>
-              <a:ext cx="126827" cy="65379"/>
+            <p:cNvPr id="207" name="tx207"/>
+            <p:cNvSpPr/>
+            <p:nvPr/>
+          </p:nvSpPr>
+          <p:spPr>
+            <a:xfrm>
+              <a:off x="531259" y="5317012"/>
+              <a:ext cx="141274" cy="72786"/>
             </a:xfrm>
             <a:prstGeom prst="rect">
               <a:avLst/>
@@ -9927,7 +10013,7 @@
                 </a:spcAft>
               </a:pPr>
               <a:r>
-                <a:rPr sz="720" i="0" b="0">
+                <a:rPr sz="800" i="0" b="0">
                   <a:solidFill>
                     <a:srgbClr val="262626">
                       <a:alpha val="100000"/>
@@ -9943,14 +10029,14 @@
         </p:sp>
         <p:sp>
           <p:nvSpPr>
-            <p:cNvPr id="206" name="tx206"/>
-            <p:cNvSpPr/>
-            <p:nvPr/>
-          </p:nvSpPr>
-          <p:spPr>
-            <a:xfrm>
-              <a:off x="513374" y="5647839"/>
-              <a:ext cx="126827" cy="65379"/>
+            <p:cNvPr id="208" name="tx208"/>
+            <p:cNvSpPr/>
+            <p:nvPr/>
+          </p:nvSpPr>
+          <p:spPr>
+            <a:xfrm>
+              <a:off x="531259" y="4927467"/>
+              <a:ext cx="141274" cy="72786"/>
             </a:xfrm>
             <a:prstGeom prst="rect">
               <a:avLst/>
@@ -9970,7 +10056,7 @@
                 </a:spcAft>
               </a:pPr>
               <a:r>
-                <a:rPr sz="720" i="0" b="0">
+                <a:rPr sz="800" i="0" b="0">
                   <a:solidFill>
                     <a:srgbClr val="262626">
                       <a:alpha val="100000"/>
@@ -9986,14 +10072,14 @@
         </p:sp>
         <p:sp>
           <p:nvSpPr>
-            <p:cNvPr id="207" name="tx207"/>
-            <p:cNvSpPr/>
-            <p:nvPr/>
-          </p:nvSpPr>
-          <p:spPr>
-            <a:xfrm>
-              <a:off x="513374" y="5151110"/>
-              <a:ext cx="126827" cy="65379"/>
+            <p:cNvPr id="209" name="tx209"/>
+            <p:cNvSpPr/>
+            <p:nvPr/>
+          </p:nvSpPr>
+          <p:spPr>
+            <a:xfrm>
+              <a:off x="531259" y="4537922"/>
+              <a:ext cx="141274" cy="72786"/>
             </a:xfrm>
             <a:prstGeom prst="rect">
               <a:avLst/>
@@ -10013,7 +10099,7 @@
                 </a:spcAft>
               </a:pPr>
               <a:r>
-                <a:rPr sz="720" i="0" b="0">
+                <a:rPr sz="800" i="0" b="0">
                   <a:solidFill>
                     <a:srgbClr val="262626">
                       <a:alpha val="100000"/>
@@ -10029,14 +10115,14 @@
         </p:sp>
         <p:sp>
           <p:nvSpPr>
-            <p:cNvPr id="208" name="tx208"/>
-            <p:cNvSpPr/>
-            <p:nvPr/>
-          </p:nvSpPr>
-          <p:spPr>
-            <a:xfrm>
-              <a:off x="513374" y="4654382"/>
-              <a:ext cx="126827" cy="65379"/>
+            <p:cNvPr id="210" name="tx210"/>
+            <p:cNvSpPr/>
+            <p:nvPr/>
+          </p:nvSpPr>
+          <p:spPr>
+            <a:xfrm>
+              <a:off x="531259" y="4148377"/>
+              <a:ext cx="141274" cy="72786"/>
             </a:xfrm>
             <a:prstGeom prst="rect">
               <a:avLst/>
@@ -10056,7 +10142,7 @@
                 </a:spcAft>
               </a:pPr>
               <a:r>
-                <a:rPr sz="720" i="0" b="0">
+                <a:rPr sz="800" i="0" b="0">
                   <a:solidFill>
                     <a:srgbClr val="262626">
                       <a:alpha val="100000"/>
@@ -10072,14 +10158,14 @@
         </p:sp>
         <p:sp>
           <p:nvSpPr>
-            <p:cNvPr id="209" name="tx209"/>
-            <p:cNvSpPr/>
-            <p:nvPr/>
-          </p:nvSpPr>
-          <p:spPr>
-            <a:xfrm>
-              <a:off x="513374" y="4157654"/>
-              <a:ext cx="126827" cy="65379"/>
+            <p:cNvPr id="211" name="tx211"/>
+            <p:cNvSpPr/>
+            <p:nvPr/>
+          </p:nvSpPr>
+          <p:spPr>
+            <a:xfrm>
+              <a:off x="531259" y="3758832"/>
+              <a:ext cx="141274" cy="72786"/>
             </a:xfrm>
             <a:prstGeom prst="rect">
               <a:avLst/>
@@ -10099,7 +10185,7 @@
                 </a:spcAft>
               </a:pPr>
               <a:r>
-                <a:rPr sz="720" i="0" b="0">
+                <a:rPr sz="800" i="0" b="0">
                   <a:solidFill>
                     <a:srgbClr val="262626">
                       <a:alpha val="100000"/>
@@ -10115,24 +10201,24 @@
         </p:sp>
         <p:sp>
           <p:nvSpPr>
-            <p:cNvPr id="210" name="pl210"/>
-            <p:cNvSpPr/>
-            <p:nvPr/>
-          </p:nvSpPr>
-          <p:spPr>
-            <a:xfrm>
-              <a:off x="662975" y="6177257"/>
-              <a:ext cx="28468" cy="0"/>
+            <p:cNvPr id="212" name="pl212"/>
+            <p:cNvSpPr/>
+            <p:nvPr/>
+          </p:nvSpPr>
+          <p:spPr>
+            <a:xfrm>
+              <a:off x="697838" y="5353405"/>
+              <a:ext cx="31631" cy="0"/>
             </a:xfrm>
             <a:custGeom>
               <a:avLst/>
               <a:pathLst>
-                <a:path w="28468" h="0">
+                <a:path w="31631" h="0">
                   <a:moveTo>
                     <a:pt x="0" y="0"/>
                   </a:moveTo>
                   <a:lnTo>
-                    <a:pt x="28468" y="0"/>
+                    <a:pt x="31631" y="0"/>
                   </a:lnTo>
                 </a:path>
               </a:pathLst>
@@ -10155,24 +10241,24 @@
         </p:sp>
         <p:sp>
           <p:nvSpPr>
-            <p:cNvPr id="211" name="pl211"/>
-            <p:cNvSpPr/>
-            <p:nvPr/>
-          </p:nvSpPr>
-          <p:spPr>
-            <a:xfrm>
-              <a:off x="662975" y="5680528"/>
-              <a:ext cx="28468" cy="0"/>
+            <p:cNvPr id="213" name="pl213"/>
+            <p:cNvSpPr/>
+            <p:nvPr/>
+          </p:nvSpPr>
+          <p:spPr>
+            <a:xfrm>
+              <a:off x="697838" y="4963860"/>
+              <a:ext cx="31631" cy="0"/>
             </a:xfrm>
             <a:custGeom>
               <a:avLst/>
               <a:pathLst>
-                <a:path w="28468" h="0">
+                <a:path w="31631" h="0">
                   <a:moveTo>
                     <a:pt x="0" y="0"/>
                   </a:moveTo>
                   <a:lnTo>
-                    <a:pt x="28468" y="0"/>
+                    <a:pt x="31631" y="0"/>
                   </a:lnTo>
                 </a:path>
               </a:pathLst>
@@ -10195,24 +10281,24 @@
         </p:sp>
         <p:sp>
           <p:nvSpPr>
-            <p:cNvPr id="212" name="pl212"/>
-            <p:cNvSpPr/>
-            <p:nvPr/>
-          </p:nvSpPr>
-          <p:spPr>
-            <a:xfrm>
-              <a:off x="662975" y="5183800"/>
-              <a:ext cx="28468" cy="0"/>
+            <p:cNvPr id="214" name="pl214"/>
+            <p:cNvSpPr/>
+            <p:nvPr/>
+          </p:nvSpPr>
+          <p:spPr>
+            <a:xfrm>
+              <a:off x="697838" y="4574315"/>
+              <a:ext cx="31631" cy="0"/>
             </a:xfrm>
             <a:custGeom>
               <a:avLst/>
               <a:pathLst>
-                <a:path w="28468" h="0">
+                <a:path w="31631" h="0">
                   <a:moveTo>
                     <a:pt x="0" y="0"/>
                   </a:moveTo>
                   <a:lnTo>
-                    <a:pt x="28468" y="0"/>
+                    <a:pt x="31631" y="0"/>
                   </a:lnTo>
                 </a:path>
               </a:pathLst>
@@ -10235,24 +10321,24 @@
         </p:sp>
         <p:sp>
           <p:nvSpPr>
-            <p:cNvPr id="213" name="pl213"/>
-            <p:cNvSpPr/>
-            <p:nvPr/>
-          </p:nvSpPr>
-          <p:spPr>
-            <a:xfrm>
-              <a:off x="662975" y="4687072"/>
-              <a:ext cx="28468" cy="0"/>
+            <p:cNvPr id="215" name="pl215"/>
+            <p:cNvSpPr/>
+            <p:nvPr/>
+          </p:nvSpPr>
+          <p:spPr>
+            <a:xfrm>
+              <a:off x="697838" y="4184770"/>
+              <a:ext cx="31631" cy="0"/>
             </a:xfrm>
             <a:custGeom>
               <a:avLst/>
               <a:pathLst>
-                <a:path w="28468" h="0">
+                <a:path w="31631" h="0">
                   <a:moveTo>
                     <a:pt x="0" y="0"/>
                   </a:moveTo>
                   <a:lnTo>
-                    <a:pt x="28468" y="0"/>
+                    <a:pt x="31631" y="0"/>
                   </a:lnTo>
                 </a:path>
               </a:pathLst>
@@ -10275,24 +10361,24 @@
         </p:sp>
         <p:sp>
           <p:nvSpPr>
-            <p:cNvPr id="214" name="pl214"/>
-            <p:cNvSpPr/>
-            <p:nvPr/>
-          </p:nvSpPr>
-          <p:spPr>
-            <a:xfrm>
-              <a:off x="662975" y="4190344"/>
-              <a:ext cx="28468" cy="0"/>
+            <p:cNvPr id="216" name="pl216"/>
+            <p:cNvSpPr/>
+            <p:nvPr/>
+          </p:nvSpPr>
+          <p:spPr>
+            <a:xfrm>
+              <a:off x="697838" y="3795225"/>
+              <a:ext cx="31631" cy="0"/>
             </a:xfrm>
             <a:custGeom>
               <a:avLst/>
               <a:pathLst>
-                <a:path w="28468" h="0">
+                <a:path w="31631" h="0">
                   <a:moveTo>
                     <a:pt x="0" y="0"/>
                   </a:moveTo>
                   <a:lnTo>
-                    <a:pt x="28468" y="0"/>
+                    <a:pt x="31631" y="0"/>
                   </a:lnTo>
                 </a:path>
               </a:pathLst>
@@ -10315,24 +10401,24 @@
         </p:sp>
         <p:sp>
           <p:nvSpPr>
-            <p:cNvPr id="215" name="pl215"/>
-            <p:cNvSpPr/>
-            <p:nvPr/>
-          </p:nvSpPr>
-          <p:spPr>
-            <a:xfrm>
-              <a:off x="691444" y="6668202"/>
-              <a:ext cx="8163820" cy="0"/>
+            <p:cNvPr id="217" name="pl217"/>
+            <p:cNvSpPr/>
+            <p:nvPr/>
+          </p:nvSpPr>
+          <p:spPr>
+            <a:xfrm>
+              <a:off x="729470" y="5738415"/>
+              <a:ext cx="5957758" cy="0"/>
             </a:xfrm>
             <a:custGeom>
               <a:avLst/>
               <a:pathLst>
-                <a:path w="8163820" h="0">
+                <a:path w="5957758" h="0">
                   <a:moveTo>
                     <a:pt x="0" y="0"/>
                   </a:moveTo>
                   <a:lnTo>
-                    <a:pt x="8163820" y="0"/>
+                    <a:pt x="5957758" y="0"/>
                   </a:lnTo>
                 </a:path>
               </a:pathLst>
@@ -10355,21 +10441,21 @@
         </p:sp>
         <p:sp>
           <p:nvSpPr>
-            <p:cNvPr id="216" name="pl216"/>
-            <p:cNvSpPr/>
-            <p:nvPr/>
-          </p:nvSpPr>
-          <p:spPr>
-            <a:xfrm>
-              <a:off x="1481491" y="6668202"/>
-              <a:ext cx="0" cy="28468"/>
+            <p:cNvPr id="218" name="pl218"/>
+            <p:cNvSpPr/>
+            <p:nvPr/>
+          </p:nvSpPr>
+          <p:spPr>
+            <a:xfrm>
+              <a:off x="1306027" y="5738415"/>
+              <a:ext cx="0" cy="31631"/>
             </a:xfrm>
             <a:custGeom>
               <a:avLst/>
               <a:pathLst>
-                <a:path w="0" h="28468">
+                <a:path w="0" h="31631">
                   <a:moveTo>
-                    <a:pt x="0" y="28468"/>
+                    <a:pt x="0" y="31631"/>
                   </a:moveTo>
                   <a:lnTo>
                     <a:pt x="0" y="0"/>
@@ -10395,21 +10481,21 @@
         </p:sp>
         <p:sp>
           <p:nvSpPr>
-            <p:cNvPr id="217" name="pl217"/>
-            <p:cNvSpPr/>
-            <p:nvPr/>
-          </p:nvSpPr>
-          <p:spPr>
-            <a:xfrm>
-              <a:off x="2798236" y="6668202"/>
-              <a:ext cx="0" cy="28468"/>
+            <p:cNvPr id="219" name="pl219"/>
+            <p:cNvSpPr/>
+            <p:nvPr/>
+          </p:nvSpPr>
+          <p:spPr>
+            <a:xfrm>
+              <a:off x="2266956" y="5738415"/>
+              <a:ext cx="0" cy="31631"/>
             </a:xfrm>
             <a:custGeom>
               <a:avLst/>
               <a:pathLst>
-                <a:path w="0" h="28468">
+                <a:path w="0" h="31631">
                   <a:moveTo>
-                    <a:pt x="0" y="28468"/>
+                    <a:pt x="0" y="31631"/>
                   </a:moveTo>
                   <a:lnTo>
                     <a:pt x="0" y="0"/>
@@ -10435,21 +10521,21 @@
         </p:sp>
         <p:sp>
           <p:nvSpPr>
-            <p:cNvPr id="218" name="pl218"/>
-            <p:cNvSpPr/>
-            <p:nvPr/>
-          </p:nvSpPr>
-          <p:spPr>
-            <a:xfrm>
-              <a:off x="4114981" y="6668202"/>
-              <a:ext cx="0" cy="28468"/>
+            <p:cNvPr id="220" name="pl220"/>
+            <p:cNvSpPr/>
+            <p:nvPr/>
+          </p:nvSpPr>
+          <p:spPr>
+            <a:xfrm>
+              <a:off x="3227885" y="5738415"/>
+              <a:ext cx="0" cy="31631"/>
             </a:xfrm>
             <a:custGeom>
               <a:avLst/>
               <a:pathLst>
-                <a:path w="0" h="28468">
+                <a:path w="0" h="31631">
                   <a:moveTo>
-                    <a:pt x="0" y="28468"/>
+                    <a:pt x="0" y="31631"/>
                   </a:moveTo>
                   <a:lnTo>
                     <a:pt x="0" y="0"/>
@@ -10475,21 +10561,21 @@
         </p:sp>
         <p:sp>
           <p:nvSpPr>
-            <p:cNvPr id="219" name="pl219"/>
-            <p:cNvSpPr/>
-            <p:nvPr/>
-          </p:nvSpPr>
-          <p:spPr>
-            <a:xfrm>
-              <a:off x="5431726" y="6668202"/>
-              <a:ext cx="0" cy="28468"/>
+            <p:cNvPr id="221" name="pl221"/>
+            <p:cNvSpPr/>
+            <p:nvPr/>
+          </p:nvSpPr>
+          <p:spPr>
+            <a:xfrm>
+              <a:off x="4188814" y="5738415"/>
+              <a:ext cx="0" cy="31631"/>
             </a:xfrm>
             <a:custGeom>
               <a:avLst/>
               <a:pathLst>
-                <a:path w="0" h="28468">
+                <a:path w="0" h="31631">
                   <a:moveTo>
-                    <a:pt x="0" y="28468"/>
+                    <a:pt x="0" y="31631"/>
                   </a:moveTo>
                   <a:lnTo>
                     <a:pt x="0" y="0"/>
@@ -10515,21 +10601,21 @@
         </p:sp>
         <p:sp>
           <p:nvSpPr>
-            <p:cNvPr id="220" name="pl220"/>
-            <p:cNvSpPr/>
-            <p:nvPr/>
-          </p:nvSpPr>
-          <p:spPr>
-            <a:xfrm>
-              <a:off x="6748472" y="6668202"/>
-              <a:ext cx="0" cy="28468"/>
+            <p:cNvPr id="222" name="pl222"/>
+            <p:cNvSpPr/>
+            <p:nvPr/>
+          </p:nvSpPr>
+          <p:spPr>
+            <a:xfrm>
+              <a:off x="5149742" y="5738415"/>
+              <a:ext cx="0" cy="31631"/>
             </a:xfrm>
             <a:custGeom>
               <a:avLst/>
               <a:pathLst>
-                <a:path w="0" h="28468">
+                <a:path w="0" h="31631">
                   <a:moveTo>
-                    <a:pt x="0" y="28468"/>
+                    <a:pt x="0" y="31631"/>
                   </a:moveTo>
                   <a:lnTo>
                     <a:pt x="0" y="0"/>
@@ -10555,21 +10641,21 @@
         </p:sp>
         <p:sp>
           <p:nvSpPr>
-            <p:cNvPr id="221" name="pl221"/>
-            <p:cNvSpPr/>
-            <p:nvPr/>
-          </p:nvSpPr>
-          <p:spPr>
-            <a:xfrm>
-              <a:off x="8065217" y="6668202"/>
-              <a:ext cx="0" cy="28468"/>
+            <p:cNvPr id="223" name="pl223"/>
+            <p:cNvSpPr/>
+            <p:nvPr/>
+          </p:nvSpPr>
+          <p:spPr>
+            <a:xfrm>
+              <a:off x="6110671" y="5738415"/>
+              <a:ext cx="0" cy="31631"/>
             </a:xfrm>
             <a:custGeom>
               <a:avLst/>
               <a:pathLst>
-                <a:path w="0" h="28468">
+                <a:path w="0" h="31631">
                   <a:moveTo>
-                    <a:pt x="0" y="28468"/>
+                    <a:pt x="0" y="31631"/>
                   </a:moveTo>
                   <a:lnTo>
                     <a:pt x="0" y="0"/>
@@ -10595,14 +10681,14 @@
         </p:sp>
         <p:sp>
           <p:nvSpPr>
-            <p:cNvPr id="222" name="tx222"/>
-            <p:cNvSpPr/>
-            <p:nvPr/>
-          </p:nvSpPr>
-          <p:spPr>
-            <a:xfrm>
-              <a:off x="1425667" y="6719445"/>
-              <a:ext cx="111648" cy="65379"/>
+            <p:cNvPr id="224" name="tx224"/>
+            <p:cNvSpPr/>
+            <p:nvPr/>
+          </p:nvSpPr>
+          <p:spPr>
+            <a:xfrm>
+              <a:off x="1243894" y="5795352"/>
+              <a:ext cx="124266" cy="72786"/>
             </a:xfrm>
             <a:prstGeom prst="rect">
               <a:avLst/>
@@ -10622,7 +10708,7 @@
                 </a:spcAft>
               </a:pPr>
               <a:r>
-                <a:rPr sz="720" i="0" b="0">
+                <a:rPr sz="800" i="0" b="0">
                   <a:solidFill>
                     <a:srgbClr val="262626">
                       <a:alpha val="100000"/>
@@ -10638,14 +10724,14 @@
         </p:sp>
         <p:sp>
           <p:nvSpPr>
-            <p:cNvPr id="223" name="tx223"/>
-            <p:cNvSpPr/>
-            <p:nvPr/>
-          </p:nvSpPr>
-          <p:spPr>
-            <a:xfrm>
-              <a:off x="2742412" y="6719445"/>
-              <a:ext cx="111648" cy="65379"/>
+            <p:cNvPr id="225" name="tx225"/>
+            <p:cNvSpPr/>
+            <p:nvPr/>
+          </p:nvSpPr>
+          <p:spPr>
+            <a:xfrm>
+              <a:off x="2204822" y="5795352"/>
+              <a:ext cx="124266" cy="72786"/>
             </a:xfrm>
             <a:prstGeom prst="rect">
               <a:avLst/>
@@ -10665,7 +10751,7 @@
                 </a:spcAft>
               </a:pPr>
               <a:r>
-                <a:rPr sz="720" i="0" b="0">
+                <a:rPr sz="800" i="0" b="0">
                   <a:solidFill>
                     <a:srgbClr val="262626">
                       <a:alpha val="100000"/>
@@ -10681,14 +10767,14 @@
         </p:sp>
         <p:sp>
           <p:nvSpPr>
-            <p:cNvPr id="224" name="tx224"/>
-            <p:cNvSpPr/>
-            <p:nvPr/>
-          </p:nvSpPr>
-          <p:spPr>
-            <a:xfrm>
-              <a:off x="4059157" y="6719445"/>
-              <a:ext cx="111648" cy="65379"/>
+            <p:cNvPr id="226" name="tx226"/>
+            <p:cNvSpPr/>
+            <p:nvPr/>
+          </p:nvSpPr>
+          <p:spPr>
+            <a:xfrm>
+              <a:off x="3165751" y="5795352"/>
+              <a:ext cx="124266" cy="72786"/>
             </a:xfrm>
             <a:prstGeom prst="rect">
               <a:avLst/>
@@ -10708,7 +10794,7 @@
                 </a:spcAft>
               </a:pPr>
               <a:r>
-                <a:rPr sz="720" i="0" b="0">
+                <a:rPr sz="800" i="0" b="0">
                   <a:solidFill>
                     <a:srgbClr val="262626">
                       <a:alpha val="100000"/>
@@ -10724,14 +10810,14 @@
         </p:sp>
         <p:sp>
           <p:nvSpPr>
-            <p:cNvPr id="225" name="tx225"/>
-            <p:cNvSpPr/>
-            <p:nvPr/>
-          </p:nvSpPr>
-          <p:spPr>
-            <a:xfrm>
-              <a:off x="5375902" y="6719445"/>
-              <a:ext cx="111648" cy="65379"/>
+            <p:cNvPr id="227" name="tx227"/>
+            <p:cNvSpPr/>
+            <p:nvPr/>
+          </p:nvSpPr>
+          <p:spPr>
+            <a:xfrm>
+              <a:off x="4126680" y="5795352"/>
+              <a:ext cx="124266" cy="72786"/>
             </a:xfrm>
             <a:prstGeom prst="rect">
               <a:avLst/>
@@ -10751,7 +10837,7 @@
                 </a:spcAft>
               </a:pPr>
               <a:r>
-                <a:rPr sz="720" i="0" b="0">
+                <a:rPr sz="800" i="0" b="0">
                   <a:solidFill>
                     <a:srgbClr val="262626">
                       <a:alpha val="100000"/>
@@ -10767,14 +10853,14 @@
         </p:sp>
         <p:sp>
           <p:nvSpPr>
-            <p:cNvPr id="226" name="tx226"/>
-            <p:cNvSpPr/>
-            <p:nvPr/>
-          </p:nvSpPr>
-          <p:spPr>
-            <a:xfrm>
-              <a:off x="6692648" y="6719445"/>
-              <a:ext cx="111648" cy="65379"/>
+            <p:cNvPr id="228" name="tx228"/>
+            <p:cNvSpPr/>
+            <p:nvPr/>
+          </p:nvSpPr>
+          <p:spPr>
+            <a:xfrm>
+              <a:off x="5087609" y="5795352"/>
+              <a:ext cx="124266" cy="72786"/>
             </a:xfrm>
             <a:prstGeom prst="rect">
               <a:avLst/>
@@ -10794,7 +10880,7 @@
                 </a:spcAft>
               </a:pPr>
               <a:r>
-                <a:rPr sz="720" i="0" b="0">
+                <a:rPr sz="800" i="0" b="0">
                   <a:solidFill>
                     <a:srgbClr val="262626">
                       <a:alpha val="100000"/>
@@ -10810,14 +10896,14 @@
         </p:sp>
         <p:sp>
           <p:nvSpPr>
-            <p:cNvPr id="227" name="tx227"/>
-            <p:cNvSpPr/>
-            <p:nvPr/>
-          </p:nvSpPr>
-          <p:spPr>
-            <a:xfrm>
-              <a:off x="8009393" y="6719445"/>
-              <a:ext cx="111648" cy="65379"/>
+            <p:cNvPr id="229" name="tx229"/>
+            <p:cNvSpPr/>
+            <p:nvPr/>
+          </p:nvSpPr>
+          <p:spPr>
+            <a:xfrm>
+              <a:off x="6048538" y="5795352"/>
+              <a:ext cx="124266" cy="72786"/>
             </a:xfrm>
             <a:prstGeom prst="rect">
               <a:avLst/>
@@ -10837,7 +10923,7 @@
                 </a:spcAft>
               </a:pPr>
               <a:r>
-                <a:rPr sz="720" i="0" b="0">
+                <a:rPr sz="800" i="0" b="0">
                   <a:solidFill>
                     <a:srgbClr val="262626">
                       <a:alpha val="100000"/>
@@ -10853,14 +10939,487 @@
         </p:sp>
         <p:sp>
           <p:nvSpPr>
-            <p:cNvPr id="228" name="tx228"/>
+            <p:cNvPr id="230" name="tx230"/>
             <p:cNvSpPr/>
             <p:nvPr/>
           </p:nvSpPr>
           <p:spPr>
             <a:xfrm rot="-5400000">
-              <a:off x="-157963" y="5345439"/>
-              <a:ext cx="1105143" cy="81838"/>
+              <a:off x="-215250" y="4687674"/>
+              <a:ext cx="1228862" cy="90982"/>
+            </a:xfrm>
+            <a:prstGeom prst="rect">
+              <a:avLst/>
+            </a:prstGeom>
+            <a:noFill/>
+          </p:spPr>
+          <p:txBody>
+            <a:bodyPr lIns="0" rIns="0" tIns="0" bIns="0" anchorCtr="1" anchor="ctr" wrap="none"/>
+            <a:lstStyle/>
+            <a:p>
+              <a:pPr algn="l" marL="0" marR="0" indent="0">
+                <a:spcBef>
+                  <a:spcPts val="0"/>
+                </a:spcBef>
+                <a:spcAft>
+                  <a:spcPts val="0"/>
+                </a:spcAft>
+              </a:pPr>
+              <a:r>
+                <a:rPr sz="1000" i="0" b="0">
+                  <a:solidFill>
+                    <a:srgbClr val="0D0D0D">
+                      <a:alpha val="100000"/>
+                    </a:srgbClr>
+                  </a:solidFill>
+                  <a:latin typeface="Arial"/>
+                  <a:cs typeface="Arial"/>
+                </a:rPr>
+                <a:t>Hazard ratio per 1 SD</a:t>
+              </a:r>
+            </a:p>
+          </p:txBody>
+        </p:sp>
+        <p:sp>
+          <p:nvSpPr>
+            <p:cNvPr id="231" name="rc231"/>
+            <p:cNvSpPr/>
+            <p:nvPr/>
+          </p:nvSpPr>
+          <p:spPr>
+            <a:xfrm>
+              <a:off x="6813754" y="4442157"/>
+              <a:ext cx="1427916" cy="582017"/>
+            </a:xfrm>
+            <a:prstGeom prst="rect">
+              <a:avLst/>
+            </a:prstGeom>
+            <a:solidFill>
+              <a:srgbClr val="FFFFFF">
+                <a:alpha val="100000"/>
+              </a:srgbClr>
+            </a:solidFill>
+          </p:spPr>
+          <p:txBody>
+            <a:bodyPr/>
+            <a:lstStyle/>
+            <a:p/>
+          </p:txBody>
+        </p:sp>
+        <p:sp>
+          <p:nvSpPr>
+            <p:cNvPr id="232" name="rc232"/>
+            <p:cNvSpPr/>
+            <p:nvPr/>
+          </p:nvSpPr>
+          <p:spPr>
+            <a:xfrm>
+              <a:off x="6877017" y="4505420"/>
+              <a:ext cx="113872" cy="113872"/>
+            </a:xfrm>
+            <a:prstGeom prst="rect">
+              <a:avLst/>
+            </a:prstGeom>
+            <a:solidFill>
+              <a:srgbClr val="FFFFFF">
+                <a:alpha val="100000"/>
+              </a:srgbClr>
+            </a:solidFill>
+          </p:spPr>
+          <p:txBody>
+            <a:bodyPr/>
+            <a:lstStyle/>
+            <a:p/>
+          </p:txBody>
+        </p:sp>
+        <p:sp>
+          <p:nvSpPr>
+            <p:cNvPr id="233" name="pl233"/>
+            <p:cNvSpPr/>
+            <p:nvPr/>
+          </p:nvSpPr>
+          <p:spPr>
+            <a:xfrm>
+              <a:off x="6888404" y="4562356"/>
+              <a:ext cx="91098" cy="0"/>
+            </a:xfrm>
+            <a:custGeom>
+              <a:avLst/>
+              <a:pathLst>
+                <a:path w="91098" h="0">
+                  <a:moveTo>
+                    <a:pt x="0" y="0"/>
+                  </a:moveTo>
+                  <a:lnTo>
+                    <a:pt x="91098" y="0"/>
+                  </a:lnTo>
+                </a:path>
+              </a:pathLst>
+            </a:custGeom>
+            <a:ln w="17615" cap="flat">
+              <a:solidFill>
+                <a:srgbClr val="0072B2">
+                  <a:alpha val="100000"/>
+                </a:srgbClr>
+              </a:solidFill>
+              <a:prstDash val="solid"/>
+              <a:round/>
+            </a:ln>
+          </p:spPr>
+          <p:txBody>
+            <a:bodyPr/>
+            <a:lstStyle/>
+            <a:p/>
+          </p:txBody>
+        </p:sp>
+        <p:sp>
+          <p:nvSpPr>
+            <p:cNvPr id="234" name="pt234"/>
+            <p:cNvSpPr/>
+            <p:nvPr/>
+          </p:nvSpPr>
+          <p:spPr>
+            <a:xfrm>
+              <a:off x="6902761" y="4531164"/>
+              <a:ext cx="62384" cy="62384"/>
+            </a:xfrm>
+            <a:prstGeom prst="ellipse">
+              <a:avLst/>
+            </a:prstGeom>
+            <a:solidFill>
+              <a:srgbClr val="0072B2">
+                <a:alpha val="100000"/>
+              </a:srgbClr>
+            </a:solidFill>
+            <a:ln w="8181" cap="rnd">
+              <a:solidFill>
+                <a:srgbClr val="0072B2">
+                  <a:alpha val="100000"/>
+                </a:srgbClr>
+              </a:solidFill>
+              <a:prstDash val="solid"/>
+              <a:round/>
+            </a:ln>
+          </p:spPr>
+          <p:txBody>
+            <a:bodyPr/>
+            <a:lstStyle/>
+            <a:p/>
+          </p:txBody>
+        </p:sp>
+        <p:sp>
+          <p:nvSpPr>
+            <p:cNvPr id="235" name="rc235"/>
+            <p:cNvSpPr/>
+            <p:nvPr/>
+          </p:nvSpPr>
+          <p:spPr>
+            <a:xfrm>
+              <a:off x="6877017" y="4619293"/>
+              <a:ext cx="113872" cy="113872"/>
+            </a:xfrm>
+            <a:prstGeom prst="rect">
+              <a:avLst/>
+            </a:prstGeom>
+            <a:solidFill>
+              <a:srgbClr val="FFFFFF">
+                <a:alpha val="100000"/>
+              </a:srgbClr>
+            </a:solidFill>
+          </p:spPr>
+          <p:txBody>
+            <a:bodyPr/>
+            <a:lstStyle/>
+            <a:p/>
+          </p:txBody>
+        </p:sp>
+        <p:sp>
+          <p:nvSpPr>
+            <p:cNvPr id="236" name="pl236"/>
+            <p:cNvSpPr/>
+            <p:nvPr/>
+          </p:nvSpPr>
+          <p:spPr>
+            <a:xfrm>
+              <a:off x="6888404" y="4676229"/>
+              <a:ext cx="91098" cy="0"/>
+            </a:xfrm>
+            <a:custGeom>
+              <a:avLst/>
+              <a:pathLst>
+                <a:path w="91098" h="0">
+                  <a:moveTo>
+                    <a:pt x="0" y="0"/>
+                  </a:moveTo>
+                  <a:lnTo>
+                    <a:pt x="91098" y="0"/>
+                  </a:lnTo>
+                </a:path>
+              </a:pathLst>
+            </a:custGeom>
+            <a:ln w="17615" cap="flat">
+              <a:solidFill>
+                <a:srgbClr val="009E73">
+                  <a:alpha val="100000"/>
+                </a:srgbClr>
+              </a:solidFill>
+              <a:prstDash val="solid"/>
+              <a:round/>
+            </a:ln>
+          </p:spPr>
+          <p:txBody>
+            <a:bodyPr/>
+            <a:lstStyle/>
+            <a:p/>
+          </p:txBody>
+        </p:sp>
+        <p:sp>
+          <p:nvSpPr>
+            <p:cNvPr id="237" name="pt237"/>
+            <p:cNvSpPr/>
+            <p:nvPr/>
+          </p:nvSpPr>
+          <p:spPr>
+            <a:xfrm>
+              <a:off x="6902761" y="4645037"/>
+              <a:ext cx="62384" cy="62384"/>
+            </a:xfrm>
+            <a:prstGeom prst="ellipse">
+              <a:avLst/>
+            </a:prstGeom>
+            <a:solidFill>
+              <a:srgbClr val="009E73">
+                <a:alpha val="100000"/>
+              </a:srgbClr>
+            </a:solidFill>
+            <a:ln w="8181" cap="rnd">
+              <a:solidFill>
+                <a:srgbClr val="009E73">
+                  <a:alpha val="100000"/>
+                </a:srgbClr>
+              </a:solidFill>
+              <a:prstDash val="solid"/>
+              <a:round/>
+            </a:ln>
+          </p:spPr>
+          <p:txBody>
+            <a:bodyPr/>
+            <a:lstStyle/>
+            <a:p/>
+          </p:txBody>
+        </p:sp>
+        <p:sp>
+          <p:nvSpPr>
+            <p:cNvPr id="238" name="rc238"/>
+            <p:cNvSpPr/>
+            <p:nvPr/>
+          </p:nvSpPr>
+          <p:spPr>
+            <a:xfrm>
+              <a:off x="6877017" y="4733166"/>
+              <a:ext cx="113872" cy="113872"/>
+            </a:xfrm>
+            <a:prstGeom prst="rect">
+              <a:avLst/>
+            </a:prstGeom>
+            <a:solidFill>
+              <a:srgbClr val="FFFFFF">
+                <a:alpha val="100000"/>
+              </a:srgbClr>
+            </a:solidFill>
+          </p:spPr>
+          <p:txBody>
+            <a:bodyPr/>
+            <a:lstStyle/>
+            <a:p/>
+          </p:txBody>
+        </p:sp>
+        <p:sp>
+          <p:nvSpPr>
+            <p:cNvPr id="239" name="pl239"/>
+            <p:cNvSpPr/>
+            <p:nvPr/>
+          </p:nvSpPr>
+          <p:spPr>
+            <a:xfrm>
+              <a:off x="6888404" y="4790102"/>
+              <a:ext cx="91098" cy="0"/>
+            </a:xfrm>
+            <a:custGeom>
+              <a:avLst/>
+              <a:pathLst>
+                <a:path w="91098" h="0">
+                  <a:moveTo>
+                    <a:pt x="0" y="0"/>
+                  </a:moveTo>
+                  <a:lnTo>
+                    <a:pt x="91098" y="0"/>
+                  </a:lnTo>
+                </a:path>
+              </a:pathLst>
+            </a:custGeom>
+            <a:ln w="17615" cap="flat">
+              <a:solidFill>
+                <a:srgbClr val="999999">
+                  <a:alpha val="100000"/>
+                </a:srgbClr>
+              </a:solidFill>
+              <a:prstDash val="solid"/>
+              <a:round/>
+            </a:ln>
+          </p:spPr>
+          <p:txBody>
+            <a:bodyPr/>
+            <a:lstStyle/>
+            <a:p/>
+          </p:txBody>
+        </p:sp>
+        <p:sp>
+          <p:nvSpPr>
+            <p:cNvPr id="240" name="pt240"/>
+            <p:cNvSpPr/>
+            <p:nvPr/>
+          </p:nvSpPr>
+          <p:spPr>
+            <a:xfrm>
+              <a:off x="6902761" y="4758910"/>
+              <a:ext cx="62384" cy="62384"/>
+            </a:xfrm>
+            <a:prstGeom prst="ellipse">
+              <a:avLst/>
+            </a:prstGeom>
+            <a:solidFill>
+              <a:srgbClr val="999999">
+                <a:alpha val="100000"/>
+              </a:srgbClr>
+            </a:solidFill>
+            <a:ln w="8181" cap="rnd">
+              <a:solidFill>
+                <a:srgbClr val="999999">
+                  <a:alpha val="100000"/>
+                </a:srgbClr>
+              </a:solidFill>
+              <a:prstDash val="solid"/>
+              <a:round/>
+            </a:ln>
+          </p:spPr>
+          <p:txBody>
+            <a:bodyPr/>
+            <a:lstStyle/>
+            <a:p/>
+          </p:txBody>
+        </p:sp>
+        <p:sp>
+          <p:nvSpPr>
+            <p:cNvPr id="241" name="rc241"/>
+            <p:cNvSpPr/>
+            <p:nvPr/>
+          </p:nvSpPr>
+          <p:spPr>
+            <a:xfrm>
+              <a:off x="6877017" y="4847039"/>
+              <a:ext cx="113872" cy="113872"/>
+            </a:xfrm>
+            <a:prstGeom prst="rect">
+              <a:avLst/>
+            </a:prstGeom>
+            <a:solidFill>
+              <a:srgbClr val="FFFFFF">
+                <a:alpha val="100000"/>
+              </a:srgbClr>
+            </a:solidFill>
+          </p:spPr>
+          <p:txBody>
+            <a:bodyPr/>
+            <a:lstStyle/>
+            <a:p/>
+          </p:txBody>
+        </p:sp>
+        <p:sp>
+          <p:nvSpPr>
+            <p:cNvPr id="242" name="pl242"/>
+            <p:cNvSpPr/>
+            <p:nvPr/>
+          </p:nvSpPr>
+          <p:spPr>
+            <a:xfrm>
+              <a:off x="6888404" y="4903975"/>
+              <a:ext cx="91098" cy="0"/>
+            </a:xfrm>
+            <a:custGeom>
+              <a:avLst/>
+              <a:pathLst>
+                <a:path w="91098" h="0">
+                  <a:moveTo>
+                    <a:pt x="0" y="0"/>
+                  </a:moveTo>
+                  <a:lnTo>
+                    <a:pt x="91098" y="0"/>
+                  </a:lnTo>
+                </a:path>
+              </a:pathLst>
+            </a:custGeom>
+            <a:ln w="17615" cap="flat">
+              <a:solidFill>
+                <a:srgbClr val="CC79A7">
+                  <a:alpha val="100000"/>
+                </a:srgbClr>
+              </a:solidFill>
+              <a:prstDash val="solid"/>
+              <a:round/>
+            </a:ln>
+          </p:spPr>
+          <p:txBody>
+            <a:bodyPr/>
+            <a:lstStyle/>
+            <a:p/>
+          </p:txBody>
+        </p:sp>
+        <p:sp>
+          <p:nvSpPr>
+            <p:cNvPr id="243" name="pt243"/>
+            <p:cNvSpPr/>
+            <p:nvPr/>
+          </p:nvSpPr>
+          <p:spPr>
+            <a:xfrm>
+              <a:off x="6902761" y="4872783"/>
+              <a:ext cx="62384" cy="62384"/>
+            </a:xfrm>
+            <a:prstGeom prst="ellipse">
+              <a:avLst/>
+            </a:prstGeom>
+            <a:solidFill>
+              <a:srgbClr val="CC79A7">
+                <a:alpha val="100000"/>
+              </a:srgbClr>
+            </a:solidFill>
+            <a:ln w="8181" cap="rnd">
+              <a:solidFill>
+                <a:srgbClr val="CC79A7">
+                  <a:alpha val="100000"/>
+                </a:srgbClr>
+              </a:solidFill>
+              <a:prstDash val="solid"/>
+              <a:round/>
+            </a:ln>
+          </p:spPr>
+          <p:txBody>
+            <a:bodyPr/>
+            <a:lstStyle/>
+            <a:p/>
+          </p:txBody>
+        </p:sp>
+        <p:sp>
+          <p:nvSpPr>
+            <p:cNvPr id="244" name="tx244"/>
+            <p:cNvSpPr/>
+            <p:nvPr/>
+          </p:nvSpPr>
+          <p:spPr>
+            <a:xfrm>
+              <a:off x="7054152" y="4521437"/>
+              <a:ext cx="645657" cy="81838"/>
             </a:xfrm>
             <a:prstGeom prst="rect">
               <a:avLst/>
@@ -10882,458 +11441,28 @@
               <a:r>
                 <a:rPr sz="900" i="0" b="0">
                   <a:solidFill>
-                    <a:srgbClr val="0D0D0D">
+                    <a:srgbClr val="000000">
                       <a:alpha val="100000"/>
                     </a:srgbClr>
                   </a:solidFill>
                   <a:latin typeface="Arial"/>
                   <a:cs typeface="Arial"/>
                 </a:rPr>
-                <a:t>Hazard ratio per 1 SD</a:t>
+                <a:t>Survey effort</a:t>
               </a:r>
             </a:p>
           </p:txBody>
         </p:sp>
         <p:sp>
           <p:nvSpPr>
-            <p:cNvPr id="229" name="rc229"/>
-            <p:cNvSpPr/>
-            <p:nvPr/>
-          </p:nvSpPr>
-          <p:spPr>
-            <a:xfrm>
-              <a:off x="8969137" y="5101676"/>
-              <a:ext cx="1284213" cy="569364"/>
-            </a:xfrm>
-            <a:prstGeom prst="rect">
-              <a:avLst/>
-            </a:prstGeom>
-            <a:solidFill>
-              <a:srgbClr val="FFFFFF">
-                <a:alpha val="100000"/>
-              </a:srgbClr>
-            </a:solidFill>
-          </p:spPr>
-          <p:txBody>
-            <a:bodyPr/>
-            <a:lstStyle/>
-            <a:p/>
-          </p:txBody>
-        </p:sp>
-        <p:sp>
-          <p:nvSpPr>
-            <p:cNvPr id="230" name="rc230"/>
-            <p:cNvSpPr/>
-            <p:nvPr/>
-          </p:nvSpPr>
-          <p:spPr>
-            <a:xfrm>
-              <a:off x="9026073" y="5158612"/>
-              <a:ext cx="113872" cy="113872"/>
-            </a:xfrm>
-            <a:prstGeom prst="rect">
-              <a:avLst/>
-            </a:prstGeom>
-            <a:solidFill>
-              <a:srgbClr val="FFFFFF">
-                <a:alpha val="100000"/>
-              </a:srgbClr>
-            </a:solidFill>
-          </p:spPr>
-          <p:txBody>
-            <a:bodyPr/>
-            <a:lstStyle/>
-            <a:p/>
-          </p:txBody>
-        </p:sp>
-        <p:sp>
-          <p:nvSpPr>
-            <p:cNvPr id="231" name="pl231"/>
-            <p:cNvSpPr/>
-            <p:nvPr/>
-          </p:nvSpPr>
-          <p:spPr>
-            <a:xfrm>
-              <a:off x="9037461" y="5215549"/>
-              <a:ext cx="91098" cy="0"/>
-            </a:xfrm>
-            <a:custGeom>
-              <a:avLst/>
-              <a:pathLst>
-                <a:path w="91098" h="0">
-                  <a:moveTo>
-                    <a:pt x="0" y="0"/>
-                  </a:moveTo>
-                  <a:lnTo>
-                    <a:pt x="91098" y="0"/>
-                  </a:lnTo>
-                </a:path>
-              </a:pathLst>
-            </a:custGeom>
-            <a:ln w="17615" cap="flat">
-              <a:solidFill>
-                <a:srgbClr val="0072B2">
-                  <a:alpha val="100000"/>
-                </a:srgbClr>
-              </a:solidFill>
-              <a:prstDash val="solid"/>
-              <a:round/>
-            </a:ln>
-          </p:spPr>
-          <p:txBody>
-            <a:bodyPr/>
-            <a:lstStyle/>
-            <a:p/>
-          </p:txBody>
-        </p:sp>
-        <p:sp>
-          <p:nvSpPr>
-            <p:cNvPr id="232" name="pt232"/>
-            <p:cNvSpPr/>
-            <p:nvPr/>
-          </p:nvSpPr>
-          <p:spPr>
-            <a:xfrm>
-              <a:off x="9052227" y="5184766"/>
-              <a:ext cx="61566" cy="61566"/>
-            </a:xfrm>
-            <a:prstGeom prst="ellipse">
-              <a:avLst/>
-            </a:prstGeom>
-            <a:solidFill>
-              <a:srgbClr val="0072B2">
-                <a:alpha val="100000"/>
-              </a:srgbClr>
-            </a:solidFill>
-            <a:ln w="7363" cap="rnd">
-              <a:solidFill>
-                <a:srgbClr val="0072B2">
-                  <a:alpha val="100000"/>
-                </a:srgbClr>
-              </a:solidFill>
-              <a:prstDash val="solid"/>
-              <a:round/>
-            </a:ln>
-          </p:spPr>
-          <p:txBody>
-            <a:bodyPr/>
-            <a:lstStyle/>
-            <a:p/>
-          </p:txBody>
-        </p:sp>
-        <p:sp>
-          <p:nvSpPr>
-            <p:cNvPr id="233" name="rc233"/>
-            <p:cNvSpPr/>
-            <p:nvPr/>
-          </p:nvSpPr>
-          <p:spPr>
-            <a:xfrm>
-              <a:off x="9026073" y="5272485"/>
-              <a:ext cx="113872" cy="113872"/>
-            </a:xfrm>
-            <a:prstGeom prst="rect">
-              <a:avLst/>
-            </a:prstGeom>
-            <a:solidFill>
-              <a:srgbClr val="FFFFFF">
-                <a:alpha val="100000"/>
-              </a:srgbClr>
-            </a:solidFill>
-          </p:spPr>
-          <p:txBody>
-            <a:bodyPr/>
-            <a:lstStyle/>
-            <a:p/>
-          </p:txBody>
-        </p:sp>
-        <p:sp>
-          <p:nvSpPr>
-            <p:cNvPr id="234" name="pl234"/>
-            <p:cNvSpPr/>
-            <p:nvPr/>
-          </p:nvSpPr>
-          <p:spPr>
-            <a:xfrm>
-              <a:off x="9037461" y="5329422"/>
-              <a:ext cx="91098" cy="0"/>
-            </a:xfrm>
-            <a:custGeom>
-              <a:avLst/>
-              <a:pathLst>
-                <a:path w="91098" h="0">
-                  <a:moveTo>
-                    <a:pt x="0" y="0"/>
-                  </a:moveTo>
-                  <a:lnTo>
-                    <a:pt x="91098" y="0"/>
-                  </a:lnTo>
-                </a:path>
-              </a:pathLst>
-            </a:custGeom>
-            <a:ln w="17615" cap="flat">
-              <a:solidFill>
-                <a:srgbClr val="009E73">
-                  <a:alpha val="100000"/>
-                </a:srgbClr>
-              </a:solidFill>
-              <a:prstDash val="solid"/>
-              <a:round/>
-            </a:ln>
-          </p:spPr>
-          <p:txBody>
-            <a:bodyPr/>
-            <a:lstStyle/>
-            <a:p/>
-          </p:txBody>
-        </p:sp>
-        <p:sp>
-          <p:nvSpPr>
-            <p:cNvPr id="235" name="pt235"/>
-            <p:cNvSpPr/>
-            <p:nvPr/>
-          </p:nvSpPr>
-          <p:spPr>
-            <a:xfrm>
-              <a:off x="9052227" y="5298639"/>
-              <a:ext cx="61566" cy="61566"/>
-            </a:xfrm>
-            <a:prstGeom prst="ellipse">
-              <a:avLst/>
-            </a:prstGeom>
-            <a:solidFill>
-              <a:srgbClr val="009E73">
-                <a:alpha val="100000"/>
-              </a:srgbClr>
-            </a:solidFill>
-            <a:ln w="7363" cap="rnd">
-              <a:solidFill>
-                <a:srgbClr val="009E73">
-                  <a:alpha val="100000"/>
-                </a:srgbClr>
-              </a:solidFill>
-              <a:prstDash val="solid"/>
-              <a:round/>
-            </a:ln>
-          </p:spPr>
-          <p:txBody>
-            <a:bodyPr/>
-            <a:lstStyle/>
-            <a:p/>
-          </p:txBody>
-        </p:sp>
-        <p:sp>
-          <p:nvSpPr>
-            <p:cNvPr id="236" name="rc236"/>
-            <p:cNvSpPr/>
-            <p:nvPr/>
-          </p:nvSpPr>
-          <p:spPr>
-            <a:xfrm>
-              <a:off x="9026073" y="5386358"/>
-              <a:ext cx="113872" cy="113872"/>
-            </a:xfrm>
-            <a:prstGeom prst="rect">
-              <a:avLst/>
-            </a:prstGeom>
-            <a:solidFill>
-              <a:srgbClr val="FFFFFF">
-                <a:alpha val="100000"/>
-              </a:srgbClr>
-            </a:solidFill>
-          </p:spPr>
-          <p:txBody>
-            <a:bodyPr/>
-            <a:lstStyle/>
-            <a:p/>
-          </p:txBody>
-        </p:sp>
-        <p:sp>
-          <p:nvSpPr>
-            <p:cNvPr id="237" name="pl237"/>
-            <p:cNvSpPr/>
-            <p:nvPr/>
-          </p:nvSpPr>
-          <p:spPr>
-            <a:xfrm>
-              <a:off x="9037461" y="5443295"/>
-              <a:ext cx="91098" cy="0"/>
-            </a:xfrm>
-            <a:custGeom>
-              <a:avLst/>
-              <a:pathLst>
-                <a:path w="91098" h="0">
-                  <a:moveTo>
-                    <a:pt x="0" y="0"/>
-                  </a:moveTo>
-                  <a:lnTo>
-                    <a:pt x="91098" y="0"/>
-                  </a:lnTo>
-                </a:path>
-              </a:pathLst>
-            </a:custGeom>
-            <a:ln w="17615" cap="flat">
-              <a:solidFill>
-                <a:srgbClr val="999999">
-                  <a:alpha val="100000"/>
-                </a:srgbClr>
-              </a:solidFill>
-              <a:prstDash val="solid"/>
-              <a:round/>
-            </a:ln>
-          </p:spPr>
-          <p:txBody>
-            <a:bodyPr/>
-            <a:lstStyle/>
-            <a:p/>
-          </p:txBody>
-        </p:sp>
-        <p:sp>
-          <p:nvSpPr>
-            <p:cNvPr id="238" name="pt238"/>
-            <p:cNvSpPr/>
-            <p:nvPr/>
-          </p:nvSpPr>
-          <p:spPr>
-            <a:xfrm>
-              <a:off x="9052227" y="5412512"/>
-              <a:ext cx="61566" cy="61566"/>
-            </a:xfrm>
-            <a:prstGeom prst="ellipse">
-              <a:avLst/>
-            </a:prstGeom>
-            <a:solidFill>
-              <a:srgbClr val="999999">
-                <a:alpha val="100000"/>
-              </a:srgbClr>
-            </a:solidFill>
-            <a:ln w="7363" cap="rnd">
-              <a:solidFill>
-                <a:srgbClr val="999999">
-                  <a:alpha val="100000"/>
-                </a:srgbClr>
-              </a:solidFill>
-              <a:prstDash val="solid"/>
-              <a:round/>
-            </a:ln>
-          </p:spPr>
-          <p:txBody>
-            <a:bodyPr/>
-            <a:lstStyle/>
-            <a:p/>
-          </p:txBody>
-        </p:sp>
-        <p:sp>
-          <p:nvSpPr>
-            <p:cNvPr id="239" name="rc239"/>
-            <p:cNvSpPr/>
-            <p:nvPr/>
-          </p:nvSpPr>
-          <p:spPr>
-            <a:xfrm>
-              <a:off x="9026073" y="5500231"/>
-              <a:ext cx="113872" cy="113872"/>
-            </a:xfrm>
-            <a:prstGeom prst="rect">
-              <a:avLst/>
-            </a:prstGeom>
-            <a:solidFill>
-              <a:srgbClr val="FFFFFF">
-                <a:alpha val="100000"/>
-              </a:srgbClr>
-            </a:solidFill>
-          </p:spPr>
-          <p:txBody>
-            <a:bodyPr/>
-            <a:lstStyle/>
-            <a:p/>
-          </p:txBody>
-        </p:sp>
-        <p:sp>
-          <p:nvSpPr>
-            <p:cNvPr id="240" name="pl240"/>
-            <p:cNvSpPr/>
-            <p:nvPr/>
-          </p:nvSpPr>
-          <p:spPr>
-            <a:xfrm>
-              <a:off x="9037461" y="5557168"/>
-              <a:ext cx="91098" cy="0"/>
-            </a:xfrm>
-            <a:custGeom>
-              <a:avLst/>
-              <a:pathLst>
-                <a:path w="91098" h="0">
-                  <a:moveTo>
-                    <a:pt x="0" y="0"/>
-                  </a:moveTo>
-                  <a:lnTo>
-                    <a:pt x="91098" y="0"/>
-                  </a:lnTo>
-                </a:path>
-              </a:pathLst>
-            </a:custGeom>
-            <a:ln w="17615" cap="flat">
-              <a:solidFill>
-                <a:srgbClr val="CC79A7">
-                  <a:alpha val="100000"/>
-                </a:srgbClr>
-              </a:solidFill>
-              <a:prstDash val="solid"/>
-              <a:round/>
-            </a:ln>
-          </p:spPr>
-          <p:txBody>
-            <a:bodyPr/>
-            <a:lstStyle/>
-            <a:p/>
-          </p:txBody>
-        </p:sp>
-        <p:sp>
-          <p:nvSpPr>
-            <p:cNvPr id="241" name="pt241"/>
-            <p:cNvSpPr/>
-            <p:nvPr/>
-          </p:nvSpPr>
-          <p:spPr>
-            <a:xfrm>
-              <a:off x="9052227" y="5526385"/>
-              <a:ext cx="61566" cy="61566"/>
-            </a:xfrm>
-            <a:prstGeom prst="ellipse">
-              <a:avLst/>
-            </a:prstGeom>
-            <a:solidFill>
-              <a:srgbClr val="CC79A7">
-                <a:alpha val="100000"/>
-              </a:srgbClr>
-            </a:solidFill>
-            <a:ln w="7363" cap="rnd">
-              <a:solidFill>
-                <a:srgbClr val="CC79A7">
-                  <a:alpha val="100000"/>
-                </a:srgbClr>
-              </a:solidFill>
-              <a:prstDash val="solid"/>
-              <a:round/>
-            </a:ln>
-          </p:spPr>
-          <p:txBody>
-            <a:bodyPr/>
-            <a:lstStyle/>
-            <a:p/>
-          </p:txBody>
-        </p:sp>
-        <p:sp>
-          <p:nvSpPr>
-            <p:cNvPr id="242" name="tx242"/>
-            <p:cNvSpPr/>
-            <p:nvPr/>
-          </p:nvSpPr>
-          <p:spPr>
-            <a:xfrm>
-              <a:off x="9196883" y="5179156"/>
-              <a:ext cx="574334" cy="72786"/>
+            <p:cNvPr id="245" name="tx245"/>
+            <p:cNvSpPr/>
+            <p:nvPr/>
+          </p:nvSpPr>
+          <p:spPr>
+            <a:xfrm>
+              <a:off x="7054152" y="4635310"/>
+              <a:ext cx="1124254" cy="81838"/>
             </a:xfrm>
             <a:prstGeom prst="rect">
               <a:avLst/>
@@ -11353,50 +11482,7 @@
                 </a:spcAft>
               </a:pPr>
               <a:r>
-                <a:rPr sz="800" i="0" b="0">
-                  <a:solidFill>
-                    <a:srgbClr val="000000">
-                      <a:alpha val="100000"/>
-                    </a:srgbClr>
-                  </a:solidFill>
-                  <a:latin typeface="Arial"/>
-                  <a:cs typeface="Arial"/>
-                </a:rPr>
-                <a:t>Survey effort</a:t>
-              </a:r>
-            </a:p>
-          </p:txBody>
-        </p:sp>
-        <p:sp>
-          <p:nvSpPr>
-            <p:cNvPr id="243" name="tx243"/>
-            <p:cNvSpPr/>
-            <p:nvPr/>
-          </p:nvSpPr>
-          <p:spPr>
-            <a:xfrm>
-              <a:off x="9196883" y="5293029"/>
-              <a:ext cx="999530" cy="72786"/>
-            </a:xfrm>
-            <a:prstGeom prst="rect">
-              <a:avLst/>
-            </a:prstGeom>
-            <a:noFill/>
-          </p:spPr>
-          <p:txBody>
-            <a:bodyPr lIns="0" rIns="0" tIns="0" bIns="0" anchorCtr="1" anchor="ctr" wrap="none"/>
-            <a:lstStyle/>
-            <a:p>
-              <a:pPr algn="l" marL="0" marR="0" indent="0">
-                <a:spcBef>
-                  <a:spcPts val="0"/>
-                </a:spcBef>
-                <a:spcAft>
-                  <a:spcPts val="0"/>
-                </a:spcAft>
-              </a:pPr>
-              <a:r>
-                <a:rPr sz="800" i="0" b="0">
+                <a:rPr sz="900" i="0" b="0">
                   <a:solidFill>
                     <a:srgbClr val="000000">
                       <a:alpha val="100000"/>
@@ -11412,14 +11498,14 @@
         </p:sp>
         <p:sp>
           <p:nvSpPr>
-            <p:cNvPr id="244" name="tx244"/>
-            <p:cNvSpPr/>
-            <p:nvPr/>
-          </p:nvSpPr>
-          <p:spPr>
-            <a:xfrm>
-              <a:off x="9196883" y="5406902"/>
-              <a:ext cx="768278" cy="72786"/>
+            <p:cNvPr id="246" name="tx246"/>
+            <p:cNvSpPr/>
+            <p:nvPr/>
+          </p:nvSpPr>
+          <p:spPr>
+            <a:xfrm>
+              <a:off x="7054152" y="4749183"/>
+              <a:ext cx="864016" cy="81838"/>
             </a:xfrm>
             <a:prstGeom prst="rect">
               <a:avLst/>
@@ -11439,7 +11525,7 @@
                 </a:spcAft>
               </a:pPr>
               <a:r>
-                <a:rPr sz="800" i="0" b="0">
+                <a:rPr sz="900" i="0" b="0">
                   <a:solidFill>
                     <a:srgbClr val="000000">
                       <a:alpha val="100000"/>
@@ -11455,14 +11541,14 @@
         </p:sp>
         <p:sp>
           <p:nvSpPr>
-            <p:cNvPr id="245" name="tx245"/>
-            <p:cNvSpPr/>
-            <p:nvPr/>
-          </p:nvSpPr>
-          <p:spPr>
-            <a:xfrm>
-              <a:off x="9196883" y="5520775"/>
-              <a:ext cx="739841" cy="72786"/>
+            <p:cNvPr id="247" name="tx247"/>
+            <p:cNvSpPr/>
+            <p:nvPr/>
+          </p:nvSpPr>
+          <p:spPr>
+            <a:xfrm>
+              <a:off x="7054152" y="4863056"/>
+              <a:ext cx="831829" cy="81838"/>
             </a:xfrm>
             <a:prstGeom prst="rect">
               <a:avLst/>
@@ -11482,7 +11568,7 @@
                 </a:spcAft>
               </a:pPr>
               <a:r>
-                <a:rPr sz="800" i="0" b="0">
+                <a:rPr sz="900" i="0" b="0">
                   <a:solidFill>
                     <a:srgbClr val="000000">
                       <a:alpha val="100000"/>
@@ -11498,14 +11584,14 @@
         </p:sp>
         <p:sp>
           <p:nvSpPr>
-            <p:cNvPr id="246" name="tx246"/>
-            <p:cNvSpPr/>
-            <p:nvPr/>
-          </p:nvSpPr>
-          <p:spPr>
-            <a:xfrm>
-              <a:off x="691444" y="3951292"/>
-              <a:ext cx="4997927" cy="74432"/>
+            <p:cNvPr id="248" name="tx248"/>
+            <p:cNvSpPr/>
+            <p:nvPr/>
+          </p:nvSpPr>
+          <p:spPr>
+            <a:xfrm>
+              <a:off x="729470" y="3556480"/>
+              <a:ext cx="5611032" cy="83576"/>
             </a:xfrm>
             <a:prstGeom prst="rect">
               <a:avLst/>
@@ -11525,7 +11611,7 @@
                 </a:spcAft>
               </a:pPr>
               <a:r>
-                <a:rPr sz="819" i="0" b="0">
+                <a:rPr sz="919" i="0" b="0">
                   <a:solidFill>
                     <a:srgbClr val="4D4D4D">
                       <a:alpha val="100000"/>
@@ -11541,13 +11627,13 @@
         </p:sp>
         <p:sp>
           <p:nvSpPr>
-            <p:cNvPr id="247" name="tx247"/>
-            <p:cNvSpPr/>
-            <p:nvPr/>
-          </p:nvSpPr>
-          <p:spPr>
-            <a:xfrm>
-              <a:off x="691444" y="3776672"/>
+            <p:cNvPr id="249" name="tx249"/>
+            <p:cNvSpPr/>
+            <p:nvPr/>
+          </p:nvSpPr>
+          <p:spPr>
+            <a:xfrm>
+              <a:off x="729470" y="3375534"/>
               <a:ext cx="2548524" cy="90982"/>
             </a:xfrm>
             <a:prstGeom prst="rect">
@@ -11584,14 +11670,14 @@
         </p:sp>
         <p:sp>
           <p:nvSpPr>
-            <p:cNvPr id="248" name="tx248"/>
-            <p:cNvSpPr/>
-            <p:nvPr/>
-          </p:nvSpPr>
-          <p:spPr>
-            <a:xfrm>
-              <a:off x="360805" y="3767492"/>
-              <a:ext cx="84764" cy="109179"/>
+            <p:cNvPr id="250" name="tx250"/>
+            <p:cNvSpPr/>
+            <p:nvPr/>
+          </p:nvSpPr>
+          <p:spPr>
+            <a:xfrm>
+              <a:off x="347226" y="3354128"/>
+              <a:ext cx="91805" cy="118231"/>
             </a:xfrm>
             <a:prstGeom prst="rect">
               <a:avLst/>
@@ -11611,7 +11697,7 @@
                 </a:spcAft>
               </a:pPr>
               <a:r>
-                <a:rPr sz="1200" i="0" b="1">
+                <a:rPr sz="1300" i="0" b="1">
                   <a:solidFill>
                     <a:srgbClr val="000000">
                       <a:alpha val="100000"/>

--- a/figures/Fig2_dating_correction_v2.pptx
+++ b/figures/Fig2_dating_correction_v2.pptx
@@ -8577,7 +8577,7 @@
           </p:nvSpPr>
           <p:spPr>
             <a:xfrm>
-              <a:off x="729470" y="5353405"/>
+              <a:off x="729470" y="5722010"/>
               <a:ext cx="5957758" cy="0"/>
             </a:xfrm>
             <a:custGeom>
@@ -8620,7 +8620,7 @@
           </p:nvSpPr>
           <p:spPr>
             <a:xfrm>
-              <a:off x="729470" y="4963860"/>
+              <a:off x="729470" y="5336706"/>
               <a:ext cx="5957758" cy="0"/>
             </a:xfrm>
             <a:custGeom>
@@ -8663,7 +8663,7 @@
           </p:nvSpPr>
           <p:spPr>
             <a:xfrm>
-              <a:off x="729470" y="4574315"/>
+              <a:off x="729470" y="4951401"/>
               <a:ext cx="5957758" cy="0"/>
             </a:xfrm>
             <a:custGeom>
@@ -8706,7 +8706,7 @@
           </p:nvSpPr>
           <p:spPr>
             <a:xfrm>
-              <a:off x="729470" y="4184770"/>
+              <a:off x="729470" y="4566096"/>
               <a:ext cx="5957758" cy="0"/>
             </a:xfrm>
             <a:custGeom>
@@ -8749,7 +8749,7 @@
           </p:nvSpPr>
           <p:spPr>
             <a:xfrm>
-              <a:off x="729470" y="3795225"/>
+              <a:off x="729470" y="4180791"/>
               <a:ext cx="5957758" cy="0"/>
             </a:xfrm>
             <a:custGeom>
@@ -8792,7 +8792,7 @@
           </p:nvSpPr>
           <p:spPr>
             <a:xfrm>
-              <a:off x="729470" y="5353405"/>
+              <a:off x="729470" y="3795487"/>
               <a:ext cx="5957758" cy="0"/>
             </a:xfrm>
             <a:custGeom>
@@ -8811,13 +8811,13 @@
                 </a:path>
               </a:pathLst>
             </a:custGeom>
-            <a:ln w="9485" cap="flat">
-              <a:solidFill>
-                <a:srgbClr val="8C8C8C">
-                  <a:alpha val="100000"/>
-                </a:srgbClr>
-              </a:solidFill>
-              <a:prstDash val="dash"/>
+            <a:ln w="6775" cap="flat">
+              <a:solidFill>
+                <a:srgbClr val="EBEBEB">
+                  <a:alpha val="100000"/>
+                </a:srgbClr>
+              </a:solidFill>
+              <a:prstDash val="solid"/>
               <a:round/>
             </a:ln>
           </p:spPr>
@@ -8835,30 +8835,73 @@
           </p:nvSpPr>
           <p:spPr>
             <a:xfrm>
-              <a:off x="1306027" y="3819302"/>
-              <a:ext cx="4804644" cy="1014853"/>
+              <a:off x="729470" y="5336706"/>
+              <a:ext cx="5957758" cy="0"/>
             </a:xfrm>
             <a:custGeom>
               <a:avLst/>
               <a:pathLst>
-                <a:path w="4804644" h="1014853">
+                <a:path w="5957758" h="0">
                   <a:moveTo>
                     <a:pt x="0" y="0"/>
                   </a:moveTo>
                   <a:lnTo>
-                    <a:pt x="960928" y="939883"/>
-                  </a:lnTo>
-                  <a:lnTo>
-                    <a:pt x="1921857" y="1014853"/>
-                  </a:lnTo>
-                  <a:lnTo>
-                    <a:pt x="2882786" y="971338"/>
-                  </a:lnTo>
-                  <a:lnTo>
-                    <a:pt x="3843715" y="661591"/>
-                  </a:lnTo>
-                  <a:lnTo>
-                    <a:pt x="4804644" y="747578"/>
+                    <a:pt x="5957758" y="0"/>
+                  </a:lnTo>
+                  <a:lnTo>
+                    <a:pt x="5957758" y="0"/>
+                  </a:lnTo>
+                </a:path>
+              </a:pathLst>
+            </a:custGeom>
+            <a:ln w="9485" cap="flat">
+              <a:solidFill>
+                <a:srgbClr val="8C8C8C">
+                  <a:alpha val="100000"/>
+                </a:srgbClr>
+              </a:solidFill>
+              <a:prstDash val="dash"/>
+              <a:round/>
+            </a:ln>
+          </p:spPr>
+          <p:txBody>
+            <a:bodyPr/>
+            <a:lstStyle/>
+            <a:p/>
+          </p:txBody>
+        </p:sp>
+        <p:sp>
+          <p:nvSpPr>
+            <p:cNvPr id="177" name="pl177"/>
+            <p:cNvSpPr/>
+            <p:nvPr/>
+          </p:nvSpPr>
+          <p:spPr>
+            <a:xfrm>
+              <a:off x="1306027" y="3819302"/>
+              <a:ext cx="4804644" cy="995421"/>
+            </a:xfrm>
+            <a:custGeom>
+              <a:avLst/>
+              <a:pathLst>
+                <a:path w="4804644" h="995421">
+                  <a:moveTo>
+                    <a:pt x="0" y="0"/>
+                  </a:moveTo>
+                  <a:lnTo>
+                    <a:pt x="960928" y="921853"/>
+                  </a:lnTo>
+                  <a:lnTo>
+                    <a:pt x="1921857" y="995421"/>
+                  </a:lnTo>
+                  <a:lnTo>
+                    <a:pt x="2882786" y="939313"/>
+                  </a:lnTo>
+                  <a:lnTo>
+                    <a:pt x="3843715" y="616823"/>
+                  </a:lnTo>
+                  <a:lnTo>
+                    <a:pt x="4804644" y="690268"/>
                   </a:lnTo>
                 </a:path>
               </a:pathLst>
@@ -8881,36 +8924,36 @@
         </p:sp>
         <p:sp>
           <p:nvSpPr>
-            <p:cNvPr id="177" name="pl177"/>
-            <p:cNvSpPr/>
-            <p:nvPr/>
-          </p:nvSpPr>
-          <p:spPr>
-            <a:xfrm>
-              <a:off x="1306027" y="4502484"/>
-              <a:ext cx="4804644" cy="146531"/>
+            <p:cNvPr id="178" name="pl178"/>
+            <p:cNvSpPr/>
+            <p:nvPr/>
+          </p:nvSpPr>
+          <p:spPr>
+            <a:xfrm>
+              <a:off x="1306027" y="4489839"/>
+              <a:ext cx="4804644" cy="144128"/>
             </a:xfrm>
             <a:custGeom>
               <a:avLst/>
               <a:pathLst>
-                <a:path w="4804644" h="146531">
+                <a:path w="4804644" h="144128">
                   <a:moveTo>
-                    <a:pt x="0" y="83575"/>
+                    <a:pt x="0" y="87874"/>
                   </a:moveTo>
                   <a:lnTo>
                     <a:pt x="960928" y="0"/>
                   </a:lnTo>
                   <a:lnTo>
-                    <a:pt x="1921857" y="8712"/>
-                  </a:lnTo>
-                  <a:lnTo>
-                    <a:pt x="2882786" y="10081"/>
-                  </a:lnTo>
-                  <a:lnTo>
-                    <a:pt x="3843715" y="17203"/>
-                  </a:lnTo>
-                  <a:lnTo>
-                    <a:pt x="4804644" y="146531"/>
+                    <a:pt x="1921857" y="9375"/>
+                  </a:lnTo>
+                  <a:lnTo>
+                    <a:pt x="2882786" y="10512"/>
+                  </a:lnTo>
+                  <a:lnTo>
+                    <a:pt x="3843715" y="17563"/>
+                  </a:lnTo>
+                  <a:lnTo>
+                    <a:pt x="4804644" y="144128"/>
                   </a:lnTo>
                 </a:path>
               </a:pathLst>
@@ -8933,33 +8976,33 @@
         </p:sp>
         <p:sp>
           <p:nvSpPr>
-            <p:cNvPr id="178" name="pl178"/>
-            <p:cNvSpPr/>
-            <p:nvPr/>
-          </p:nvSpPr>
-          <p:spPr>
-            <a:xfrm>
-              <a:off x="1306027" y="5362958"/>
-              <a:ext cx="4804644" cy="282000"/>
+            <p:cNvPr id="179" name="pl179"/>
+            <p:cNvSpPr/>
+            <p:nvPr/>
+          </p:nvSpPr>
+          <p:spPr>
+            <a:xfrm>
+              <a:off x="1306027" y="5347243"/>
+              <a:ext cx="4804644" cy="277840"/>
             </a:xfrm>
             <a:custGeom>
               <a:avLst/>
               <a:pathLst>
-                <a:path w="4804644" h="282000">
+                <a:path w="4804644" h="277840">
                   <a:moveTo>
-                    <a:pt x="0" y="282000"/>
+                    <a:pt x="0" y="277840"/>
                   </a:moveTo>
                   <a:lnTo>
-                    <a:pt x="960928" y="46704"/>
-                  </a:lnTo>
-                  <a:lnTo>
-                    <a:pt x="1921857" y="71354"/>
-                  </a:lnTo>
-                  <a:lnTo>
-                    <a:pt x="2882786" y="71690"/>
-                  </a:lnTo>
-                  <a:lnTo>
-                    <a:pt x="3843715" y="65331"/>
+                    <a:pt x="960928" y="45564"/>
+                  </a:lnTo>
+                  <a:lnTo>
+                    <a:pt x="1921857" y="70104"/>
+                  </a:lnTo>
+                  <a:lnTo>
+                    <a:pt x="2882786" y="70605"/>
+                  </a:lnTo>
+                  <a:lnTo>
+                    <a:pt x="3843715" y="64719"/>
                   </a:lnTo>
                   <a:lnTo>
                     <a:pt x="4804644" y="0"/>
@@ -8985,36 +9028,36 @@
         </p:sp>
         <p:sp>
           <p:nvSpPr>
-            <p:cNvPr id="179" name="pl179"/>
-            <p:cNvSpPr/>
-            <p:nvPr/>
-          </p:nvSpPr>
-          <p:spPr>
-            <a:xfrm>
-              <a:off x="1306027" y="5595051"/>
-              <a:ext cx="4804644" cy="51977"/>
+            <p:cNvPr id="180" name="pl180"/>
+            <p:cNvSpPr/>
+            <p:nvPr/>
+          </p:nvSpPr>
+          <p:spPr>
+            <a:xfrm>
+              <a:off x="1306027" y="5575721"/>
+              <a:ext cx="4804644" cy="71308"/>
             </a:xfrm>
             <a:custGeom>
               <a:avLst/>
               <a:pathLst>
-                <a:path w="4804644" h="51977">
+                <a:path w="4804644" h="71308">
                   <a:moveTo>
                     <a:pt x="0" y="0"/>
                   </a:moveTo>
                   <a:lnTo>
-                    <a:pt x="960928" y="33248"/>
-                  </a:lnTo>
-                  <a:lnTo>
-                    <a:pt x="1921857" y="24285"/>
-                  </a:lnTo>
-                  <a:lnTo>
-                    <a:pt x="2882786" y="25380"/>
-                  </a:lnTo>
-                  <a:lnTo>
-                    <a:pt x="3843715" y="26307"/>
-                  </a:lnTo>
-                  <a:lnTo>
-                    <a:pt x="4804644" y="51977"/>
+                    <a:pt x="960928" y="46780"/>
+                  </a:lnTo>
+                  <a:lnTo>
+                    <a:pt x="1921857" y="38646"/>
+                  </a:lnTo>
+                  <a:lnTo>
+                    <a:pt x="2882786" y="39031"/>
+                  </a:lnTo>
+                  <a:lnTo>
+                    <a:pt x="3843715" y="41582"/>
+                  </a:lnTo>
+                  <a:lnTo>
+                    <a:pt x="4804644" y="71308"/>
                   </a:lnTo>
                 </a:path>
               </a:pathLst>
@@ -9037,7 +9080,7 @@
         </p:sp>
         <p:sp>
           <p:nvSpPr>
-            <p:cNvPr id="180" name="pt180"/>
+            <p:cNvPr id="181" name="pt181"/>
             <p:cNvSpPr/>
             <p:nvPr/>
           </p:nvSpPr>
@@ -9072,13 +9115,13 @@
         </p:sp>
         <p:sp>
           <p:nvSpPr>
-            <p:cNvPr id="181" name="pt181"/>
-            <p:cNvSpPr/>
-            <p:nvPr/>
-          </p:nvSpPr>
-          <p:spPr>
-            <a:xfrm>
-              <a:off x="2235764" y="4727993"/>
+            <p:cNvPr id="182" name="pt182"/>
+            <p:cNvSpPr/>
+            <p:nvPr/>
+          </p:nvSpPr>
+          <p:spPr>
+            <a:xfrm>
+              <a:off x="2235764" y="4709963"/>
               <a:ext cx="62384" cy="62384"/>
             </a:xfrm>
             <a:prstGeom prst="ellipse">
@@ -9107,13 +9150,13 @@
         </p:sp>
         <p:sp>
           <p:nvSpPr>
-            <p:cNvPr id="182" name="pt182"/>
-            <p:cNvSpPr/>
-            <p:nvPr/>
-          </p:nvSpPr>
-          <p:spPr>
-            <a:xfrm>
-              <a:off x="3196693" y="4802964"/>
+            <p:cNvPr id="183" name="pt183"/>
+            <p:cNvSpPr/>
+            <p:nvPr/>
+          </p:nvSpPr>
+          <p:spPr>
+            <a:xfrm>
+              <a:off x="3196693" y="4783531"/>
               <a:ext cx="62384" cy="62384"/>
             </a:xfrm>
             <a:prstGeom prst="ellipse">
@@ -9142,13 +9185,13 @@
         </p:sp>
         <p:sp>
           <p:nvSpPr>
-            <p:cNvPr id="183" name="pt183"/>
-            <p:cNvSpPr/>
-            <p:nvPr/>
-          </p:nvSpPr>
-          <p:spPr>
-            <a:xfrm>
-              <a:off x="4157621" y="4759448"/>
+            <p:cNvPr id="184" name="pt184"/>
+            <p:cNvSpPr/>
+            <p:nvPr/>
+          </p:nvSpPr>
+          <p:spPr>
+            <a:xfrm>
+              <a:off x="4157621" y="4727424"/>
               <a:ext cx="62384" cy="62384"/>
             </a:xfrm>
             <a:prstGeom prst="ellipse">
@@ -9177,13 +9220,13 @@
         </p:sp>
         <p:sp>
           <p:nvSpPr>
-            <p:cNvPr id="184" name="pt184"/>
-            <p:cNvSpPr/>
-            <p:nvPr/>
-          </p:nvSpPr>
-          <p:spPr>
-            <a:xfrm>
-              <a:off x="5118550" y="4449701"/>
+            <p:cNvPr id="185" name="pt185"/>
+            <p:cNvSpPr/>
+            <p:nvPr/>
+          </p:nvSpPr>
+          <p:spPr>
+            <a:xfrm>
+              <a:off x="5118550" y="4404934"/>
               <a:ext cx="62384" cy="62384"/>
             </a:xfrm>
             <a:prstGeom prst="ellipse">
@@ -9212,13 +9255,13 @@
         </p:sp>
         <p:sp>
           <p:nvSpPr>
-            <p:cNvPr id="185" name="pt185"/>
-            <p:cNvSpPr/>
-            <p:nvPr/>
-          </p:nvSpPr>
-          <p:spPr>
-            <a:xfrm>
-              <a:off x="6079479" y="4535688"/>
+            <p:cNvPr id="186" name="pt186"/>
+            <p:cNvSpPr/>
+            <p:nvPr/>
+          </p:nvSpPr>
+          <p:spPr>
+            <a:xfrm>
+              <a:off x="6079479" y="4478379"/>
               <a:ext cx="62384" cy="62384"/>
             </a:xfrm>
             <a:prstGeom prst="ellipse">
@@ -9247,13 +9290,13 @@
         </p:sp>
         <p:sp>
           <p:nvSpPr>
-            <p:cNvPr id="186" name="pt186"/>
-            <p:cNvSpPr/>
-            <p:nvPr/>
-          </p:nvSpPr>
-          <p:spPr>
-            <a:xfrm>
-              <a:off x="1274835" y="4554867"/>
+            <p:cNvPr id="187" name="pt187"/>
+            <p:cNvSpPr/>
+            <p:nvPr/>
+          </p:nvSpPr>
+          <p:spPr>
+            <a:xfrm>
+              <a:off x="1274835" y="4546521"/>
               <a:ext cx="62384" cy="62384"/>
             </a:xfrm>
             <a:prstGeom prst="ellipse">
@@ -9282,13 +9325,13 @@
         </p:sp>
         <p:sp>
           <p:nvSpPr>
-            <p:cNvPr id="187" name="pt187"/>
-            <p:cNvSpPr/>
-            <p:nvPr/>
-          </p:nvSpPr>
-          <p:spPr>
-            <a:xfrm>
-              <a:off x="2235764" y="4471292"/>
+            <p:cNvPr id="188" name="pt188"/>
+            <p:cNvSpPr/>
+            <p:nvPr/>
+          </p:nvSpPr>
+          <p:spPr>
+            <a:xfrm>
+              <a:off x="2235764" y="4458646"/>
               <a:ext cx="62384" cy="62384"/>
             </a:xfrm>
             <a:prstGeom prst="ellipse">
@@ -9317,13 +9360,13 @@
         </p:sp>
         <p:sp>
           <p:nvSpPr>
-            <p:cNvPr id="188" name="pt188"/>
-            <p:cNvSpPr/>
-            <p:nvPr/>
-          </p:nvSpPr>
-          <p:spPr>
-            <a:xfrm>
-              <a:off x="3196693" y="4480004"/>
+            <p:cNvPr id="189" name="pt189"/>
+            <p:cNvSpPr/>
+            <p:nvPr/>
+          </p:nvSpPr>
+          <p:spPr>
+            <a:xfrm>
+              <a:off x="3196693" y="4468022"/>
               <a:ext cx="62384" cy="62384"/>
             </a:xfrm>
             <a:prstGeom prst="ellipse">
@@ -9352,13 +9395,13 @@
         </p:sp>
         <p:sp>
           <p:nvSpPr>
-            <p:cNvPr id="189" name="pt189"/>
-            <p:cNvSpPr/>
-            <p:nvPr/>
-          </p:nvSpPr>
-          <p:spPr>
-            <a:xfrm>
-              <a:off x="4157621" y="4481373"/>
+            <p:cNvPr id="190" name="pt190"/>
+            <p:cNvSpPr/>
+            <p:nvPr/>
+          </p:nvSpPr>
+          <p:spPr>
+            <a:xfrm>
+              <a:off x="4157621" y="4469159"/>
               <a:ext cx="62384" cy="62384"/>
             </a:xfrm>
             <a:prstGeom prst="ellipse">
@@ -9387,13 +9430,13 @@
         </p:sp>
         <p:sp>
           <p:nvSpPr>
-            <p:cNvPr id="190" name="pt190"/>
-            <p:cNvSpPr/>
-            <p:nvPr/>
-          </p:nvSpPr>
-          <p:spPr>
-            <a:xfrm>
-              <a:off x="5118550" y="4488495"/>
+            <p:cNvPr id="191" name="pt191"/>
+            <p:cNvSpPr/>
+            <p:nvPr/>
+          </p:nvSpPr>
+          <p:spPr>
+            <a:xfrm>
+              <a:off x="5118550" y="4476210"/>
               <a:ext cx="62384" cy="62384"/>
             </a:xfrm>
             <a:prstGeom prst="ellipse">
@@ -9422,13 +9465,13 @@
         </p:sp>
         <p:sp>
           <p:nvSpPr>
-            <p:cNvPr id="191" name="pt191"/>
-            <p:cNvSpPr/>
-            <p:nvPr/>
-          </p:nvSpPr>
-          <p:spPr>
-            <a:xfrm>
-              <a:off x="6079479" y="4617823"/>
+            <p:cNvPr id="192" name="pt192"/>
+            <p:cNvSpPr/>
+            <p:nvPr/>
+          </p:nvSpPr>
+          <p:spPr>
+            <a:xfrm>
+              <a:off x="6079479" y="4602775"/>
               <a:ext cx="62384" cy="62384"/>
             </a:xfrm>
             <a:prstGeom prst="ellipse">
@@ -9457,13 +9500,13 @@
         </p:sp>
         <p:sp>
           <p:nvSpPr>
-            <p:cNvPr id="192" name="pt192"/>
-            <p:cNvSpPr/>
-            <p:nvPr/>
-          </p:nvSpPr>
-          <p:spPr>
-            <a:xfrm>
-              <a:off x="1274835" y="5613766"/>
+            <p:cNvPr id="193" name="pt193"/>
+            <p:cNvSpPr/>
+            <p:nvPr/>
+          </p:nvSpPr>
+          <p:spPr>
+            <a:xfrm>
+              <a:off x="1274835" y="5593892"/>
               <a:ext cx="62384" cy="62384"/>
             </a:xfrm>
             <a:prstGeom prst="ellipse">
@@ -9492,13 +9535,13 @@
         </p:sp>
         <p:sp>
           <p:nvSpPr>
-            <p:cNvPr id="193" name="pt193"/>
-            <p:cNvSpPr/>
-            <p:nvPr/>
-          </p:nvSpPr>
-          <p:spPr>
-            <a:xfrm>
-              <a:off x="2235764" y="5378470"/>
+            <p:cNvPr id="194" name="pt194"/>
+            <p:cNvSpPr/>
+            <p:nvPr/>
+          </p:nvSpPr>
+          <p:spPr>
+            <a:xfrm>
+              <a:off x="2235764" y="5361616"/>
               <a:ext cx="62384" cy="62384"/>
             </a:xfrm>
             <a:prstGeom prst="ellipse">
@@ -9527,13 +9570,13 @@
         </p:sp>
         <p:sp>
           <p:nvSpPr>
-            <p:cNvPr id="194" name="pt194"/>
-            <p:cNvSpPr/>
-            <p:nvPr/>
-          </p:nvSpPr>
-          <p:spPr>
-            <a:xfrm>
-              <a:off x="3196693" y="5403119"/>
+            <p:cNvPr id="195" name="pt195"/>
+            <p:cNvSpPr/>
+            <p:nvPr/>
+          </p:nvSpPr>
+          <p:spPr>
+            <a:xfrm>
+              <a:off x="3196693" y="5386156"/>
               <a:ext cx="62384" cy="62384"/>
             </a:xfrm>
             <a:prstGeom prst="ellipse">
@@ -9562,13 +9605,13 @@
         </p:sp>
         <p:sp>
           <p:nvSpPr>
-            <p:cNvPr id="195" name="pt195"/>
-            <p:cNvSpPr/>
-            <p:nvPr/>
-          </p:nvSpPr>
-          <p:spPr>
-            <a:xfrm>
-              <a:off x="4157621" y="5403455"/>
+            <p:cNvPr id="196" name="pt196"/>
+            <p:cNvSpPr/>
+            <p:nvPr/>
+          </p:nvSpPr>
+          <p:spPr>
+            <a:xfrm>
+              <a:off x="4157621" y="5386656"/>
               <a:ext cx="62384" cy="62384"/>
             </a:xfrm>
             <a:prstGeom prst="ellipse">
@@ -9597,13 +9640,13 @@
         </p:sp>
         <p:sp>
           <p:nvSpPr>
-            <p:cNvPr id="196" name="pt196"/>
-            <p:cNvSpPr/>
-            <p:nvPr/>
-          </p:nvSpPr>
-          <p:spPr>
-            <a:xfrm>
-              <a:off x="5118550" y="5397097"/>
+            <p:cNvPr id="197" name="pt197"/>
+            <p:cNvSpPr/>
+            <p:nvPr/>
+          </p:nvSpPr>
+          <p:spPr>
+            <a:xfrm>
+              <a:off x="5118550" y="5380771"/>
               <a:ext cx="62384" cy="62384"/>
             </a:xfrm>
             <a:prstGeom prst="ellipse">
@@ -9632,13 +9675,13 @@
         </p:sp>
         <p:sp>
           <p:nvSpPr>
-            <p:cNvPr id="197" name="pt197"/>
-            <p:cNvSpPr/>
-            <p:nvPr/>
-          </p:nvSpPr>
-          <p:spPr>
-            <a:xfrm>
-              <a:off x="6079479" y="5331765"/>
+            <p:cNvPr id="198" name="pt198"/>
+            <p:cNvSpPr/>
+            <p:nvPr/>
+          </p:nvSpPr>
+          <p:spPr>
+            <a:xfrm>
+              <a:off x="6079479" y="5316051"/>
               <a:ext cx="62384" cy="62384"/>
             </a:xfrm>
             <a:prstGeom prst="ellipse">
@@ -9667,13 +9710,13 @@
         </p:sp>
         <p:sp>
           <p:nvSpPr>
-            <p:cNvPr id="198" name="pt198"/>
-            <p:cNvSpPr/>
-            <p:nvPr/>
-          </p:nvSpPr>
-          <p:spPr>
-            <a:xfrm>
-              <a:off x="1274835" y="5563859"/>
+            <p:cNvPr id="199" name="pt199"/>
+            <p:cNvSpPr/>
+            <p:nvPr/>
+          </p:nvSpPr>
+          <p:spPr>
+            <a:xfrm>
+              <a:off x="1274835" y="5544529"/>
               <a:ext cx="62384" cy="62384"/>
             </a:xfrm>
             <a:prstGeom prst="ellipse">
@@ -9702,13 +9745,13 @@
         </p:sp>
         <p:sp>
           <p:nvSpPr>
-            <p:cNvPr id="199" name="pt199"/>
-            <p:cNvSpPr/>
-            <p:nvPr/>
-          </p:nvSpPr>
-          <p:spPr>
-            <a:xfrm>
-              <a:off x="2235764" y="5597108"/>
+            <p:cNvPr id="200" name="pt200"/>
+            <p:cNvSpPr/>
+            <p:nvPr/>
+          </p:nvSpPr>
+          <p:spPr>
+            <a:xfrm>
+              <a:off x="2235764" y="5591309"/>
               <a:ext cx="62384" cy="62384"/>
             </a:xfrm>
             <a:prstGeom prst="ellipse">
@@ -9737,13 +9780,13 @@
         </p:sp>
         <p:sp>
           <p:nvSpPr>
-            <p:cNvPr id="200" name="pt200"/>
-            <p:cNvSpPr/>
-            <p:nvPr/>
-          </p:nvSpPr>
-          <p:spPr>
-            <a:xfrm>
-              <a:off x="3196693" y="5588145"/>
+            <p:cNvPr id="201" name="pt201"/>
+            <p:cNvSpPr/>
+            <p:nvPr/>
+          </p:nvSpPr>
+          <p:spPr>
+            <a:xfrm>
+              <a:off x="3196693" y="5583175"/>
               <a:ext cx="62384" cy="62384"/>
             </a:xfrm>
             <a:prstGeom prst="ellipse">
@@ -9772,13 +9815,13 @@
         </p:sp>
         <p:sp>
           <p:nvSpPr>
-            <p:cNvPr id="201" name="pt201"/>
-            <p:cNvSpPr/>
-            <p:nvPr/>
-          </p:nvSpPr>
-          <p:spPr>
-            <a:xfrm>
-              <a:off x="4157621" y="5589240"/>
+            <p:cNvPr id="202" name="pt202"/>
+            <p:cNvSpPr/>
+            <p:nvPr/>
+          </p:nvSpPr>
+          <p:spPr>
+            <a:xfrm>
+              <a:off x="4157621" y="5583560"/>
               <a:ext cx="62384" cy="62384"/>
             </a:xfrm>
             <a:prstGeom prst="ellipse">
@@ -9807,13 +9850,13 @@
         </p:sp>
         <p:sp>
           <p:nvSpPr>
-            <p:cNvPr id="202" name="pt202"/>
-            <p:cNvSpPr/>
-            <p:nvPr/>
-          </p:nvSpPr>
-          <p:spPr>
-            <a:xfrm>
-              <a:off x="5118550" y="5590167"/>
+            <p:cNvPr id="203" name="pt203"/>
+            <p:cNvSpPr/>
+            <p:nvPr/>
+          </p:nvSpPr>
+          <p:spPr>
+            <a:xfrm>
+              <a:off x="5118550" y="5586111"/>
               <a:ext cx="62384" cy="62384"/>
             </a:xfrm>
             <a:prstGeom prst="ellipse">
@@ -9842,7 +9885,7 @@
         </p:sp>
         <p:sp>
           <p:nvSpPr>
-            <p:cNvPr id="203" name="pt203"/>
+            <p:cNvPr id="204" name="pt204"/>
             <p:cNvSpPr/>
             <p:nvPr/>
           </p:nvSpPr>
@@ -9877,7 +9920,7 @@
         </p:sp>
         <p:sp>
           <p:nvSpPr>
-            <p:cNvPr id="204" name="rc204"/>
+            <p:cNvPr id="205" name="rc205"/>
             <p:cNvSpPr/>
             <p:nvPr/>
           </p:nvSpPr>
@@ -9903,13 +9946,13 @@
         </p:sp>
         <p:sp>
           <p:nvSpPr>
-            <p:cNvPr id="205" name="tx205"/>
-            <p:cNvSpPr/>
-            <p:nvPr/>
-          </p:nvSpPr>
-          <p:spPr>
-            <a:xfrm>
-              <a:off x="2064188" y="3914238"/>
+            <p:cNvPr id="206" name="tx206"/>
+            <p:cNvSpPr/>
+            <p:nvPr/>
+          </p:nvSpPr>
+          <p:spPr>
+            <a:xfrm>
+              <a:off x="2064188" y="3912804"/>
               <a:ext cx="405536" cy="73609"/>
             </a:xfrm>
             <a:prstGeom prst="rect">
@@ -9946,7 +9989,7 @@
         </p:sp>
         <p:sp>
           <p:nvSpPr>
-            <p:cNvPr id="206" name="pl206"/>
+            <p:cNvPr id="207" name="pl207"/>
             <p:cNvSpPr/>
             <p:nvPr/>
           </p:nvSpPr>
@@ -9986,13 +10029,56 @@
         </p:sp>
         <p:sp>
           <p:nvSpPr>
-            <p:cNvPr id="207" name="tx207"/>
-            <p:cNvSpPr/>
-            <p:nvPr/>
-          </p:nvSpPr>
-          <p:spPr>
-            <a:xfrm>
-              <a:off x="531259" y="5317012"/>
+            <p:cNvPr id="208" name="tx208"/>
+            <p:cNvSpPr/>
+            <p:nvPr/>
+          </p:nvSpPr>
+          <p:spPr>
+            <a:xfrm>
+              <a:off x="531259" y="5685617"/>
+              <a:ext cx="141274" cy="72786"/>
+            </a:xfrm>
+            <a:prstGeom prst="rect">
+              <a:avLst/>
+            </a:prstGeom>
+            <a:noFill/>
+          </p:spPr>
+          <p:txBody>
+            <a:bodyPr lIns="0" rIns="0" tIns="0" bIns="0" anchorCtr="1" anchor="ctr" wrap="none"/>
+            <a:lstStyle/>
+            <a:p>
+              <a:pPr algn="l" marL="0" marR="0" indent="0">
+                <a:spcBef>
+                  <a:spcPts val="0"/>
+                </a:spcBef>
+                <a:spcAft>
+                  <a:spcPts val="0"/>
+                </a:spcAft>
+              </a:pPr>
+              <a:r>
+                <a:rPr sz="800" i="0" b="0">
+                  <a:solidFill>
+                    <a:srgbClr val="262626">
+                      <a:alpha val="100000"/>
+                    </a:srgbClr>
+                  </a:solidFill>
+                  <a:latin typeface="Arial"/>
+                  <a:cs typeface="Arial"/>
+                </a:rPr>
+                <a:t>0.8</a:t>
+              </a:r>
+            </a:p>
+          </p:txBody>
+        </p:sp>
+        <p:sp>
+          <p:nvSpPr>
+            <p:cNvPr id="209" name="tx209"/>
+            <p:cNvSpPr/>
+            <p:nvPr/>
+          </p:nvSpPr>
+          <p:spPr>
+            <a:xfrm>
+              <a:off x="531259" y="5300312"/>
               <a:ext cx="141274" cy="72786"/>
             </a:xfrm>
             <a:prstGeom prst="rect">
@@ -10029,13 +10115,13 @@
         </p:sp>
         <p:sp>
           <p:nvSpPr>
-            <p:cNvPr id="208" name="tx208"/>
-            <p:cNvSpPr/>
-            <p:nvPr/>
-          </p:nvSpPr>
-          <p:spPr>
-            <a:xfrm>
-              <a:off x="531259" y="4927467"/>
+            <p:cNvPr id="210" name="tx210"/>
+            <p:cNvSpPr/>
+            <p:nvPr/>
+          </p:nvSpPr>
+          <p:spPr>
+            <a:xfrm>
+              <a:off x="531259" y="4915008"/>
               <a:ext cx="141274" cy="72786"/>
             </a:xfrm>
             <a:prstGeom prst="rect">
@@ -10072,13 +10158,13 @@
         </p:sp>
         <p:sp>
           <p:nvSpPr>
-            <p:cNvPr id="209" name="tx209"/>
-            <p:cNvSpPr/>
-            <p:nvPr/>
-          </p:nvSpPr>
-          <p:spPr>
-            <a:xfrm>
-              <a:off x="531259" y="4537922"/>
+            <p:cNvPr id="211" name="tx211"/>
+            <p:cNvSpPr/>
+            <p:nvPr/>
+          </p:nvSpPr>
+          <p:spPr>
+            <a:xfrm>
+              <a:off x="531259" y="4529703"/>
               <a:ext cx="141274" cy="72786"/>
             </a:xfrm>
             <a:prstGeom prst="rect">
@@ -10115,13 +10201,13 @@
         </p:sp>
         <p:sp>
           <p:nvSpPr>
-            <p:cNvPr id="210" name="tx210"/>
-            <p:cNvSpPr/>
-            <p:nvPr/>
-          </p:nvSpPr>
-          <p:spPr>
-            <a:xfrm>
-              <a:off x="531259" y="4148377"/>
+            <p:cNvPr id="212" name="tx212"/>
+            <p:cNvSpPr/>
+            <p:nvPr/>
+          </p:nvSpPr>
+          <p:spPr>
+            <a:xfrm>
+              <a:off x="531259" y="4144398"/>
               <a:ext cx="141274" cy="72786"/>
             </a:xfrm>
             <a:prstGeom prst="rect">
@@ -10158,13 +10244,13 @@
         </p:sp>
         <p:sp>
           <p:nvSpPr>
-            <p:cNvPr id="211" name="tx211"/>
-            <p:cNvSpPr/>
-            <p:nvPr/>
-          </p:nvSpPr>
-          <p:spPr>
-            <a:xfrm>
-              <a:off x="531259" y="3758832"/>
+            <p:cNvPr id="213" name="tx213"/>
+            <p:cNvSpPr/>
+            <p:nvPr/>
+          </p:nvSpPr>
+          <p:spPr>
+            <a:xfrm>
+              <a:off x="531259" y="3759094"/>
               <a:ext cx="141274" cy="72786"/>
             </a:xfrm>
             <a:prstGeom prst="rect">
@@ -10201,13 +10287,13 @@
         </p:sp>
         <p:sp>
           <p:nvSpPr>
-            <p:cNvPr id="212" name="pl212"/>
-            <p:cNvSpPr/>
-            <p:nvPr/>
-          </p:nvSpPr>
-          <p:spPr>
-            <a:xfrm>
-              <a:off x="697838" y="5353405"/>
+            <p:cNvPr id="214" name="pl214"/>
+            <p:cNvSpPr/>
+            <p:nvPr/>
+          </p:nvSpPr>
+          <p:spPr>
+            <a:xfrm>
+              <a:off x="697838" y="5722010"/>
               <a:ext cx="31631" cy="0"/>
             </a:xfrm>
             <a:custGeom>
@@ -10241,13 +10327,13 @@
         </p:sp>
         <p:sp>
           <p:nvSpPr>
-            <p:cNvPr id="213" name="pl213"/>
-            <p:cNvSpPr/>
-            <p:nvPr/>
-          </p:nvSpPr>
-          <p:spPr>
-            <a:xfrm>
-              <a:off x="697838" y="4963860"/>
+            <p:cNvPr id="215" name="pl215"/>
+            <p:cNvSpPr/>
+            <p:nvPr/>
+          </p:nvSpPr>
+          <p:spPr>
+            <a:xfrm>
+              <a:off x="697838" y="5336706"/>
               <a:ext cx="31631" cy="0"/>
             </a:xfrm>
             <a:custGeom>
@@ -10281,13 +10367,13 @@
         </p:sp>
         <p:sp>
           <p:nvSpPr>
-            <p:cNvPr id="214" name="pl214"/>
-            <p:cNvSpPr/>
-            <p:nvPr/>
-          </p:nvSpPr>
-          <p:spPr>
-            <a:xfrm>
-              <a:off x="697838" y="4574315"/>
+            <p:cNvPr id="216" name="pl216"/>
+            <p:cNvSpPr/>
+            <p:nvPr/>
+          </p:nvSpPr>
+          <p:spPr>
+            <a:xfrm>
+              <a:off x="697838" y="4951401"/>
               <a:ext cx="31631" cy="0"/>
             </a:xfrm>
             <a:custGeom>
@@ -10321,13 +10407,13 @@
         </p:sp>
         <p:sp>
           <p:nvSpPr>
-            <p:cNvPr id="215" name="pl215"/>
-            <p:cNvSpPr/>
-            <p:nvPr/>
-          </p:nvSpPr>
-          <p:spPr>
-            <a:xfrm>
-              <a:off x="697838" y="4184770"/>
+            <p:cNvPr id="217" name="pl217"/>
+            <p:cNvSpPr/>
+            <p:nvPr/>
+          </p:nvSpPr>
+          <p:spPr>
+            <a:xfrm>
+              <a:off x="697838" y="4566096"/>
               <a:ext cx="31631" cy="0"/>
             </a:xfrm>
             <a:custGeom>
@@ -10361,13 +10447,13 @@
         </p:sp>
         <p:sp>
           <p:nvSpPr>
-            <p:cNvPr id="216" name="pl216"/>
-            <p:cNvSpPr/>
-            <p:nvPr/>
-          </p:nvSpPr>
-          <p:spPr>
-            <a:xfrm>
-              <a:off x="697838" y="3795225"/>
+            <p:cNvPr id="218" name="pl218"/>
+            <p:cNvSpPr/>
+            <p:nvPr/>
+          </p:nvSpPr>
+          <p:spPr>
+            <a:xfrm>
+              <a:off x="697838" y="4180791"/>
               <a:ext cx="31631" cy="0"/>
             </a:xfrm>
             <a:custGeom>
@@ -10401,7 +10487,47 @@
         </p:sp>
         <p:sp>
           <p:nvSpPr>
-            <p:cNvPr id="217" name="pl217"/>
+            <p:cNvPr id="219" name="pl219"/>
+            <p:cNvSpPr/>
+            <p:nvPr/>
+          </p:nvSpPr>
+          <p:spPr>
+            <a:xfrm>
+              <a:off x="697838" y="3795487"/>
+              <a:ext cx="31631" cy="0"/>
+            </a:xfrm>
+            <a:custGeom>
+              <a:avLst/>
+              <a:pathLst>
+                <a:path w="31631" h="0">
+                  <a:moveTo>
+                    <a:pt x="0" y="0"/>
+                  </a:moveTo>
+                  <a:lnTo>
+                    <a:pt x="31631" y="0"/>
+                  </a:lnTo>
+                </a:path>
+              </a:pathLst>
+            </a:custGeom>
+            <a:ln w="8130" cap="flat">
+              <a:solidFill>
+                <a:srgbClr val="333333">
+                  <a:alpha val="100000"/>
+                </a:srgbClr>
+              </a:solidFill>
+              <a:prstDash val="solid"/>
+              <a:round/>
+            </a:ln>
+          </p:spPr>
+          <p:txBody>
+            <a:bodyPr/>
+            <a:lstStyle/>
+            <a:p/>
+          </p:txBody>
+        </p:sp>
+        <p:sp>
+          <p:nvSpPr>
+            <p:cNvPr id="220" name="pl220"/>
             <p:cNvSpPr/>
             <p:nvPr/>
           </p:nvSpPr>
@@ -10441,7 +10567,7 @@
         </p:sp>
         <p:sp>
           <p:nvSpPr>
-            <p:cNvPr id="218" name="pl218"/>
+            <p:cNvPr id="221" name="pl221"/>
             <p:cNvSpPr/>
             <p:nvPr/>
           </p:nvSpPr>
@@ -10481,7 +10607,7 @@
         </p:sp>
         <p:sp>
           <p:nvSpPr>
-            <p:cNvPr id="219" name="pl219"/>
+            <p:cNvPr id="222" name="pl222"/>
             <p:cNvSpPr/>
             <p:nvPr/>
           </p:nvSpPr>
@@ -10521,7 +10647,7 @@
         </p:sp>
         <p:sp>
           <p:nvSpPr>
-            <p:cNvPr id="220" name="pl220"/>
+            <p:cNvPr id="223" name="pl223"/>
             <p:cNvSpPr/>
             <p:nvPr/>
           </p:nvSpPr>
@@ -10561,7 +10687,7 @@
         </p:sp>
         <p:sp>
           <p:nvSpPr>
-            <p:cNvPr id="221" name="pl221"/>
+            <p:cNvPr id="224" name="pl224"/>
             <p:cNvSpPr/>
             <p:nvPr/>
           </p:nvSpPr>
@@ -10601,7 +10727,7 @@
         </p:sp>
         <p:sp>
           <p:nvSpPr>
-            <p:cNvPr id="222" name="pl222"/>
+            <p:cNvPr id="225" name="pl225"/>
             <p:cNvSpPr/>
             <p:nvPr/>
           </p:nvSpPr>
@@ -10641,7 +10767,7 @@
         </p:sp>
         <p:sp>
           <p:nvSpPr>
-            <p:cNvPr id="223" name="pl223"/>
+            <p:cNvPr id="226" name="pl226"/>
             <p:cNvSpPr/>
             <p:nvPr/>
           </p:nvSpPr>
@@ -10681,7 +10807,7 @@
         </p:sp>
         <p:sp>
           <p:nvSpPr>
-            <p:cNvPr id="224" name="tx224"/>
+            <p:cNvPr id="227" name="tx227"/>
             <p:cNvSpPr/>
             <p:nvPr/>
           </p:nvSpPr>
@@ -10724,7 +10850,7 @@
         </p:sp>
         <p:sp>
           <p:nvSpPr>
-            <p:cNvPr id="225" name="tx225"/>
+            <p:cNvPr id="228" name="tx228"/>
             <p:cNvSpPr/>
             <p:nvPr/>
           </p:nvSpPr>
@@ -10767,7 +10893,7 @@
         </p:sp>
         <p:sp>
           <p:nvSpPr>
-            <p:cNvPr id="226" name="tx226"/>
+            <p:cNvPr id="229" name="tx229"/>
             <p:cNvSpPr/>
             <p:nvPr/>
           </p:nvSpPr>
@@ -10810,7 +10936,7 @@
         </p:sp>
         <p:sp>
           <p:nvSpPr>
-            <p:cNvPr id="227" name="tx227"/>
+            <p:cNvPr id="230" name="tx230"/>
             <p:cNvSpPr/>
             <p:nvPr/>
           </p:nvSpPr>
@@ -10853,7 +10979,7 @@
         </p:sp>
         <p:sp>
           <p:nvSpPr>
-            <p:cNvPr id="228" name="tx228"/>
+            <p:cNvPr id="231" name="tx231"/>
             <p:cNvSpPr/>
             <p:nvPr/>
           </p:nvSpPr>
@@ -10896,7 +11022,7 @@
         </p:sp>
         <p:sp>
           <p:nvSpPr>
-            <p:cNvPr id="229" name="tx229"/>
+            <p:cNvPr id="232" name="tx232"/>
             <p:cNvSpPr/>
             <p:nvPr/>
           </p:nvSpPr>
@@ -10939,7 +11065,7 @@
         </p:sp>
         <p:sp>
           <p:nvSpPr>
-            <p:cNvPr id="230" name="tx230"/>
+            <p:cNvPr id="233" name="tx233"/>
             <p:cNvSpPr/>
             <p:nvPr/>
           </p:nvSpPr>
@@ -10982,7 +11108,7 @@
         </p:sp>
         <p:sp>
           <p:nvSpPr>
-            <p:cNvPr id="231" name="rc231"/>
+            <p:cNvPr id="234" name="rc234"/>
             <p:cNvSpPr/>
             <p:nvPr/>
           </p:nvSpPr>
@@ -11008,7 +11134,7 @@
         </p:sp>
         <p:sp>
           <p:nvSpPr>
-            <p:cNvPr id="232" name="rc232"/>
+            <p:cNvPr id="235" name="rc235"/>
             <p:cNvSpPr/>
             <p:nvPr/>
           </p:nvSpPr>
@@ -11034,7 +11160,7 @@
         </p:sp>
         <p:sp>
           <p:nvSpPr>
-            <p:cNvPr id="233" name="pl233"/>
+            <p:cNvPr id="236" name="pl236"/>
             <p:cNvSpPr/>
             <p:nvPr/>
           </p:nvSpPr>
@@ -11074,7 +11200,7 @@
         </p:sp>
         <p:sp>
           <p:nvSpPr>
-            <p:cNvPr id="234" name="pt234"/>
+            <p:cNvPr id="237" name="pt237"/>
             <p:cNvSpPr/>
             <p:nvPr/>
           </p:nvSpPr>
@@ -11109,7 +11235,7 @@
         </p:sp>
         <p:sp>
           <p:nvSpPr>
-            <p:cNvPr id="235" name="rc235"/>
+            <p:cNvPr id="238" name="rc238"/>
             <p:cNvSpPr/>
             <p:nvPr/>
           </p:nvSpPr>
@@ -11135,7 +11261,7 @@
         </p:sp>
         <p:sp>
           <p:nvSpPr>
-            <p:cNvPr id="236" name="pl236"/>
+            <p:cNvPr id="239" name="pl239"/>
             <p:cNvSpPr/>
             <p:nvPr/>
           </p:nvSpPr>
@@ -11175,7 +11301,7 @@
         </p:sp>
         <p:sp>
           <p:nvSpPr>
-            <p:cNvPr id="237" name="pt237"/>
+            <p:cNvPr id="240" name="pt240"/>
             <p:cNvSpPr/>
             <p:nvPr/>
           </p:nvSpPr>
@@ -11210,7 +11336,7 @@
         </p:sp>
         <p:sp>
           <p:nvSpPr>
-            <p:cNvPr id="238" name="rc238"/>
+            <p:cNvPr id="241" name="rc241"/>
             <p:cNvSpPr/>
             <p:nvPr/>
           </p:nvSpPr>
@@ -11236,7 +11362,7 @@
         </p:sp>
         <p:sp>
           <p:nvSpPr>
-            <p:cNvPr id="239" name="pl239"/>
+            <p:cNvPr id="242" name="pl242"/>
             <p:cNvSpPr/>
             <p:nvPr/>
           </p:nvSpPr>
@@ -11276,7 +11402,7 @@
         </p:sp>
         <p:sp>
           <p:nvSpPr>
-            <p:cNvPr id="240" name="pt240"/>
+            <p:cNvPr id="243" name="pt243"/>
             <p:cNvSpPr/>
             <p:nvPr/>
           </p:nvSpPr>
@@ -11311,7 +11437,7 @@
         </p:sp>
         <p:sp>
           <p:nvSpPr>
-            <p:cNvPr id="241" name="rc241"/>
+            <p:cNvPr id="244" name="rc244"/>
             <p:cNvSpPr/>
             <p:nvPr/>
           </p:nvSpPr>
@@ -11337,7 +11463,7 @@
         </p:sp>
         <p:sp>
           <p:nvSpPr>
-            <p:cNvPr id="242" name="pl242"/>
+            <p:cNvPr id="245" name="pl245"/>
             <p:cNvSpPr/>
             <p:nvPr/>
           </p:nvSpPr>
@@ -11377,7 +11503,7 @@
         </p:sp>
         <p:sp>
           <p:nvSpPr>
-            <p:cNvPr id="243" name="pt243"/>
+            <p:cNvPr id="246" name="pt246"/>
             <p:cNvSpPr/>
             <p:nvPr/>
           </p:nvSpPr>
@@ -11412,7 +11538,7 @@
         </p:sp>
         <p:sp>
           <p:nvSpPr>
-            <p:cNvPr id="244" name="tx244"/>
+            <p:cNvPr id="247" name="tx247"/>
             <p:cNvSpPr/>
             <p:nvPr/>
           </p:nvSpPr>
@@ -11455,7 +11581,7 @@
         </p:sp>
         <p:sp>
           <p:nvSpPr>
-            <p:cNvPr id="245" name="tx245"/>
+            <p:cNvPr id="248" name="tx248"/>
             <p:cNvSpPr/>
             <p:nvPr/>
           </p:nvSpPr>
@@ -11498,7 +11624,7 @@
         </p:sp>
         <p:sp>
           <p:nvSpPr>
-            <p:cNvPr id="246" name="tx246"/>
+            <p:cNvPr id="249" name="tx249"/>
             <p:cNvSpPr/>
             <p:nvPr/>
           </p:nvSpPr>
@@ -11541,7 +11667,7 @@
         </p:sp>
         <p:sp>
           <p:nvSpPr>
-            <p:cNvPr id="247" name="tx247"/>
+            <p:cNvPr id="250" name="tx250"/>
             <p:cNvSpPr/>
             <p:nvPr/>
           </p:nvSpPr>
@@ -11584,7 +11710,7 @@
         </p:sp>
         <p:sp>
           <p:nvSpPr>
-            <p:cNvPr id="248" name="tx248"/>
+            <p:cNvPr id="251" name="tx251"/>
             <p:cNvSpPr/>
             <p:nvPr/>
           </p:nvSpPr>
@@ -11627,7 +11753,7 @@
         </p:sp>
         <p:sp>
           <p:nvSpPr>
-            <p:cNvPr id="249" name="tx249"/>
+            <p:cNvPr id="252" name="tx252"/>
             <p:cNvSpPr/>
             <p:nvPr/>
           </p:nvSpPr>
@@ -11670,7 +11796,7 @@
         </p:sp>
         <p:sp>
           <p:nvSpPr>
-            <p:cNvPr id="250" name="tx250"/>
+            <p:cNvPr id="253" name="tx253"/>
             <p:cNvSpPr/>
             <p:nvPr/>
           </p:nvSpPr>
